--- a/AI_ML_Internship_Presentation.pptx
+++ b/AI_ML_Internship_Presentation.pptx
@@ -141,7 +141,7 @@
           <p:cNvPr id="2" name="Title 1">
             <a:extLst>
               <a:ext uri="{FF2B5EF4-FFF2-40B4-BE49-F238E27FC236}">
-                <a16:creationId xmlns:a16="http://schemas.microsoft.com/office/drawing/2014/main" id="{B148B3E5-617D-AABA-AB8C-48E8A045FAC5}"/>
+                <a16:creationId xmlns:a16="http://schemas.microsoft.com/office/drawing/2014/main" id="{61026E0B-89F0-894F-816A-18CFE54A077F}"/>
               </a:ext>
             </a:extLst>
           </p:cNvPr>
@@ -179,7 +179,7 @@
           <p:cNvPr id="3" name="Subtitle 2">
             <a:extLst>
               <a:ext uri="{FF2B5EF4-FFF2-40B4-BE49-F238E27FC236}">
-                <a16:creationId xmlns:a16="http://schemas.microsoft.com/office/drawing/2014/main" id="{D22DAF2E-A7F0-5CFD-8685-DA4ECEE6BEB6}"/>
+                <a16:creationId xmlns:a16="http://schemas.microsoft.com/office/drawing/2014/main" id="{8947822A-C57D-AB33-7297-EC0F74745612}"/>
               </a:ext>
             </a:extLst>
           </p:cNvPr>
@@ -250,7 +250,7 @@
           <p:cNvPr id="4" name="Date Placeholder 3">
             <a:extLst>
               <a:ext uri="{FF2B5EF4-FFF2-40B4-BE49-F238E27FC236}">
-                <a16:creationId xmlns:a16="http://schemas.microsoft.com/office/drawing/2014/main" id="{75A19346-72CD-00CD-8F5B-FE545106E7D1}"/>
+                <a16:creationId xmlns:a16="http://schemas.microsoft.com/office/drawing/2014/main" id="{C26B8C5B-C276-E67A-4A93-4D784CB10315}"/>
               </a:ext>
             </a:extLst>
           </p:cNvPr>
@@ -266,7 +266,7 @@
           <a:bodyPr/>
           <a:lstStyle/>
           <a:p>
-            <a:fld id="{69B11F35-6DAE-4F7D-826C-CA3504C03658}" type="datetimeFigureOut">
+            <a:fld id="{0CE0374D-4F16-40D1-B3D6-2B8EDBFA21BD}" type="datetimeFigureOut">
               <a:rPr lang="en-IN" smtClean="0"/>
               <a:t>11-07-26</a:t>
             </a:fld>
@@ -279,7 +279,7 @@
           <p:cNvPr id="5" name="Footer Placeholder 4">
             <a:extLst>
               <a:ext uri="{FF2B5EF4-FFF2-40B4-BE49-F238E27FC236}">
-                <a16:creationId xmlns:a16="http://schemas.microsoft.com/office/drawing/2014/main" id="{49D12BFB-811B-BA30-D001-D181368D72E7}"/>
+                <a16:creationId xmlns:a16="http://schemas.microsoft.com/office/drawing/2014/main" id="{22947302-318D-CBAC-29A9-64D4DA3D5A77}"/>
               </a:ext>
             </a:extLst>
           </p:cNvPr>
@@ -304,7 +304,7 @@
           <p:cNvPr id="6" name="Slide Number Placeholder 5">
             <a:extLst>
               <a:ext uri="{FF2B5EF4-FFF2-40B4-BE49-F238E27FC236}">
-                <a16:creationId xmlns:a16="http://schemas.microsoft.com/office/drawing/2014/main" id="{B2FF3D24-F053-923E-CB53-840862411703}"/>
+                <a16:creationId xmlns:a16="http://schemas.microsoft.com/office/drawing/2014/main" id="{D7A15147-5DDD-DC2A-6D58-0BA085FA1971}"/>
               </a:ext>
             </a:extLst>
           </p:cNvPr>
@@ -320,7 +320,7 @@
           <a:bodyPr/>
           <a:lstStyle/>
           <a:p>
-            <a:fld id="{DD0861B3-852F-42F1-BDB8-339E4DBCD958}" type="slidenum">
+            <a:fld id="{9625E98B-E1AE-4530-90B0-32E5A3B80207}" type="slidenum">
               <a:rPr lang="en-IN" smtClean="0"/>
               <a:t>‹#›</a:t>
             </a:fld>
@@ -331,7 +331,7 @@
     </p:spTree>
     <p:extLst>
       <p:ext uri="{BB962C8B-B14F-4D97-AF65-F5344CB8AC3E}">
-        <p14:creationId xmlns:p14="http://schemas.microsoft.com/office/powerpoint/2010/main" val="3847098179"/>
+        <p14:creationId xmlns:p14="http://schemas.microsoft.com/office/powerpoint/2010/main" val="2064075050"/>
       </p:ext>
     </p:extLst>
   </p:cSld>
@@ -363,7 +363,7 @@
           <p:cNvPr id="2" name="Title 1">
             <a:extLst>
               <a:ext uri="{FF2B5EF4-FFF2-40B4-BE49-F238E27FC236}">
-                <a16:creationId xmlns:a16="http://schemas.microsoft.com/office/drawing/2014/main" id="{7FE5EFDC-705C-FC9B-D946-441E937104C4}"/>
+                <a16:creationId xmlns:a16="http://schemas.microsoft.com/office/drawing/2014/main" id="{C97BFE4A-2936-DC74-7D7E-64809DBFE8FB}"/>
               </a:ext>
             </a:extLst>
           </p:cNvPr>
@@ -392,7 +392,7 @@
           <p:cNvPr id="3" name="Vertical Text Placeholder 2">
             <a:extLst>
               <a:ext uri="{FF2B5EF4-FFF2-40B4-BE49-F238E27FC236}">
-                <a16:creationId xmlns:a16="http://schemas.microsoft.com/office/drawing/2014/main" id="{B38E4B87-B5E9-5BC4-2BD2-03914B7A2342}"/>
+                <a16:creationId xmlns:a16="http://schemas.microsoft.com/office/drawing/2014/main" id="{C5977CB4-969D-D7F6-6DCC-25FC2C477B34}"/>
               </a:ext>
             </a:extLst>
           </p:cNvPr>
@@ -450,7 +450,7 @@
           <p:cNvPr id="4" name="Date Placeholder 3">
             <a:extLst>
               <a:ext uri="{FF2B5EF4-FFF2-40B4-BE49-F238E27FC236}">
-                <a16:creationId xmlns:a16="http://schemas.microsoft.com/office/drawing/2014/main" id="{C4DB7569-C8AB-CB36-AA6D-3DAF17DB20C4}"/>
+                <a16:creationId xmlns:a16="http://schemas.microsoft.com/office/drawing/2014/main" id="{F55D289A-3DB0-9ED8-FA01-A194FC57C7A4}"/>
               </a:ext>
             </a:extLst>
           </p:cNvPr>
@@ -466,7 +466,7 @@
           <a:bodyPr/>
           <a:lstStyle/>
           <a:p>
-            <a:fld id="{69B11F35-6DAE-4F7D-826C-CA3504C03658}" type="datetimeFigureOut">
+            <a:fld id="{0CE0374D-4F16-40D1-B3D6-2B8EDBFA21BD}" type="datetimeFigureOut">
               <a:rPr lang="en-IN" smtClean="0"/>
               <a:t>11-07-26</a:t>
             </a:fld>
@@ -479,7 +479,7 @@
           <p:cNvPr id="5" name="Footer Placeholder 4">
             <a:extLst>
               <a:ext uri="{FF2B5EF4-FFF2-40B4-BE49-F238E27FC236}">
-                <a16:creationId xmlns:a16="http://schemas.microsoft.com/office/drawing/2014/main" id="{9F1A7085-4748-192D-6423-D7D03C2D0504}"/>
+                <a16:creationId xmlns:a16="http://schemas.microsoft.com/office/drawing/2014/main" id="{37359CE8-3339-4A4B-681E-41B4498557B6}"/>
               </a:ext>
             </a:extLst>
           </p:cNvPr>
@@ -504,7 +504,7 @@
           <p:cNvPr id="6" name="Slide Number Placeholder 5">
             <a:extLst>
               <a:ext uri="{FF2B5EF4-FFF2-40B4-BE49-F238E27FC236}">
-                <a16:creationId xmlns:a16="http://schemas.microsoft.com/office/drawing/2014/main" id="{0E161551-2CE5-53B1-885B-830AE92359D6}"/>
+                <a16:creationId xmlns:a16="http://schemas.microsoft.com/office/drawing/2014/main" id="{4C980FE6-F3AF-B62A-0DEA-06EDF1B4651A}"/>
               </a:ext>
             </a:extLst>
           </p:cNvPr>
@@ -520,7 +520,7 @@
           <a:bodyPr/>
           <a:lstStyle/>
           <a:p>
-            <a:fld id="{DD0861B3-852F-42F1-BDB8-339E4DBCD958}" type="slidenum">
+            <a:fld id="{9625E98B-E1AE-4530-90B0-32E5A3B80207}" type="slidenum">
               <a:rPr lang="en-IN" smtClean="0"/>
               <a:t>‹#›</a:t>
             </a:fld>
@@ -531,7 +531,7 @@
     </p:spTree>
     <p:extLst>
       <p:ext uri="{BB962C8B-B14F-4D97-AF65-F5344CB8AC3E}">
-        <p14:creationId xmlns:p14="http://schemas.microsoft.com/office/powerpoint/2010/main" val="4257475553"/>
+        <p14:creationId xmlns:p14="http://schemas.microsoft.com/office/powerpoint/2010/main" val="3300137653"/>
       </p:ext>
     </p:extLst>
   </p:cSld>
@@ -563,7 +563,7 @@
           <p:cNvPr id="2" name="Vertical Title 1">
             <a:extLst>
               <a:ext uri="{FF2B5EF4-FFF2-40B4-BE49-F238E27FC236}">
-                <a16:creationId xmlns:a16="http://schemas.microsoft.com/office/drawing/2014/main" id="{ABDD181F-6145-E9E2-E8AD-3AEF95F700F3}"/>
+                <a16:creationId xmlns:a16="http://schemas.microsoft.com/office/drawing/2014/main" id="{AFE6787B-DAC7-A3C6-24A4-65BF529CA7A1}"/>
               </a:ext>
             </a:extLst>
           </p:cNvPr>
@@ -597,7 +597,7 @@
           <p:cNvPr id="3" name="Vertical Text Placeholder 2">
             <a:extLst>
               <a:ext uri="{FF2B5EF4-FFF2-40B4-BE49-F238E27FC236}">
-                <a16:creationId xmlns:a16="http://schemas.microsoft.com/office/drawing/2014/main" id="{5873BF7A-7A41-4C57-0611-878C5AD3ECDF}"/>
+                <a16:creationId xmlns:a16="http://schemas.microsoft.com/office/drawing/2014/main" id="{C1C40AAF-6B70-9B86-3BE6-D7B9CFCE0294}"/>
               </a:ext>
             </a:extLst>
           </p:cNvPr>
@@ -660,7 +660,7 @@
           <p:cNvPr id="4" name="Date Placeholder 3">
             <a:extLst>
               <a:ext uri="{FF2B5EF4-FFF2-40B4-BE49-F238E27FC236}">
-                <a16:creationId xmlns:a16="http://schemas.microsoft.com/office/drawing/2014/main" id="{D30E5BC4-61C5-6211-CB5F-2249C1FBEE4D}"/>
+                <a16:creationId xmlns:a16="http://schemas.microsoft.com/office/drawing/2014/main" id="{02FFC534-8DDE-B5B1-D0E3-8E9039935C4F}"/>
               </a:ext>
             </a:extLst>
           </p:cNvPr>
@@ -676,7 +676,7 @@
           <a:bodyPr/>
           <a:lstStyle/>
           <a:p>
-            <a:fld id="{69B11F35-6DAE-4F7D-826C-CA3504C03658}" type="datetimeFigureOut">
+            <a:fld id="{0CE0374D-4F16-40D1-B3D6-2B8EDBFA21BD}" type="datetimeFigureOut">
               <a:rPr lang="en-IN" smtClean="0"/>
               <a:t>11-07-26</a:t>
             </a:fld>
@@ -689,7 +689,7 @@
           <p:cNvPr id="5" name="Footer Placeholder 4">
             <a:extLst>
               <a:ext uri="{FF2B5EF4-FFF2-40B4-BE49-F238E27FC236}">
-                <a16:creationId xmlns:a16="http://schemas.microsoft.com/office/drawing/2014/main" id="{413D6824-4CD2-D60C-0356-DD0FAE3CBCED}"/>
+                <a16:creationId xmlns:a16="http://schemas.microsoft.com/office/drawing/2014/main" id="{FAE7B1AC-5982-1EF3-9930-68AE33736B7C}"/>
               </a:ext>
             </a:extLst>
           </p:cNvPr>
@@ -714,7 +714,7 @@
           <p:cNvPr id="6" name="Slide Number Placeholder 5">
             <a:extLst>
               <a:ext uri="{FF2B5EF4-FFF2-40B4-BE49-F238E27FC236}">
-                <a16:creationId xmlns:a16="http://schemas.microsoft.com/office/drawing/2014/main" id="{D5E11B53-9667-AC27-1E06-BD46AA92C08A}"/>
+                <a16:creationId xmlns:a16="http://schemas.microsoft.com/office/drawing/2014/main" id="{9A76AD8D-2563-5E3B-12DD-D3D30DB66818}"/>
               </a:ext>
             </a:extLst>
           </p:cNvPr>
@@ -730,7 +730,7 @@
           <a:bodyPr/>
           <a:lstStyle/>
           <a:p>
-            <a:fld id="{DD0861B3-852F-42F1-BDB8-339E4DBCD958}" type="slidenum">
+            <a:fld id="{9625E98B-E1AE-4530-90B0-32E5A3B80207}" type="slidenum">
               <a:rPr lang="en-IN" smtClean="0"/>
               <a:t>‹#›</a:t>
             </a:fld>
@@ -741,7 +741,7 @@
     </p:spTree>
     <p:extLst>
       <p:ext uri="{BB962C8B-B14F-4D97-AF65-F5344CB8AC3E}">
-        <p14:creationId xmlns:p14="http://schemas.microsoft.com/office/powerpoint/2010/main" val="986619376"/>
+        <p14:creationId xmlns:p14="http://schemas.microsoft.com/office/powerpoint/2010/main" val="887601416"/>
       </p:ext>
     </p:extLst>
   </p:cSld>
@@ -773,7 +773,7 @@
           <p:cNvPr id="2" name="Title 1">
             <a:extLst>
               <a:ext uri="{FF2B5EF4-FFF2-40B4-BE49-F238E27FC236}">
-                <a16:creationId xmlns:a16="http://schemas.microsoft.com/office/drawing/2014/main" id="{B0FD664D-2B4B-822C-24B1-7FD9530387A3}"/>
+                <a16:creationId xmlns:a16="http://schemas.microsoft.com/office/drawing/2014/main" id="{FCD025DE-76B9-5FF3-6D13-AE1C5B1DC8BC}"/>
               </a:ext>
             </a:extLst>
           </p:cNvPr>
@@ -802,7 +802,7 @@
           <p:cNvPr id="3" name="Content Placeholder 2">
             <a:extLst>
               <a:ext uri="{FF2B5EF4-FFF2-40B4-BE49-F238E27FC236}">
-                <a16:creationId xmlns:a16="http://schemas.microsoft.com/office/drawing/2014/main" id="{5520273D-BAFF-8158-5B7C-8CF6D2ADA4E9}"/>
+                <a16:creationId xmlns:a16="http://schemas.microsoft.com/office/drawing/2014/main" id="{679DACEC-5B2E-DFC9-C446-F22FC9F24397}"/>
               </a:ext>
             </a:extLst>
           </p:cNvPr>
@@ -860,7 +860,7 @@
           <p:cNvPr id="4" name="Date Placeholder 3">
             <a:extLst>
               <a:ext uri="{FF2B5EF4-FFF2-40B4-BE49-F238E27FC236}">
-                <a16:creationId xmlns:a16="http://schemas.microsoft.com/office/drawing/2014/main" id="{CC30C31C-4FF6-923F-FE45-7959EF174B56}"/>
+                <a16:creationId xmlns:a16="http://schemas.microsoft.com/office/drawing/2014/main" id="{60E387F0-6C5E-47F4-8FF5-BDA91CD8AB1C}"/>
               </a:ext>
             </a:extLst>
           </p:cNvPr>
@@ -876,7 +876,7 @@
           <a:bodyPr/>
           <a:lstStyle/>
           <a:p>
-            <a:fld id="{69B11F35-6DAE-4F7D-826C-CA3504C03658}" type="datetimeFigureOut">
+            <a:fld id="{0CE0374D-4F16-40D1-B3D6-2B8EDBFA21BD}" type="datetimeFigureOut">
               <a:rPr lang="en-IN" smtClean="0"/>
               <a:t>11-07-26</a:t>
             </a:fld>
@@ -889,7 +889,7 @@
           <p:cNvPr id="5" name="Footer Placeholder 4">
             <a:extLst>
               <a:ext uri="{FF2B5EF4-FFF2-40B4-BE49-F238E27FC236}">
-                <a16:creationId xmlns:a16="http://schemas.microsoft.com/office/drawing/2014/main" id="{36B3710C-7A33-FA78-A025-EFCCC40E34C8}"/>
+                <a16:creationId xmlns:a16="http://schemas.microsoft.com/office/drawing/2014/main" id="{0B6DB0CC-68B7-13ED-A478-D35CBCAFC4EF}"/>
               </a:ext>
             </a:extLst>
           </p:cNvPr>
@@ -914,7 +914,7 @@
           <p:cNvPr id="6" name="Slide Number Placeholder 5">
             <a:extLst>
               <a:ext uri="{FF2B5EF4-FFF2-40B4-BE49-F238E27FC236}">
-                <a16:creationId xmlns:a16="http://schemas.microsoft.com/office/drawing/2014/main" id="{6FD8A055-35F8-6827-A0FF-1BBC4B0368AD}"/>
+                <a16:creationId xmlns:a16="http://schemas.microsoft.com/office/drawing/2014/main" id="{009EAFB4-AEF5-723E-C7E2-A7E4B8CB1482}"/>
               </a:ext>
             </a:extLst>
           </p:cNvPr>
@@ -930,7 +930,7 @@
           <a:bodyPr/>
           <a:lstStyle/>
           <a:p>
-            <a:fld id="{DD0861B3-852F-42F1-BDB8-339E4DBCD958}" type="slidenum">
+            <a:fld id="{9625E98B-E1AE-4530-90B0-32E5A3B80207}" type="slidenum">
               <a:rPr lang="en-IN" smtClean="0"/>
               <a:t>‹#›</a:t>
             </a:fld>
@@ -941,7 +941,7 @@
     </p:spTree>
     <p:extLst>
       <p:ext uri="{BB962C8B-B14F-4D97-AF65-F5344CB8AC3E}">
-        <p14:creationId xmlns:p14="http://schemas.microsoft.com/office/powerpoint/2010/main" val="949955065"/>
+        <p14:creationId xmlns:p14="http://schemas.microsoft.com/office/powerpoint/2010/main" val="3141056899"/>
       </p:ext>
     </p:extLst>
   </p:cSld>
@@ -973,7 +973,7 @@
           <p:cNvPr id="2" name="Title 1">
             <a:extLst>
               <a:ext uri="{FF2B5EF4-FFF2-40B4-BE49-F238E27FC236}">
-                <a16:creationId xmlns:a16="http://schemas.microsoft.com/office/drawing/2014/main" id="{C2905927-35A3-65B0-B6A0-55B205A0DED2}"/>
+                <a16:creationId xmlns:a16="http://schemas.microsoft.com/office/drawing/2014/main" id="{B3E86102-A2C4-1D15-5BE3-CB696F383ECE}"/>
               </a:ext>
             </a:extLst>
           </p:cNvPr>
@@ -1011,7 +1011,7 @@
           <p:cNvPr id="3" name="Text Placeholder 2">
             <a:extLst>
               <a:ext uri="{FF2B5EF4-FFF2-40B4-BE49-F238E27FC236}">
-                <a16:creationId xmlns:a16="http://schemas.microsoft.com/office/drawing/2014/main" id="{518BBA48-CB04-D117-D736-ACA0955B62C6}"/>
+                <a16:creationId xmlns:a16="http://schemas.microsoft.com/office/drawing/2014/main" id="{35EC91D5-1CE2-0C1A-AA94-F39CBEC41105}"/>
               </a:ext>
             </a:extLst>
           </p:cNvPr>
@@ -1136,7 +1136,7 @@
           <p:cNvPr id="4" name="Date Placeholder 3">
             <a:extLst>
               <a:ext uri="{FF2B5EF4-FFF2-40B4-BE49-F238E27FC236}">
-                <a16:creationId xmlns:a16="http://schemas.microsoft.com/office/drawing/2014/main" id="{7E754758-A49C-5346-4975-70C379EC6073}"/>
+                <a16:creationId xmlns:a16="http://schemas.microsoft.com/office/drawing/2014/main" id="{C11747BC-C469-AF55-4056-436A3B9BE5CA}"/>
               </a:ext>
             </a:extLst>
           </p:cNvPr>
@@ -1152,7 +1152,7 @@
           <a:bodyPr/>
           <a:lstStyle/>
           <a:p>
-            <a:fld id="{69B11F35-6DAE-4F7D-826C-CA3504C03658}" type="datetimeFigureOut">
+            <a:fld id="{0CE0374D-4F16-40D1-B3D6-2B8EDBFA21BD}" type="datetimeFigureOut">
               <a:rPr lang="en-IN" smtClean="0"/>
               <a:t>11-07-26</a:t>
             </a:fld>
@@ -1165,7 +1165,7 @@
           <p:cNvPr id="5" name="Footer Placeholder 4">
             <a:extLst>
               <a:ext uri="{FF2B5EF4-FFF2-40B4-BE49-F238E27FC236}">
-                <a16:creationId xmlns:a16="http://schemas.microsoft.com/office/drawing/2014/main" id="{67ABE281-3C0B-C5B7-2908-E818BC8A48C5}"/>
+                <a16:creationId xmlns:a16="http://schemas.microsoft.com/office/drawing/2014/main" id="{0A83CE74-E87F-E193-322C-7EFC86B56201}"/>
               </a:ext>
             </a:extLst>
           </p:cNvPr>
@@ -1190,7 +1190,7 @@
           <p:cNvPr id="6" name="Slide Number Placeholder 5">
             <a:extLst>
               <a:ext uri="{FF2B5EF4-FFF2-40B4-BE49-F238E27FC236}">
-                <a16:creationId xmlns:a16="http://schemas.microsoft.com/office/drawing/2014/main" id="{823A43F5-BB2C-04FE-430E-7A9E34944180}"/>
+                <a16:creationId xmlns:a16="http://schemas.microsoft.com/office/drawing/2014/main" id="{540A94F6-325D-EDC2-5684-2811108008E7}"/>
               </a:ext>
             </a:extLst>
           </p:cNvPr>
@@ -1206,7 +1206,7 @@
           <a:bodyPr/>
           <a:lstStyle/>
           <a:p>
-            <a:fld id="{DD0861B3-852F-42F1-BDB8-339E4DBCD958}" type="slidenum">
+            <a:fld id="{9625E98B-E1AE-4530-90B0-32E5A3B80207}" type="slidenum">
               <a:rPr lang="en-IN" smtClean="0"/>
               <a:t>‹#›</a:t>
             </a:fld>
@@ -1217,7 +1217,7 @@
     </p:spTree>
     <p:extLst>
       <p:ext uri="{BB962C8B-B14F-4D97-AF65-F5344CB8AC3E}">
-        <p14:creationId xmlns:p14="http://schemas.microsoft.com/office/powerpoint/2010/main" val="987696017"/>
+        <p14:creationId xmlns:p14="http://schemas.microsoft.com/office/powerpoint/2010/main" val="1320966632"/>
       </p:ext>
     </p:extLst>
   </p:cSld>
@@ -1249,7 +1249,7 @@
           <p:cNvPr id="2" name="Title 1">
             <a:extLst>
               <a:ext uri="{FF2B5EF4-FFF2-40B4-BE49-F238E27FC236}">
-                <a16:creationId xmlns:a16="http://schemas.microsoft.com/office/drawing/2014/main" id="{C53B4BCF-516F-0465-16E2-62AD62666AA9}"/>
+                <a16:creationId xmlns:a16="http://schemas.microsoft.com/office/drawing/2014/main" id="{6F916FBC-D919-3B9C-85EF-DF6BE898C89C}"/>
               </a:ext>
             </a:extLst>
           </p:cNvPr>
@@ -1278,7 +1278,7 @@
           <p:cNvPr id="3" name="Content Placeholder 2">
             <a:extLst>
               <a:ext uri="{FF2B5EF4-FFF2-40B4-BE49-F238E27FC236}">
-                <a16:creationId xmlns:a16="http://schemas.microsoft.com/office/drawing/2014/main" id="{495FCACC-188E-2489-A89A-A2E43070A6C3}"/>
+                <a16:creationId xmlns:a16="http://schemas.microsoft.com/office/drawing/2014/main" id="{644A6AAF-3EA2-F35C-6846-605CEF07EB79}"/>
               </a:ext>
             </a:extLst>
           </p:cNvPr>
@@ -1341,7 +1341,7 @@
           <p:cNvPr id="4" name="Content Placeholder 3">
             <a:extLst>
               <a:ext uri="{FF2B5EF4-FFF2-40B4-BE49-F238E27FC236}">
-                <a16:creationId xmlns:a16="http://schemas.microsoft.com/office/drawing/2014/main" id="{4CC9D0F5-49C5-F807-326B-72090AFFFB59}"/>
+                <a16:creationId xmlns:a16="http://schemas.microsoft.com/office/drawing/2014/main" id="{735DA1A0-F14C-CBB8-333D-F976FD8CEA38}"/>
               </a:ext>
             </a:extLst>
           </p:cNvPr>
@@ -1404,7 +1404,7 @@
           <p:cNvPr id="5" name="Date Placeholder 4">
             <a:extLst>
               <a:ext uri="{FF2B5EF4-FFF2-40B4-BE49-F238E27FC236}">
-                <a16:creationId xmlns:a16="http://schemas.microsoft.com/office/drawing/2014/main" id="{8611ACCE-340C-FAD5-5932-674D8313488C}"/>
+                <a16:creationId xmlns:a16="http://schemas.microsoft.com/office/drawing/2014/main" id="{E3F413BE-9FF3-A356-0C61-970552BF5845}"/>
               </a:ext>
             </a:extLst>
           </p:cNvPr>
@@ -1420,7 +1420,7 @@
           <a:bodyPr/>
           <a:lstStyle/>
           <a:p>
-            <a:fld id="{69B11F35-6DAE-4F7D-826C-CA3504C03658}" type="datetimeFigureOut">
+            <a:fld id="{0CE0374D-4F16-40D1-B3D6-2B8EDBFA21BD}" type="datetimeFigureOut">
               <a:rPr lang="en-IN" smtClean="0"/>
               <a:t>11-07-26</a:t>
             </a:fld>
@@ -1433,7 +1433,7 @@
           <p:cNvPr id="6" name="Footer Placeholder 5">
             <a:extLst>
               <a:ext uri="{FF2B5EF4-FFF2-40B4-BE49-F238E27FC236}">
-                <a16:creationId xmlns:a16="http://schemas.microsoft.com/office/drawing/2014/main" id="{46A230FF-7A54-FD2F-75AE-ECABEB7EB543}"/>
+                <a16:creationId xmlns:a16="http://schemas.microsoft.com/office/drawing/2014/main" id="{7166ABAC-2543-BC99-087C-FA3D49425546}"/>
               </a:ext>
             </a:extLst>
           </p:cNvPr>
@@ -1458,7 +1458,7 @@
           <p:cNvPr id="7" name="Slide Number Placeholder 6">
             <a:extLst>
               <a:ext uri="{FF2B5EF4-FFF2-40B4-BE49-F238E27FC236}">
-                <a16:creationId xmlns:a16="http://schemas.microsoft.com/office/drawing/2014/main" id="{2BEF162B-9D8A-EDCA-DA2A-7E694BA45B53}"/>
+                <a16:creationId xmlns:a16="http://schemas.microsoft.com/office/drawing/2014/main" id="{01CC3A40-9E61-72C9-818D-8058C89C62F8}"/>
               </a:ext>
             </a:extLst>
           </p:cNvPr>
@@ -1474,7 +1474,7 @@
           <a:bodyPr/>
           <a:lstStyle/>
           <a:p>
-            <a:fld id="{DD0861B3-852F-42F1-BDB8-339E4DBCD958}" type="slidenum">
+            <a:fld id="{9625E98B-E1AE-4530-90B0-32E5A3B80207}" type="slidenum">
               <a:rPr lang="en-IN" smtClean="0"/>
               <a:t>‹#›</a:t>
             </a:fld>
@@ -1485,7 +1485,7 @@
     </p:spTree>
     <p:extLst>
       <p:ext uri="{BB962C8B-B14F-4D97-AF65-F5344CB8AC3E}">
-        <p14:creationId xmlns:p14="http://schemas.microsoft.com/office/powerpoint/2010/main" val="1864136528"/>
+        <p14:creationId xmlns:p14="http://schemas.microsoft.com/office/powerpoint/2010/main" val="1338626336"/>
       </p:ext>
     </p:extLst>
   </p:cSld>
@@ -1517,7 +1517,7 @@
           <p:cNvPr id="2" name="Title 1">
             <a:extLst>
               <a:ext uri="{FF2B5EF4-FFF2-40B4-BE49-F238E27FC236}">
-                <a16:creationId xmlns:a16="http://schemas.microsoft.com/office/drawing/2014/main" id="{AA097D8B-7B4B-06B4-C82F-C272B2A88929}"/>
+                <a16:creationId xmlns:a16="http://schemas.microsoft.com/office/drawing/2014/main" id="{E79AEC0C-DCF1-E0AB-D3E4-D150C3A93777}"/>
               </a:ext>
             </a:extLst>
           </p:cNvPr>
@@ -1551,7 +1551,7 @@
           <p:cNvPr id="3" name="Text Placeholder 2">
             <a:extLst>
               <a:ext uri="{FF2B5EF4-FFF2-40B4-BE49-F238E27FC236}">
-                <a16:creationId xmlns:a16="http://schemas.microsoft.com/office/drawing/2014/main" id="{23CBF7DC-C248-C890-E8A5-23D43FB6EF7C}"/>
+                <a16:creationId xmlns:a16="http://schemas.microsoft.com/office/drawing/2014/main" id="{8CCBA895-6AF1-5D02-52B2-92A064544F70}"/>
               </a:ext>
             </a:extLst>
           </p:cNvPr>
@@ -1622,7 +1622,7 @@
           <p:cNvPr id="4" name="Content Placeholder 3">
             <a:extLst>
               <a:ext uri="{FF2B5EF4-FFF2-40B4-BE49-F238E27FC236}">
-                <a16:creationId xmlns:a16="http://schemas.microsoft.com/office/drawing/2014/main" id="{A2329CF2-7B2D-8560-1B7F-A186E5AAE5B8}"/>
+                <a16:creationId xmlns:a16="http://schemas.microsoft.com/office/drawing/2014/main" id="{C0FF6344-462D-55EC-7BBB-DEAADD851652}"/>
               </a:ext>
             </a:extLst>
           </p:cNvPr>
@@ -1685,7 +1685,7 @@
           <p:cNvPr id="5" name="Text Placeholder 4">
             <a:extLst>
               <a:ext uri="{FF2B5EF4-FFF2-40B4-BE49-F238E27FC236}">
-                <a16:creationId xmlns:a16="http://schemas.microsoft.com/office/drawing/2014/main" id="{EAE6AA16-4EEA-85EF-DDD1-C02F9C0015CD}"/>
+                <a16:creationId xmlns:a16="http://schemas.microsoft.com/office/drawing/2014/main" id="{9174A051-9048-11D0-C6C0-06047F43A35F}"/>
               </a:ext>
             </a:extLst>
           </p:cNvPr>
@@ -1756,7 +1756,7 @@
           <p:cNvPr id="6" name="Content Placeholder 5">
             <a:extLst>
               <a:ext uri="{FF2B5EF4-FFF2-40B4-BE49-F238E27FC236}">
-                <a16:creationId xmlns:a16="http://schemas.microsoft.com/office/drawing/2014/main" id="{1626DBD5-5998-E2B5-A8DF-A985262D146B}"/>
+                <a16:creationId xmlns:a16="http://schemas.microsoft.com/office/drawing/2014/main" id="{01C3B1F0-C78F-24B1-44A3-C6FF7FF9CC9C}"/>
               </a:ext>
             </a:extLst>
           </p:cNvPr>
@@ -1819,7 +1819,7 @@
           <p:cNvPr id="7" name="Date Placeholder 6">
             <a:extLst>
               <a:ext uri="{FF2B5EF4-FFF2-40B4-BE49-F238E27FC236}">
-                <a16:creationId xmlns:a16="http://schemas.microsoft.com/office/drawing/2014/main" id="{6BB7C447-4F50-8FAC-1DBC-224B763AF1F6}"/>
+                <a16:creationId xmlns:a16="http://schemas.microsoft.com/office/drawing/2014/main" id="{D95C5DF6-E3C3-E49B-1B58-B53A64CD7576}"/>
               </a:ext>
             </a:extLst>
           </p:cNvPr>
@@ -1835,7 +1835,7 @@
           <a:bodyPr/>
           <a:lstStyle/>
           <a:p>
-            <a:fld id="{69B11F35-6DAE-4F7D-826C-CA3504C03658}" type="datetimeFigureOut">
+            <a:fld id="{0CE0374D-4F16-40D1-B3D6-2B8EDBFA21BD}" type="datetimeFigureOut">
               <a:rPr lang="en-IN" smtClean="0"/>
               <a:t>11-07-26</a:t>
             </a:fld>
@@ -1848,7 +1848,7 @@
           <p:cNvPr id="8" name="Footer Placeholder 7">
             <a:extLst>
               <a:ext uri="{FF2B5EF4-FFF2-40B4-BE49-F238E27FC236}">
-                <a16:creationId xmlns:a16="http://schemas.microsoft.com/office/drawing/2014/main" id="{62F13FDC-2EDA-F2B8-D372-AC348EC9486F}"/>
+                <a16:creationId xmlns:a16="http://schemas.microsoft.com/office/drawing/2014/main" id="{A7DEB065-5834-7A2A-C346-B6668DCA7149}"/>
               </a:ext>
             </a:extLst>
           </p:cNvPr>
@@ -1873,7 +1873,7 @@
           <p:cNvPr id="9" name="Slide Number Placeholder 8">
             <a:extLst>
               <a:ext uri="{FF2B5EF4-FFF2-40B4-BE49-F238E27FC236}">
-                <a16:creationId xmlns:a16="http://schemas.microsoft.com/office/drawing/2014/main" id="{846A2028-2C98-073D-0FC3-D9DD5352BD0F}"/>
+                <a16:creationId xmlns:a16="http://schemas.microsoft.com/office/drawing/2014/main" id="{6E800799-66A4-509D-7CBE-C4FDC9C5F27C}"/>
               </a:ext>
             </a:extLst>
           </p:cNvPr>
@@ -1889,7 +1889,7 @@
           <a:bodyPr/>
           <a:lstStyle/>
           <a:p>
-            <a:fld id="{DD0861B3-852F-42F1-BDB8-339E4DBCD958}" type="slidenum">
+            <a:fld id="{9625E98B-E1AE-4530-90B0-32E5A3B80207}" type="slidenum">
               <a:rPr lang="en-IN" smtClean="0"/>
               <a:t>‹#›</a:t>
             </a:fld>
@@ -1900,7 +1900,7 @@
     </p:spTree>
     <p:extLst>
       <p:ext uri="{BB962C8B-B14F-4D97-AF65-F5344CB8AC3E}">
-        <p14:creationId xmlns:p14="http://schemas.microsoft.com/office/powerpoint/2010/main" val="3924639640"/>
+        <p14:creationId xmlns:p14="http://schemas.microsoft.com/office/powerpoint/2010/main" val="3946535922"/>
       </p:ext>
     </p:extLst>
   </p:cSld>
@@ -1932,7 +1932,7 @@
           <p:cNvPr id="2" name="Title 1">
             <a:extLst>
               <a:ext uri="{FF2B5EF4-FFF2-40B4-BE49-F238E27FC236}">
-                <a16:creationId xmlns:a16="http://schemas.microsoft.com/office/drawing/2014/main" id="{6F8EC6B0-6DA9-F8D8-CC5E-6F748B2C984A}"/>
+                <a16:creationId xmlns:a16="http://schemas.microsoft.com/office/drawing/2014/main" id="{B526095E-E06D-F17B-889D-D047414A3156}"/>
               </a:ext>
             </a:extLst>
           </p:cNvPr>
@@ -1961,7 +1961,7 @@
           <p:cNvPr id="3" name="Date Placeholder 2">
             <a:extLst>
               <a:ext uri="{FF2B5EF4-FFF2-40B4-BE49-F238E27FC236}">
-                <a16:creationId xmlns:a16="http://schemas.microsoft.com/office/drawing/2014/main" id="{AFB6AE1C-6505-592D-3C1E-C901A2C2CD83}"/>
+                <a16:creationId xmlns:a16="http://schemas.microsoft.com/office/drawing/2014/main" id="{6901C123-CE8C-332B-82E1-2CC7D852708B}"/>
               </a:ext>
             </a:extLst>
           </p:cNvPr>
@@ -1977,7 +1977,7 @@
           <a:bodyPr/>
           <a:lstStyle/>
           <a:p>
-            <a:fld id="{69B11F35-6DAE-4F7D-826C-CA3504C03658}" type="datetimeFigureOut">
+            <a:fld id="{0CE0374D-4F16-40D1-B3D6-2B8EDBFA21BD}" type="datetimeFigureOut">
               <a:rPr lang="en-IN" smtClean="0"/>
               <a:t>11-07-26</a:t>
             </a:fld>
@@ -1990,7 +1990,7 @@
           <p:cNvPr id="4" name="Footer Placeholder 3">
             <a:extLst>
               <a:ext uri="{FF2B5EF4-FFF2-40B4-BE49-F238E27FC236}">
-                <a16:creationId xmlns:a16="http://schemas.microsoft.com/office/drawing/2014/main" id="{06543A60-C225-8C14-0401-5697FF6FBE0A}"/>
+                <a16:creationId xmlns:a16="http://schemas.microsoft.com/office/drawing/2014/main" id="{C2701A7F-87AA-F104-58ED-16CE03733461}"/>
               </a:ext>
             </a:extLst>
           </p:cNvPr>
@@ -2015,7 +2015,7 @@
           <p:cNvPr id="5" name="Slide Number Placeholder 4">
             <a:extLst>
               <a:ext uri="{FF2B5EF4-FFF2-40B4-BE49-F238E27FC236}">
-                <a16:creationId xmlns:a16="http://schemas.microsoft.com/office/drawing/2014/main" id="{72B76D73-2854-3842-FD9A-EF077CC82ACC}"/>
+                <a16:creationId xmlns:a16="http://schemas.microsoft.com/office/drawing/2014/main" id="{4F66E6A0-8ED5-4FE9-8641-6A847962A3B5}"/>
               </a:ext>
             </a:extLst>
           </p:cNvPr>
@@ -2031,7 +2031,7 @@
           <a:bodyPr/>
           <a:lstStyle/>
           <a:p>
-            <a:fld id="{DD0861B3-852F-42F1-BDB8-339E4DBCD958}" type="slidenum">
+            <a:fld id="{9625E98B-E1AE-4530-90B0-32E5A3B80207}" type="slidenum">
               <a:rPr lang="en-IN" smtClean="0"/>
               <a:t>‹#›</a:t>
             </a:fld>
@@ -2042,7 +2042,7 @@
     </p:spTree>
     <p:extLst>
       <p:ext uri="{BB962C8B-B14F-4D97-AF65-F5344CB8AC3E}">
-        <p14:creationId xmlns:p14="http://schemas.microsoft.com/office/powerpoint/2010/main" val="1904007618"/>
+        <p14:creationId xmlns:p14="http://schemas.microsoft.com/office/powerpoint/2010/main" val="126294528"/>
       </p:ext>
     </p:extLst>
   </p:cSld>
@@ -2074,7 +2074,7 @@
           <p:cNvPr id="2" name="Date Placeholder 1">
             <a:extLst>
               <a:ext uri="{FF2B5EF4-FFF2-40B4-BE49-F238E27FC236}">
-                <a16:creationId xmlns:a16="http://schemas.microsoft.com/office/drawing/2014/main" id="{F7B992AE-7BC7-73D9-4E6F-31B72973E672}"/>
+                <a16:creationId xmlns:a16="http://schemas.microsoft.com/office/drawing/2014/main" id="{FD29D5B6-E2D2-A45A-C71A-B316749C645E}"/>
               </a:ext>
             </a:extLst>
           </p:cNvPr>
@@ -2090,7 +2090,7 @@
           <a:bodyPr/>
           <a:lstStyle/>
           <a:p>
-            <a:fld id="{69B11F35-6DAE-4F7D-826C-CA3504C03658}" type="datetimeFigureOut">
+            <a:fld id="{0CE0374D-4F16-40D1-B3D6-2B8EDBFA21BD}" type="datetimeFigureOut">
               <a:rPr lang="en-IN" smtClean="0"/>
               <a:t>11-07-26</a:t>
             </a:fld>
@@ -2103,7 +2103,7 @@
           <p:cNvPr id="3" name="Footer Placeholder 2">
             <a:extLst>
               <a:ext uri="{FF2B5EF4-FFF2-40B4-BE49-F238E27FC236}">
-                <a16:creationId xmlns:a16="http://schemas.microsoft.com/office/drawing/2014/main" id="{66E2D3C6-E4C2-9007-4DCA-C97A5346ED06}"/>
+                <a16:creationId xmlns:a16="http://schemas.microsoft.com/office/drawing/2014/main" id="{5287270C-E325-D5B1-D166-BD582FE95898}"/>
               </a:ext>
             </a:extLst>
           </p:cNvPr>
@@ -2128,7 +2128,7 @@
           <p:cNvPr id="4" name="Slide Number Placeholder 3">
             <a:extLst>
               <a:ext uri="{FF2B5EF4-FFF2-40B4-BE49-F238E27FC236}">
-                <a16:creationId xmlns:a16="http://schemas.microsoft.com/office/drawing/2014/main" id="{751D4448-2CCB-8102-6434-3AA3132A4E27}"/>
+                <a16:creationId xmlns:a16="http://schemas.microsoft.com/office/drawing/2014/main" id="{04BA614B-95B7-2622-87E9-5C5987627634}"/>
               </a:ext>
             </a:extLst>
           </p:cNvPr>
@@ -2144,7 +2144,7 @@
           <a:bodyPr/>
           <a:lstStyle/>
           <a:p>
-            <a:fld id="{DD0861B3-852F-42F1-BDB8-339E4DBCD958}" type="slidenum">
+            <a:fld id="{9625E98B-E1AE-4530-90B0-32E5A3B80207}" type="slidenum">
               <a:rPr lang="en-IN" smtClean="0"/>
               <a:t>‹#›</a:t>
             </a:fld>
@@ -2155,7 +2155,7 @@
     </p:spTree>
     <p:extLst>
       <p:ext uri="{BB962C8B-B14F-4D97-AF65-F5344CB8AC3E}">
-        <p14:creationId xmlns:p14="http://schemas.microsoft.com/office/powerpoint/2010/main" val="1291537417"/>
+        <p14:creationId xmlns:p14="http://schemas.microsoft.com/office/powerpoint/2010/main" val="3855074068"/>
       </p:ext>
     </p:extLst>
   </p:cSld>
@@ -2187,7 +2187,7 @@
           <p:cNvPr id="2" name="Title 1">
             <a:extLst>
               <a:ext uri="{FF2B5EF4-FFF2-40B4-BE49-F238E27FC236}">
-                <a16:creationId xmlns:a16="http://schemas.microsoft.com/office/drawing/2014/main" id="{B25559A7-97B9-C940-C1AE-EB9580E138CC}"/>
+                <a16:creationId xmlns:a16="http://schemas.microsoft.com/office/drawing/2014/main" id="{CE1396D4-EAB4-DFBD-1F63-9D95610C6F42}"/>
               </a:ext>
             </a:extLst>
           </p:cNvPr>
@@ -2225,7 +2225,7 @@
           <p:cNvPr id="3" name="Content Placeholder 2">
             <a:extLst>
               <a:ext uri="{FF2B5EF4-FFF2-40B4-BE49-F238E27FC236}">
-                <a16:creationId xmlns:a16="http://schemas.microsoft.com/office/drawing/2014/main" id="{FCEB8DFB-6586-CA72-2988-CB02A72FAD2E}"/>
+                <a16:creationId xmlns:a16="http://schemas.microsoft.com/office/drawing/2014/main" id="{F3E927EF-07DA-11D7-EFA4-8CD3C51AE501}"/>
               </a:ext>
             </a:extLst>
           </p:cNvPr>
@@ -2316,7 +2316,7 @@
           <p:cNvPr id="4" name="Text Placeholder 3">
             <a:extLst>
               <a:ext uri="{FF2B5EF4-FFF2-40B4-BE49-F238E27FC236}">
-                <a16:creationId xmlns:a16="http://schemas.microsoft.com/office/drawing/2014/main" id="{691B03F8-8CA3-4FAD-11E4-04746BC53024}"/>
+                <a16:creationId xmlns:a16="http://schemas.microsoft.com/office/drawing/2014/main" id="{C231F4DF-137C-7994-AA87-F1B28ABCDCB4}"/>
               </a:ext>
             </a:extLst>
           </p:cNvPr>
@@ -2387,7 +2387,7 @@
           <p:cNvPr id="5" name="Date Placeholder 4">
             <a:extLst>
               <a:ext uri="{FF2B5EF4-FFF2-40B4-BE49-F238E27FC236}">
-                <a16:creationId xmlns:a16="http://schemas.microsoft.com/office/drawing/2014/main" id="{3AEFAF93-E3CD-3CD5-DEA8-07800BF99FA6}"/>
+                <a16:creationId xmlns:a16="http://schemas.microsoft.com/office/drawing/2014/main" id="{D040DE7B-4618-EFE1-8DC5-AF79C83B44AB}"/>
               </a:ext>
             </a:extLst>
           </p:cNvPr>
@@ -2403,7 +2403,7 @@
           <a:bodyPr/>
           <a:lstStyle/>
           <a:p>
-            <a:fld id="{69B11F35-6DAE-4F7D-826C-CA3504C03658}" type="datetimeFigureOut">
+            <a:fld id="{0CE0374D-4F16-40D1-B3D6-2B8EDBFA21BD}" type="datetimeFigureOut">
               <a:rPr lang="en-IN" smtClean="0"/>
               <a:t>11-07-26</a:t>
             </a:fld>
@@ -2416,7 +2416,7 @@
           <p:cNvPr id="6" name="Footer Placeholder 5">
             <a:extLst>
               <a:ext uri="{FF2B5EF4-FFF2-40B4-BE49-F238E27FC236}">
-                <a16:creationId xmlns:a16="http://schemas.microsoft.com/office/drawing/2014/main" id="{286DCD26-4CA4-6AB4-C29B-8075D7C9EA79}"/>
+                <a16:creationId xmlns:a16="http://schemas.microsoft.com/office/drawing/2014/main" id="{B2FEE20E-7DA6-0395-707A-07006AD5043E}"/>
               </a:ext>
             </a:extLst>
           </p:cNvPr>
@@ -2441,7 +2441,7 @@
           <p:cNvPr id="7" name="Slide Number Placeholder 6">
             <a:extLst>
               <a:ext uri="{FF2B5EF4-FFF2-40B4-BE49-F238E27FC236}">
-                <a16:creationId xmlns:a16="http://schemas.microsoft.com/office/drawing/2014/main" id="{F6C8E0A4-1DC8-AA33-85AB-5E1429E99270}"/>
+                <a16:creationId xmlns:a16="http://schemas.microsoft.com/office/drawing/2014/main" id="{272A87CF-AE3A-0A8D-7A53-E37E75F26F98}"/>
               </a:ext>
             </a:extLst>
           </p:cNvPr>
@@ -2457,7 +2457,7 @@
           <a:bodyPr/>
           <a:lstStyle/>
           <a:p>
-            <a:fld id="{DD0861B3-852F-42F1-BDB8-339E4DBCD958}" type="slidenum">
+            <a:fld id="{9625E98B-E1AE-4530-90B0-32E5A3B80207}" type="slidenum">
               <a:rPr lang="en-IN" smtClean="0"/>
               <a:t>‹#›</a:t>
             </a:fld>
@@ -2468,7 +2468,7 @@
     </p:spTree>
     <p:extLst>
       <p:ext uri="{BB962C8B-B14F-4D97-AF65-F5344CB8AC3E}">
-        <p14:creationId xmlns:p14="http://schemas.microsoft.com/office/powerpoint/2010/main" val="3212760731"/>
+        <p14:creationId xmlns:p14="http://schemas.microsoft.com/office/powerpoint/2010/main" val="1230701663"/>
       </p:ext>
     </p:extLst>
   </p:cSld>
@@ -2500,7 +2500,7 @@
           <p:cNvPr id="2" name="Title 1">
             <a:extLst>
               <a:ext uri="{FF2B5EF4-FFF2-40B4-BE49-F238E27FC236}">
-                <a16:creationId xmlns:a16="http://schemas.microsoft.com/office/drawing/2014/main" id="{9CC697FB-3493-7C29-B632-B4B95FD2708B}"/>
+                <a16:creationId xmlns:a16="http://schemas.microsoft.com/office/drawing/2014/main" id="{D9EF92D7-9E61-0889-24F7-B0CE04E609EE}"/>
               </a:ext>
             </a:extLst>
           </p:cNvPr>
@@ -2538,7 +2538,7 @@
           <p:cNvPr id="3" name="Picture Placeholder 2">
             <a:extLst>
               <a:ext uri="{FF2B5EF4-FFF2-40B4-BE49-F238E27FC236}">
-                <a16:creationId xmlns:a16="http://schemas.microsoft.com/office/drawing/2014/main" id="{2381097A-A1DE-CE9C-67C6-BBF3DF720E28}"/>
+                <a16:creationId xmlns:a16="http://schemas.microsoft.com/office/drawing/2014/main" id="{4AF03CB3-2EE9-5F23-DF75-0D03936A63F4}"/>
               </a:ext>
             </a:extLst>
           </p:cNvPr>
@@ -2605,7 +2605,7 @@
           <p:cNvPr id="4" name="Text Placeholder 3">
             <a:extLst>
               <a:ext uri="{FF2B5EF4-FFF2-40B4-BE49-F238E27FC236}">
-                <a16:creationId xmlns:a16="http://schemas.microsoft.com/office/drawing/2014/main" id="{F08EDC9A-6019-A15B-F7B3-34CDA733F431}"/>
+                <a16:creationId xmlns:a16="http://schemas.microsoft.com/office/drawing/2014/main" id="{56D73980-6B9D-511C-63D4-D1F70590A4C7}"/>
               </a:ext>
             </a:extLst>
           </p:cNvPr>
@@ -2676,7 +2676,7 @@
           <p:cNvPr id="5" name="Date Placeholder 4">
             <a:extLst>
               <a:ext uri="{FF2B5EF4-FFF2-40B4-BE49-F238E27FC236}">
-                <a16:creationId xmlns:a16="http://schemas.microsoft.com/office/drawing/2014/main" id="{50433624-1D9C-002E-082A-9F79E07DE69E}"/>
+                <a16:creationId xmlns:a16="http://schemas.microsoft.com/office/drawing/2014/main" id="{53AC87CE-5B3B-C542-04E3-9F579E97B1D6}"/>
               </a:ext>
             </a:extLst>
           </p:cNvPr>
@@ -2692,7 +2692,7 @@
           <a:bodyPr/>
           <a:lstStyle/>
           <a:p>
-            <a:fld id="{69B11F35-6DAE-4F7D-826C-CA3504C03658}" type="datetimeFigureOut">
+            <a:fld id="{0CE0374D-4F16-40D1-B3D6-2B8EDBFA21BD}" type="datetimeFigureOut">
               <a:rPr lang="en-IN" smtClean="0"/>
               <a:t>11-07-26</a:t>
             </a:fld>
@@ -2705,7 +2705,7 @@
           <p:cNvPr id="6" name="Footer Placeholder 5">
             <a:extLst>
               <a:ext uri="{FF2B5EF4-FFF2-40B4-BE49-F238E27FC236}">
-                <a16:creationId xmlns:a16="http://schemas.microsoft.com/office/drawing/2014/main" id="{355F7F16-1DCA-0037-2625-27BA68EBE959}"/>
+                <a16:creationId xmlns:a16="http://schemas.microsoft.com/office/drawing/2014/main" id="{562C0AFC-1A0F-3C1E-8841-34A7F41BC862}"/>
               </a:ext>
             </a:extLst>
           </p:cNvPr>
@@ -2730,7 +2730,7 @@
           <p:cNvPr id="7" name="Slide Number Placeholder 6">
             <a:extLst>
               <a:ext uri="{FF2B5EF4-FFF2-40B4-BE49-F238E27FC236}">
-                <a16:creationId xmlns:a16="http://schemas.microsoft.com/office/drawing/2014/main" id="{EBB16F50-BF16-9539-D7D7-0DFB287AC9AD}"/>
+                <a16:creationId xmlns:a16="http://schemas.microsoft.com/office/drawing/2014/main" id="{3BBF1272-36ED-0AEA-FEF1-9493A3C8DE67}"/>
               </a:ext>
             </a:extLst>
           </p:cNvPr>
@@ -2746,7 +2746,7 @@
           <a:bodyPr/>
           <a:lstStyle/>
           <a:p>
-            <a:fld id="{DD0861B3-852F-42F1-BDB8-339E4DBCD958}" type="slidenum">
+            <a:fld id="{9625E98B-E1AE-4530-90B0-32E5A3B80207}" type="slidenum">
               <a:rPr lang="en-IN" smtClean="0"/>
               <a:t>‹#›</a:t>
             </a:fld>
@@ -2757,7 +2757,7 @@
     </p:spTree>
     <p:extLst>
       <p:ext uri="{BB962C8B-B14F-4D97-AF65-F5344CB8AC3E}">
-        <p14:creationId xmlns:p14="http://schemas.microsoft.com/office/powerpoint/2010/main" val="2270873411"/>
+        <p14:creationId xmlns:p14="http://schemas.microsoft.com/office/powerpoint/2010/main" val="1005367302"/>
       </p:ext>
     </p:extLst>
   </p:cSld>
@@ -2794,7 +2794,7 @@
           <p:cNvPr id="2" name="Title Placeholder 1">
             <a:extLst>
               <a:ext uri="{FF2B5EF4-FFF2-40B4-BE49-F238E27FC236}">
-                <a16:creationId xmlns:a16="http://schemas.microsoft.com/office/drawing/2014/main" id="{283F1CC0-92B4-8EEC-F49B-2362179BD9A2}"/>
+                <a16:creationId xmlns:a16="http://schemas.microsoft.com/office/drawing/2014/main" id="{14932AD5-2381-F486-A016-8FCB3B065398}"/>
               </a:ext>
             </a:extLst>
           </p:cNvPr>
@@ -2833,7 +2833,7 @@
           <p:cNvPr id="3" name="Text Placeholder 2">
             <a:extLst>
               <a:ext uri="{FF2B5EF4-FFF2-40B4-BE49-F238E27FC236}">
-                <a16:creationId xmlns:a16="http://schemas.microsoft.com/office/drawing/2014/main" id="{183208FB-A349-5F3B-B090-B634DB778671}"/>
+                <a16:creationId xmlns:a16="http://schemas.microsoft.com/office/drawing/2014/main" id="{F6BC154C-3AED-E5BE-B874-7580BF976487}"/>
               </a:ext>
             </a:extLst>
           </p:cNvPr>
@@ -2901,7 +2901,7 @@
           <p:cNvPr id="4" name="Date Placeholder 3">
             <a:extLst>
               <a:ext uri="{FF2B5EF4-FFF2-40B4-BE49-F238E27FC236}">
-                <a16:creationId xmlns:a16="http://schemas.microsoft.com/office/drawing/2014/main" id="{8553E0BF-00A4-666F-7B69-0BD126CD5033}"/>
+                <a16:creationId xmlns:a16="http://schemas.microsoft.com/office/drawing/2014/main" id="{B061BB8F-674A-D36D-D7A0-7BB424127848}"/>
               </a:ext>
             </a:extLst>
           </p:cNvPr>
@@ -2935,7 +2935,7 @@
             </a:lvl1pPr>
           </a:lstStyle>
           <a:p>
-            <a:fld id="{69B11F35-6DAE-4F7D-826C-CA3504C03658}" type="datetimeFigureOut">
+            <a:fld id="{0CE0374D-4F16-40D1-B3D6-2B8EDBFA21BD}" type="datetimeFigureOut">
               <a:rPr lang="en-IN" smtClean="0"/>
               <a:t>11-07-26</a:t>
             </a:fld>
@@ -2948,7 +2948,7 @@
           <p:cNvPr id="5" name="Footer Placeholder 4">
             <a:extLst>
               <a:ext uri="{FF2B5EF4-FFF2-40B4-BE49-F238E27FC236}">
-                <a16:creationId xmlns:a16="http://schemas.microsoft.com/office/drawing/2014/main" id="{A82E0A72-43FE-E108-5FE8-1A00FC03D976}"/>
+                <a16:creationId xmlns:a16="http://schemas.microsoft.com/office/drawing/2014/main" id="{5EFDE288-F262-DF83-8FC6-883BB2F89266}"/>
               </a:ext>
             </a:extLst>
           </p:cNvPr>
@@ -2991,7 +2991,7 @@
           <p:cNvPr id="6" name="Slide Number Placeholder 5">
             <a:extLst>
               <a:ext uri="{FF2B5EF4-FFF2-40B4-BE49-F238E27FC236}">
-                <a16:creationId xmlns:a16="http://schemas.microsoft.com/office/drawing/2014/main" id="{C9858D02-1CAF-9AF7-E266-E9C208BABFAC}"/>
+                <a16:creationId xmlns:a16="http://schemas.microsoft.com/office/drawing/2014/main" id="{A475400D-F8E1-8DB9-96DD-E827264A82AA}"/>
               </a:ext>
             </a:extLst>
           </p:cNvPr>
@@ -3025,7 +3025,7 @@
             </a:lvl1pPr>
           </a:lstStyle>
           <a:p>
-            <a:fld id="{DD0861B3-852F-42F1-BDB8-339E4DBCD958}" type="slidenum">
+            <a:fld id="{9625E98B-E1AE-4530-90B0-32E5A3B80207}" type="slidenum">
               <a:rPr lang="en-IN" smtClean="0"/>
               <a:t>‹#›</a:t>
             </a:fld>
@@ -3036,7 +3036,7 @@
     </p:spTree>
     <p:extLst>
       <p:ext uri="{BB962C8B-B14F-4D97-AF65-F5344CB8AC3E}">
-        <p14:creationId xmlns:p14="http://schemas.microsoft.com/office/powerpoint/2010/main" val="1742846711"/>
+        <p14:creationId xmlns:p14="http://schemas.microsoft.com/office/powerpoint/2010/main" val="1677791784"/>
       </p:ext>
     </p:extLst>
   </p:cSld>
@@ -3356,10 +3356,148 @@
       </p:grpSpPr>
       <p:sp>
         <p:nvSpPr>
-          <p:cNvPr id="2" name="TextBox 1">
-            <a:extLst>
-              <a:ext uri="{FF2B5EF4-FFF2-40B4-BE49-F238E27FC236}">
-                <a16:creationId xmlns:a16="http://schemas.microsoft.com/office/drawing/2014/main" id="{C87CDC78-1B56-E064-AE5C-A3AE19BAC665}"/>
+          <p:cNvPr id="3" name="Oval 2">
+            <a:extLst>
+              <a:ext uri="{FF2B5EF4-FFF2-40B4-BE49-F238E27FC236}">
+                <a16:creationId xmlns:a16="http://schemas.microsoft.com/office/drawing/2014/main" id="{6D02F30F-AACF-32C7-C9E6-C17901419D2A}"/>
+              </a:ext>
+            </a:extLst>
+          </p:cNvPr>
+          <p:cNvSpPr/>
+          <p:nvPr/>
+        </p:nvSpPr>
+        <p:spPr>
+          <a:xfrm>
+            <a:off x="10414000" y="3556000"/>
+            <a:ext cx="2540000" cy="2540000"/>
+          </a:xfrm>
+          <a:prstGeom prst="ellipse">
+            <a:avLst/>
+          </a:prstGeom>
+          <a:solidFill>
+            <a:srgbClr val="06B6D4">
+              <a:alpha val="8000"/>
+            </a:srgbClr>
+          </a:solidFill>
+          <a:ln w="19050" cap="flat" cmpd="sng" algn="ctr">
+            <a:noFill/>
+            <a:prstDash val="solid"/>
+            <a:miter lim="800000"/>
+          </a:ln>
+          <a:effectLst/>
+          <a:extLst>
+            <a:ext uri="{91240B29-F687-4F45-9708-019B960494DF}">
+              <a14:hiddenLine xmlns:a14="http://schemas.microsoft.com/office/drawing/2010/main" w="19050" cap="flat" cmpd="sng" algn="ctr">
+                <a:solidFill>
+                  <a:schemeClr val="accent1">
+                    <a:shade val="15000"/>
+                  </a:schemeClr>
+                </a:solidFill>
+                <a:prstDash val="solid"/>
+                <a:miter lim="800000"/>
+              </a14:hiddenLine>
+            </a:ext>
+          </a:extLst>
+        </p:spPr>
+        <p:style>
+          <a:lnRef idx="2">
+            <a:schemeClr val="accent1">
+              <a:shade val="15000"/>
+            </a:schemeClr>
+          </a:lnRef>
+          <a:fillRef idx="1">
+            <a:schemeClr val="accent1"/>
+          </a:fillRef>
+          <a:effectRef idx="0">
+            <a:schemeClr val="accent1"/>
+          </a:effectRef>
+          <a:fontRef idx="minor">
+            <a:schemeClr val="lt1"/>
+          </a:fontRef>
+        </p:style>
+        <p:txBody>
+          <a:bodyPr rtlCol="0" anchor="ctr"/>
+          <a:lstStyle/>
+          <a:p>
+            <a:pPr algn="ctr"/>
+            <a:endParaRPr lang="en-IN"/>
+          </a:p>
+        </p:txBody>
+      </p:sp>
+      <p:sp>
+        <p:nvSpPr>
+          <p:cNvPr id="2" name="Oval 1">
+            <a:extLst>
+              <a:ext uri="{FF2B5EF4-FFF2-40B4-BE49-F238E27FC236}">
+                <a16:creationId xmlns:a16="http://schemas.microsoft.com/office/drawing/2014/main" id="{10F2C16A-FDC3-411E-EEE2-C8E4E23B9E0D}"/>
+              </a:ext>
+            </a:extLst>
+          </p:cNvPr>
+          <p:cNvSpPr/>
+          <p:nvPr/>
+        </p:nvSpPr>
+        <p:spPr>
+          <a:xfrm>
+            <a:off x="8890000" y="-1016000"/>
+            <a:ext cx="5080000" cy="5080000"/>
+          </a:xfrm>
+          <a:prstGeom prst="ellipse">
+            <a:avLst/>
+          </a:prstGeom>
+          <a:solidFill>
+            <a:srgbClr val="1E293B"/>
+          </a:solidFill>
+          <a:ln w="19050" cap="flat" cmpd="sng" algn="ctr">
+            <a:noFill/>
+            <a:prstDash val="solid"/>
+            <a:miter lim="800000"/>
+          </a:ln>
+          <a:effectLst/>
+          <a:extLst>
+            <a:ext uri="{91240B29-F687-4F45-9708-019B960494DF}">
+              <a14:hiddenLine xmlns:a14="http://schemas.microsoft.com/office/drawing/2010/main" w="19050" cap="flat" cmpd="sng" algn="ctr">
+                <a:solidFill>
+                  <a:schemeClr val="accent1">
+                    <a:shade val="15000"/>
+                  </a:schemeClr>
+                </a:solidFill>
+                <a:prstDash val="solid"/>
+                <a:miter lim="800000"/>
+              </a14:hiddenLine>
+            </a:ext>
+          </a:extLst>
+        </p:spPr>
+        <p:style>
+          <a:lnRef idx="2">
+            <a:schemeClr val="accent1">
+              <a:shade val="15000"/>
+            </a:schemeClr>
+          </a:lnRef>
+          <a:fillRef idx="1">
+            <a:schemeClr val="accent1"/>
+          </a:fillRef>
+          <a:effectRef idx="0">
+            <a:schemeClr val="accent1"/>
+          </a:effectRef>
+          <a:fontRef idx="minor">
+            <a:schemeClr val="lt1"/>
+          </a:fontRef>
+        </p:style>
+        <p:txBody>
+          <a:bodyPr rtlCol="0" anchor="ctr"/>
+          <a:lstStyle/>
+          <a:p>
+            <a:pPr algn="ctr"/>
+            <a:endParaRPr lang="en-IN"/>
+          </a:p>
+        </p:txBody>
+      </p:sp>
+      <p:sp>
+        <p:nvSpPr>
+          <p:cNvPr id="4" name="TextBox 3">
+            <a:extLst>
+              <a:ext uri="{FF2B5EF4-FFF2-40B4-BE49-F238E27FC236}">
+                <a16:creationId xmlns:a16="http://schemas.microsoft.com/office/drawing/2014/main" id="{94ED2A3C-044F-207B-DA14-E6849D480F19}"/>
               </a:ext>
             </a:extLst>
           </p:cNvPr>
@@ -3396,10 +3534,10 @@
       </p:sp>
       <p:sp>
         <p:nvSpPr>
-          <p:cNvPr id="3" name="Rectangle 2">
-            <a:extLst>
-              <a:ext uri="{FF2B5EF4-FFF2-40B4-BE49-F238E27FC236}">
-                <a16:creationId xmlns:a16="http://schemas.microsoft.com/office/drawing/2014/main" id="{0A488604-83A9-C2FB-1266-62BF8F83C4E5}"/>
+          <p:cNvPr id="5" name="Rectangle 4">
+            <a:extLst>
+              <a:ext uri="{FF2B5EF4-FFF2-40B4-BE49-F238E27FC236}">
+                <a16:creationId xmlns:a16="http://schemas.microsoft.com/office/drawing/2014/main" id="{B12662E8-A8E2-05D5-FCA9-BE4381AD79BC}"/>
               </a:ext>
             </a:extLst>
           </p:cNvPr>
@@ -3464,10 +3602,10 @@
       </p:sp>
       <p:sp>
         <p:nvSpPr>
-          <p:cNvPr id="4" name="TextBox 3">
-            <a:extLst>
-              <a:ext uri="{FF2B5EF4-FFF2-40B4-BE49-F238E27FC236}">
-                <a16:creationId xmlns:a16="http://schemas.microsoft.com/office/drawing/2014/main" id="{EA4990CE-55AA-1193-EE6B-9EE904E482D3}"/>
+          <p:cNvPr id="6" name="TextBox 5">
+            <a:extLst>
+              <a:ext uri="{FF2B5EF4-FFF2-40B4-BE49-F238E27FC236}">
+                <a16:creationId xmlns:a16="http://schemas.microsoft.com/office/drawing/2014/main" id="{9B0221ED-26F0-7F07-2CF3-A3F513F0F56D}"/>
               </a:ext>
             </a:extLst>
           </p:cNvPr>
@@ -3511,10 +3649,10 @@
       </p:sp>
       <p:sp>
         <p:nvSpPr>
-          <p:cNvPr id="5" name="TextBox 4">
-            <a:extLst>
-              <a:ext uri="{FF2B5EF4-FFF2-40B4-BE49-F238E27FC236}">
-                <a16:creationId xmlns:a16="http://schemas.microsoft.com/office/drawing/2014/main" id="{E645A208-FDF5-EA71-81AF-A15BA750DEF8}"/>
+          <p:cNvPr id="7" name="TextBox 6">
+            <a:extLst>
+              <a:ext uri="{FF2B5EF4-FFF2-40B4-BE49-F238E27FC236}">
+                <a16:creationId xmlns:a16="http://schemas.microsoft.com/office/drawing/2014/main" id="{9E72AAA0-C855-75BA-E212-8A0CCCEC6A69}"/>
               </a:ext>
             </a:extLst>
           </p:cNvPr>
@@ -3544,7 +3682,7 @@
                 </a:solidFill>
                 <a:latin typeface="Segoe UI" panose="020B0502040204020203" pitchFamily="34" charset="0"/>
               </a:rPr>
-              <a:t>Presented by Danish Khan â€¢ Developed in Streamlit &amp; Python</a:t>
+              <a:t>Presented by Owais Khan â€¢ Developed in Streamlit &amp; Python</a:t>
             </a:r>
             <a:endParaRPr lang="en-IN" sz="1300" b="1">
               <a:solidFill>
@@ -3558,7 +3696,7 @@
     </p:spTree>
     <p:extLst>
       <p:ext uri="{BB962C8B-B14F-4D97-AF65-F5344CB8AC3E}">
-        <p14:creationId xmlns:p14="http://schemas.microsoft.com/office/powerpoint/2010/main" val="2498885844"/>
+        <p14:creationId xmlns:p14="http://schemas.microsoft.com/office/powerpoint/2010/main" val="3943459132"/>
       </p:ext>
     </p:extLst>
   </p:cSld>
@@ -3587,142 +3725,10 @@
       </p:grpSpPr>
       <p:sp>
         <p:nvSpPr>
-          <p:cNvPr id="2" name="TextBox 1">
-            <a:extLst>
-              <a:ext uri="{FF2B5EF4-FFF2-40B4-BE49-F238E27FC236}">
-                <a16:creationId xmlns:a16="http://schemas.microsoft.com/office/drawing/2014/main" id="{E190F58F-1C26-E8BC-0EBA-2632FADBCEBF}"/>
-              </a:ext>
-            </a:extLst>
-          </p:cNvPr>
-          <p:cNvSpPr txBox="1"/>
-          <p:nvPr/>
-        </p:nvSpPr>
-        <p:spPr>
-          <a:xfrm>
-            <a:off x="508000" y="508000"/>
-            <a:ext cx="3810000" cy="400110"/>
-          </a:xfrm>
-          <a:prstGeom prst="rect">
-            <a:avLst/>
-          </a:prstGeom>
-          <a:noFill/>
-        </p:spPr>
-        <p:txBody>
-          <a:bodyPr vert="horz" rtlCol="0">
-            <a:spAutoFit/>
-          </a:bodyPr>
-          <a:lstStyle/>
-          <a:p>
-            <a:r>
-              <a:rPr lang="en-US" sz="1000" b="1">
-                <a:solidFill>
-                  <a:srgbClr val="94A3B8"/>
-                </a:solidFill>
-                <a:latin typeface="Segoe UI" panose="020B0502040204020203" pitchFamily="34" charset="0"/>
-              </a:rPr>
-              <a:t>PROJECT 09 OF 11  â€¢  DEEP LEARNING &amp; FACIAL CLASSIFICATION</a:t>
-            </a:r>
-            <a:endParaRPr lang="en-IN" sz="1000" b="1">
-              <a:solidFill>
-                <a:srgbClr val="94A3B8"/>
-              </a:solidFill>
-              <a:latin typeface="Segoe UI" panose="020B0502040204020203" pitchFamily="34" charset="0"/>
-            </a:endParaRPr>
-          </a:p>
-        </p:txBody>
-      </p:sp>
-      <p:sp>
-        <p:nvSpPr>
-          <p:cNvPr id="3" name="TextBox 2">
-            <a:extLst>
-              <a:ext uri="{FF2B5EF4-FFF2-40B4-BE49-F238E27FC236}">
-                <a16:creationId xmlns:a16="http://schemas.microsoft.com/office/drawing/2014/main" id="{CE78972E-AC0C-1CCA-0E31-2EB2F903F051}"/>
-              </a:ext>
-            </a:extLst>
-          </p:cNvPr>
-          <p:cNvSpPr txBox="1"/>
-          <p:nvPr/>
-        </p:nvSpPr>
-        <p:spPr>
-          <a:xfrm>
-            <a:off x="508000" y="762000"/>
-            <a:ext cx="3810000" cy="430887"/>
-          </a:xfrm>
-          <a:prstGeom prst="rect">
-            <a:avLst/>
-          </a:prstGeom>
-          <a:noFill/>
-        </p:spPr>
-        <p:txBody>
-          <a:bodyPr vert="horz" wrap="square" rtlCol="0">
-            <a:spAutoFit/>
-          </a:bodyPr>
-          <a:lstStyle/>
-          <a:p>
-            <a:r>
-              <a:rPr lang="en-IN" sz="2200" b="1">
-                <a:solidFill>
-                  <a:srgbClr val="FFFFFF"/>
-                </a:solidFill>
-                <a:latin typeface="Segoe UI" panose="020B0502040204020203" pitchFamily="34" charset="0"/>
-              </a:rPr>
-              <a:t>Male vs Female Classifier</a:t>
-            </a:r>
-          </a:p>
-        </p:txBody>
-      </p:sp>
-      <p:sp>
-        <p:nvSpPr>
-          <p:cNvPr id="4" name="TextBox 3">
-            <a:extLst>
-              <a:ext uri="{FF2B5EF4-FFF2-40B4-BE49-F238E27FC236}">
-                <a16:creationId xmlns:a16="http://schemas.microsoft.com/office/drawing/2014/main" id="{F0609557-F4CD-6CD4-561D-72673E33FF4B}"/>
-              </a:ext>
-            </a:extLst>
-          </p:cNvPr>
-          <p:cNvSpPr txBox="1"/>
-          <p:nvPr/>
-        </p:nvSpPr>
-        <p:spPr>
-          <a:xfrm>
-            <a:off x="508000" y="1714500"/>
-            <a:ext cx="3810000" cy="461665"/>
-          </a:xfrm>
-          <a:prstGeom prst="rect">
-            <a:avLst/>
-          </a:prstGeom>
-          <a:noFill/>
-        </p:spPr>
-        <p:txBody>
-          <a:bodyPr vert="horz" wrap="square" rtlCol="0">
-            <a:spAutoFit/>
-          </a:bodyPr>
-          <a:lstStyle/>
-          <a:p>
-            <a:r>
-              <a:rPr lang="en-US" sz="1200">
-                <a:solidFill>
-                  <a:srgbClr val="94A3B8"/>
-                </a:solidFill>
-                <a:latin typeface="Segoe UI" panose="020B0502040204020203" pitchFamily="34" charset="0"/>
-              </a:rPr>
-              <a:t>High-accuracy face classification app identifying gender from uploaded photos</a:t>
-            </a:r>
-            <a:endParaRPr lang="en-IN" sz="1200">
-              <a:solidFill>
-                <a:srgbClr val="94A3B8"/>
-              </a:solidFill>
-              <a:latin typeface="Segoe UI" panose="020B0502040204020203" pitchFamily="34" charset="0"/>
-            </a:endParaRPr>
-          </a:p>
-        </p:txBody>
-      </p:sp>
-      <p:sp>
-        <p:nvSpPr>
-          <p:cNvPr id="5" name="Rectangle 4">
-            <a:extLst>
-              <a:ext uri="{FF2B5EF4-FFF2-40B4-BE49-F238E27FC236}">
-                <a16:creationId xmlns:a16="http://schemas.microsoft.com/office/drawing/2014/main" id="{ACB15078-B3DB-7BBF-4408-16162A9A5CE2}"/>
+          <p:cNvPr id="2" name="Rectangle 1">
+            <a:extLst>
+              <a:ext uri="{FF2B5EF4-FFF2-40B4-BE49-F238E27FC236}">
+                <a16:creationId xmlns:a16="http://schemas.microsoft.com/office/drawing/2014/main" id="{EF8A3385-F63A-318F-1B01-3313CA172BEC}"/>
               </a:ext>
             </a:extLst>
           </p:cNvPr>
@@ -3731,8 +3737,8 @@
         </p:nvSpPr>
         <p:spPr>
           <a:xfrm>
-            <a:off x="508000" y="2476500"/>
-            <a:ext cx="762000" cy="38100"/>
+            <a:off x="0" y="0"/>
+            <a:ext cx="76200" cy="6858000"/>
           </a:xfrm>
           <a:prstGeom prst="rect">
             <a:avLst/>
@@ -3787,10 +3793,72 @@
       </p:sp>
       <p:sp>
         <p:nvSpPr>
-          <p:cNvPr id="6" name="TextBox 5">
-            <a:extLst>
-              <a:ext uri="{FF2B5EF4-FFF2-40B4-BE49-F238E27FC236}">
-                <a16:creationId xmlns:a16="http://schemas.microsoft.com/office/drawing/2014/main" id="{5E625C97-E105-A112-AE4B-6DE8F27E60C9}"/>
+          <p:cNvPr id="3" name="Rectangle: Rounded Corners 2">
+            <a:extLst>
+              <a:ext uri="{FF2B5EF4-FFF2-40B4-BE49-F238E27FC236}">
+                <a16:creationId xmlns:a16="http://schemas.microsoft.com/office/drawing/2014/main" id="{110D8350-86F9-F97E-C075-2A5BB19FFDC3}"/>
+              </a:ext>
+            </a:extLst>
+          </p:cNvPr>
+          <p:cNvSpPr/>
+          <p:nvPr/>
+        </p:nvSpPr>
+        <p:spPr>
+          <a:xfrm>
+            <a:off x="508000" y="457200"/>
+            <a:ext cx="1651000" cy="254000"/>
+          </a:xfrm>
+          <a:prstGeom prst="roundRect">
+            <a:avLst/>
+          </a:prstGeom>
+          <a:solidFill>
+            <a:srgbClr val="1E293B"/>
+          </a:solidFill>
+          <a:ln w="12700">
+            <a:solidFill>
+              <a:srgbClr val="06B6D4"/>
+            </a:solidFill>
+          </a:ln>
+        </p:spPr>
+        <p:style>
+          <a:lnRef idx="2">
+            <a:schemeClr val="accent1">
+              <a:shade val="15000"/>
+            </a:schemeClr>
+          </a:lnRef>
+          <a:fillRef idx="1">
+            <a:schemeClr val="accent1"/>
+          </a:fillRef>
+          <a:effectRef idx="0">
+            <a:schemeClr val="accent1"/>
+          </a:effectRef>
+          <a:fontRef idx="minor">
+            <a:schemeClr val="lt1"/>
+          </a:fontRef>
+        </p:style>
+        <p:txBody>
+          <a:bodyPr rtlCol="0" anchor="ctr"/>
+          <a:lstStyle/>
+          <a:p>
+            <a:pPr algn="ctr"/>
+            <a:r>
+              <a:rPr lang="en-IN" sz="900" b="1">
+                <a:solidFill>
+                  <a:srgbClr val="FFFFFF"/>
+                </a:solidFill>
+                <a:latin typeface="Segoe UI" panose="020B0502040204020203" pitchFamily="34" charset="0"/>
+              </a:rPr>
+              <a:t>DEEP LEARNING</a:t>
+            </a:r>
+          </a:p>
+        </p:txBody>
+      </p:sp>
+      <p:sp>
+        <p:nvSpPr>
+          <p:cNvPr id="4" name="TextBox 3">
+            <a:extLst>
+              <a:ext uri="{FF2B5EF4-FFF2-40B4-BE49-F238E27FC236}">
+                <a16:creationId xmlns:a16="http://schemas.microsoft.com/office/drawing/2014/main" id="{31215A3B-2A48-5E70-C13A-C4BAA11F6F0B}"/>
               </a:ext>
             </a:extLst>
           </p:cNvPr>
@@ -3799,8 +3867,8 @@
         </p:nvSpPr>
         <p:spPr>
           <a:xfrm>
-            <a:off x="508000" y="2603500"/>
-            <a:ext cx="3810000" cy="261610"/>
+            <a:off x="2349500" y="457200"/>
+            <a:ext cx="2159000" cy="230832"/>
           </a:xfrm>
           <a:prstGeom prst="rect">
             <a:avLst/>
@@ -3814,6 +3882,200 @@
           <a:lstStyle/>
           <a:p>
             <a:r>
+              <a:rPr lang="en-IN" sz="900" b="1">
+                <a:solidFill>
+                  <a:srgbClr val="94A3B8"/>
+                </a:solidFill>
+                <a:latin typeface="Segoe UI" panose="020B0502040204020203" pitchFamily="34" charset="0"/>
+              </a:rPr>
+              <a:t>PROJECT 09 OF 11</a:t>
+            </a:r>
+          </a:p>
+        </p:txBody>
+      </p:sp>
+      <p:sp>
+        <p:nvSpPr>
+          <p:cNvPr id="5" name="TextBox 4">
+            <a:extLst>
+              <a:ext uri="{FF2B5EF4-FFF2-40B4-BE49-F238E27FC236}">
+                <a16:creationId xmlns:a16="http://schemas.microsoft.com/office/drawing/2014/main" id="{CDAF5905-8A52-41CA-7A1D-4B3B01462BE7}"/>
+              </a:ext>
+            </a:extLst>
+          </p:cNvPr>
+          <p:cNvSpPr txBox="1"/>
+          <p:nvPr/>
+        </p:nvSpPr>
+        <p:spPr>
+          <a:xfrm>
+            <a:off x="508000" y="787400"/>
+            <a:ext cx="3810000" cy="430887"/>
+          </a:xfrm>
+          <a:prstGeom prst="rect">
+            <a:avLst/>
+          </a:prstGeom>
+          <a:noFill/>
+        </p:spPr>
+        <p:txBody>
+          <a:bodyPr vert="horz" wrap="square" rtlCol="0">
+            <a:spAutoFit/>
+          </a:bodyPr>
+          <a:lstStyle/>
+          <a:p>
+            <a:r>
+              <a:rPr lang="en-IN" sz="2200" b="1">
+                <a:solidFill>
+                  <a:srgbClr val="FFFFFF"/>
+                </a:solidFill>
+                <a:latin typeface="Segoe UI" panose="020B0502040204020203" pitchFamily="34" charset="0"/>
+              </a:rPr>
+              <a:t>Male vs Female Classifier</a:t>
+            </a:r>
+          </a:p>
+        </p:txBody>
+      </p:sp>
+      <p:sp>
+        <p:nvSpPr>
+          <p:cNvPr id="6" name="TextBox 5">
+            <a:extLst>
+              <a:ext uri="{FF2B5EF4-FFF2-40B4-BE49-F238E27FC236}">
+                <a16:creationId xmlns:a16="http://schemas.microsoft.com/office/drawing/2014/main" id="{95C877E4-FE2C-6E15-1534-21DF7A3293DC}"/>
+              </a:ext>
+            </a:extLst>
+          </p:cNvPr>
+          <p:cNvSpPr txBox="1"/>
+          <p:nvPr/>
+        </p:nvSpPr>
+        <p:spPr>
+          <a:xfrm>
+            <a:off x="508000" y="1714500"/>
+            <a:ext cx="3810000" cy="461665"/>
+          </a:xfrm>
+          <a:prstGeom prst="rect">
+            <a:avLst/>
+          </a:prstGeom>
+          <a:noFill/>
+        </p:spPr>
+        <p:txBody>
+          <a:bodyPr vert="horz" wrap="square" rtlCol="0">
+            <a:spAutoFit/>
+          </a:bodyPr>
+          <a:lstStyle/>
+          <a:p>
+            <a:r>
+              <a:rPr lang="en-US" sz="1200">
+                <a:solidFill>
+                  <a:srgbClr val="94A3B8"/>
+                </a:solidFill>
+                <a:latin typeface="Segoe UI" panose="020B0502040204020203" pitchFamily="34" charset="0"/>
+              </a:rPr>
+              <a:t>High-accuracy face classification app identifying gender from uploaded photos</a:t>
+            </a:r>
+            <a:endParaRPr lang="en-IN" sz="1200">
+              <a:solidFill>
+                <a:srgbClr val="94A3B8"/>
+              </a:solidFill>
+              <a:latin typeface="Segoe UI" panose="020B0502040204020203" pitchFamily="34" charset="0"/>
+            </a:endParaRPr>
+          </a:p>
+        </p:txBody>
+      </p:sp>
+      <p:sp>
+        <p:nvSpPr>
+          <p:cNvPr id="7" name="Rectangle 6">
+            <a:extLst>
+              <a:ext uri="{FF2B5EF4-FFF2-40B4-BE49-F238E27FC236}">
+                <a16:creationId xmlns:a16="http://schemas.microsoft.com/office/drawing/2014/main" id="{875BB96D-1632-4E56-AE72-8944C3ECD0AA}"/>
+              </a:ext>
+            </a:extLst>
+          </p:cNvPr>
+          <p:cNvSpPr/>
+          <p:nvPr/>
+        </p:nvSpPr>
+        <p:spPr>
+          <a:xfrm>
+            <a:off x="508000" y="2476500"/>
+            <a:ext cx="762000" cy="25400"/>
+          </a:xfrm>
+          <a:prstGeom prst="rect">
+            <a:avLst/>
+          </a:prstGeom>
+          <a:solidFill>
+            <a:srgbClr val="06B6D4"/>
+          </a:solidFill>
+          <a:ln w="19050" cap="flat" cmpd="sng" algn="ctr">
+            <a:noFill/>
+            <a:prstDash val="solid"/>
+            <a:miter lim="800000"/>
+          </a:ln>
+          <a:effectLst/>
+          <a:extLst>
+            <a:ext uri="{91240B29-F687-4F45-9708-019B960494DF}">
+              <a14:hiddenLine xmlns:a14="http://schemas.microsoft.com/office/drawing/2010/main" w="19050" cap="flat" cmpd="sng" algn="ctr">
+                <a:solidFill>
+                  <a:schemeClr val="accent1">
+                    <a:shade val="15000"/>
+                  </a:schemeClr>
+                </a:solidFill>
+                <a:prstDash val="solid"/>
+                <a:miter lim="800000"/>
+              </a14:hiddenLine>
+            </a:ext>
+          </a:extLst>
+        </p:spPr>
+        <p:style>
+          <a:lnRef idx="2">
+            <a:schemeClr val="accent1">
+              <a:shade val="15000"/>
+            </a:schemeClr>
+          </a:lnRef>
+          <a:fillRef idx="1">
+            <a:schemeClr val="accent1"/>
+          </a:fillRef>
+          <a:effectRef idx="0">
+            <a:schemeClr val="accent1"/>
+          </a:effectRef>
+          <a:fontRef idx="minor">
+            <a:schemeClr val="lt1"/>
+          </a:fontRef>
+        </p:style>
+        <p:txBody>
+          <a:bodyPr rtlCol="0" anchor="ctr"/>
+          <a:lstStyle/>
+          <a:p>
+            <a:pPr algn="ctr"/>
+            <a:endParaRPr lang="en-IN"/>
+          </a:p>
+        </p:txBody>
+      </p:sp>
+      <p:sp>
+        <p:nvSpPr>
+          <p:cNvPr id="8" name="TextBox 7">
+            <a:extLst>
+              <a:ext uri="{FF2B5EF4-FFF2-40B4-BE49-F238E27FC236}">
+                <a16:creationId xmlns:a16="http://schemas.microsoft.com/office/drawing/2014/main" id="{1E001A5D-9E3B-F710-1269-88A8F4E5D85C}"/>
+              </a:ext>
+            </a:extLst>
+          </p:cNvPr>
+          <p:cNvSpPr txBox="1"/>
+          <p:nvPr/>
+        </p:nvSpPr>
+        <p:spPr>
+          <a:xfrm>
+            <a:off x="508000" y="2603500"/>
+            <a:ext cx="3810000" cy="261610"/>
+          </a:xfrm>
+          <a:prstGeom prst="rect">
+            <a:avLst/>
+          </a:prstGeom>
+          <a:noFill/>
+        </p:spPr>
+        <p:txBody>
+          <a:bodyPr vert="horz" rtlCol="0">
+            <a:spAutoFit/>
+          </a:bodyPr>
+          <a:lstStyle/>
+          <a:p>
+            <a:r>
               <a:rPr lang="en-IN" sz="1100" b="1">
                 <a:solidFill>
                   <a:srgbClr val="FB923C"/>
@@ -3827,10 +4089,10 @@
       </p:sp>
       <p:sp>
         <p:nvSpPr>
-          <p:cNvPr id="7" name="TextBox 6">
-            <a:extLst>
-              <a:ext uri="{FF2B5EF4-FFF2-40B4-BE49-F238E27FC236}">
-                <a16:creationId xmlns:a16="http://schemas.microsoft.com/office/drawing/2014/main" id="{257CC85E-9778-4A27-BB1C-1C75D4A3E8B9}"/>
+          <p:cNvPr id="9" name="TextBox 8">
+            <a:extLst>
+              <a:ext uri="{FF2B5EF4-FFF2-40B4-BE49-F238E27FC236}">
+                <a16:creationId xmlns:a16="http://schemas.microsoft.com/office/drawing/2014/main" id="{60B10BC5-1D38-361C-F04B-8EA2007E48F1}"/>
               </a:ext>
             </a:extLst>
           </p:cNvPr>
@@ -3860,52 +4122,74 @@
                 </a:solidFill>
                 <a:latin typeface="Segoe UI" panose="020B0502040204020203" pitchFamily="34" charset="0"/>
               </a:rPr>
-              <a:t>â€¢ DeepFace CNN architecture utilizing pre-trained deep learning.
-â€¢ Bypasses external cascades via skip-detection mode for robust hosting.
-â€¢ Real-time confidence scores for Male/Female classification.</a:t>
-            </a:r>
-          </a:p>
-        </p:txBody>
-      </p:sp>
-      <p:sp>
-        <p:nvSpPr>
-          <p:cNvPr id="8" name="TextBox 7">
-            <a:extLst>
-              <a:ext uri="{FF2B5EF4-FFF2-40B4-BE49-F238E27FC236}">
-                <a16:creationId xmlns:a16="http://schemas.microsoft.com/office/drawing/2014/main" id="{C5D0A17A-1E32-C9C7-35D7-70577DF9F9C6}"/>
-              </a:ext>
-            </a:extLst>
-          </p:cNvPr>
-          <p:cNvSpPr txBox="1"/>
-          <p:nvPr/>
-        </p:nvSpPr>
-        <p:spPr>
-          <a:xfrm>
-            <a:off x="508000" y="5461000"/>
-            <a:ext cx="3810000" cy="430887"/>
-          </a:xfrm>
-          <a:prstGeom prst="rect">
-            <a:avLst/>
-          </a:prstGeom>
-          <a:noFill/>
-        </p:spPr>
-        <p:txBody>
-          <a:bodyPr vert="horz" wrap="square" rtlCol="0">
-            <a:spAutoFit/>
-          </a:bodyPr>
-          <a:lstStyle/>
-          <a:p>
-            <a:r>
-              <a:rPr lang="en-US" sz="1100" b="1">
+              <a:t>- DeepFace CNN architecture utilizing pre-trained deep learning.
+- Bypasses external cascades via skip-detection mode for robust hosting.
+- Real-time confidence scores for Male/Female classification.</a:t>
+            </a:r>
+          </a:p>
+        </p:txBody>
+      </p:sp>
+      <p:sp>
+        <p:nvSpPr>
+          <p:cNvPr id="10" name="Rectangle: Rounded Corners 9">
+            <a:extLst>
+              <a:ext uri="{FF2B5EF4-FFF2-40B4-BE49-F238E27FC236}">
+                <a16:creationId xmlns:a16="http://schemas.microsoft.com/office/drawing/2014/main" id="{8F5293F1-A5B6-FB1D-5660-45EAC824FB7B}"/>
+              </a:ext>
+            </a:extLst>
+          </p:cNvPr>
+          <p:cNvSpPr/>
+          <p:nvPr/>
+        </p:nvSpPr>
+        <p:spPr>
+          <a:xfrm>
+            <a:off x="508000" y="5397500"/>
+            <a:ext cx="3810000" cy="635000"/>
+          </a:xfrm>
+          <a:prstGeom prst="roundRect">
+            <a:avLst/>
+          </a:prstGeom>
+          <a:solidFill>
+            <a:srgbClr val="1E293B"/>
+          </a:solidFill>
+          <a:ln w="12700">
+            <a:solidFill>
+              <a:srgbClr val="06B6D4"/>
+            </a:solidFill>
+          </a:ln>
+        </p:spPr>
+        <p:style>
+          <a:lnRef idx="2">
+            <a:schemeClr val="accent1">
+              <a:shade val="15000"/>
+            </a:schemeClr>
+          </a:lnRef>
+          <a:fillRef idx="1">
+            <a:schemeClr val="accent1"/>
+          </a:fillRef>
+          <a:effectRef idx="0">
+            <a:schemeClr val="accent1"/>
+          </a:effectRef>
+          <a:fontRef idx="minor">
+            <a:schemeClr val="lt1"/>
+          </a:fontRef>
+        </p:style>
+        <p:txBody>
+          <a:bodyPr rtlCol="0" anchor="ctr"/>
+          <a:lstStyle/>
+          <a:p>
+            <a:pPr algn="ctr"/>
+            <a:r>
+              <a:rPr lang="en-US" sz="900" b="1">
                 <a:solidFill>
                   <a:srgbClr val="06B6D4"/>
                 </a:solidFill>
                 <a:latin typeface="Segoe UI" panose="020B0502040204020203" pitchFamily="34" charset="0"/>
               </a:rPr>
-              <a:t>TECH STACK:
+              <a:t>TECH STACK
 Streamlit, DeepFace, TensorFlow, OpenCV</a:t>
             </a:r>
-            <a:endParaRPr lang="en-IN" sz="1100" b="1">
+            <a:endParaRPr lang="en-IN" sz="900" b="1">
               <a:solidFill>
                 <a:srgbClr val="06B6D4"/>
               </a:solidFill>
@@ -3916,10 +4200,10 @@
       </p:sp>
       <p:sp>
         <p:nvSpPr>
-          <p:cNvPr id="9" name="Rectangle 8">
-            <a:extLst>
-              <a:ext uri="{FF2B5EF4-FFF2-40B4-BE49-F238E27FC236}">
-                <a16:creationId xmlns:a16="http://schemas.microsoft.com/office/drawing/2014/main" id="{07A9C28D-72E1-5D82-DC6B-CB9FF39BC64D}"/>
+          <p:cNvPr id="11" name="Rectangle: Rounded Corners 10">
+            <a:extLst>
+              <a:ext uri="{FF2B5EF4-FFF2-40B4-BE49-F238E27FC236}">
+                <a16:creationId xmlns:a16="http://schemas.microsoft.com/office/drawing/2014/main" id="{9D18CC0E-3A60-195B-AC7D-99C05334BC21}"/>
               </a:ext>
             </a:extLst>
           </p:cNvPr>
@@ -3931,7 +4215,7 @@
             <a:off x="4445000" y="1143000"/>
             <a:ext cx="7366000" cy="4318000"/>
           </a:xfrm>
-          <a:prstGeom prst="rect">
+          <a:prstGeom prst="roundRect">
             <a:avLst/>
           </a:prstGeom>
           <a:solidFill>
@@ -3984,10 +4268,10 @@
       </p:sp>
       <p:pic>
         <p:nvPicPr>
-          <p:cNvPr id="11" name="Picture 10">
-            <a:extLst>
-              <a:ext uri="{FF2B5EF4-FFF2-40B4-BE49-F238E27FC236}">
-                <a16:creationId xmlns:a16="http://schemas.microsoft.com/office/drawing/2014/main" id="{E89290CC-6670-478C-9BD5-52504661BDEE}"/>
+          <p:cNvPr id="13" name="Picture 12">
+            <a:extLst>
+              <a:ext uri="{FF2B5EF4-FFF2-40B4-BE49-F238E27FC236}">
+                <a16:creationId xmlns:a16="http://schemas.microsoft.com/office/drawing/2014/main" id="{5EEF4818-482B-8E76-88D8-C7A4B7F31653}"/>
               </a:ext>
             </a:extLst>
           </p:cNvPr>
@@ -4026,7 +4310,7 @@
     </p:spTree>
     <p:extLst>
       <p:ext uri="{BB962C8B-B14F-4D97-AF65-F5344CB8AC3E}">
-        <p14:creationId xmlns:p14="http://schemas.microsoft.com/office/powerpoint/2010/main" val="291847158"/>
+        <p14:creationId xmlns:p14="http://schemas.microsoft.com/office/powerpoint/2010/main" val="1253033697"/>
       </p:ext>
     </p:extLst>
   </p:cSld>
@@ -4055,158 +4339,26 @@
       </p:grpSpPr>
       <p:sp>
         <p:nvSpPr>
-          <p:cNvPr id="2" name="TextBox 1">
-            <a:extLst>
-              <a:ext uri="{FF2B5EF4-FFF2-40B4-BE49-F238E27FC236}">
-                <a16:creationId xmlns:a16="http://schemas.microsoft.com/office/drawing/2014/main" id="{26D9FA3C-FD2C-61BE-BA01-5050282A6F50}"/>
-              </a:ext>
-            </a:extLst>
-          </p:cNvPr>
-          <p:cNvSpPr txBox="1"/>
-          <p:nvPr/>
-        </p:nvSpPr>
-        <p:spPr>
-          <a:xfrm>
-            <a:off x="508000" y="508000"/>
-            <a:ext cx="3810000" cy="400110"/>
+          <p:cNvPr id="2" name="Rectangle 1">
+            <a:extLst>
+              <a:ext uri="{FF2B5EF4-FFF2-40B4-BE49-F238E27FC236}">
+                <a16:creationId xmlns:a16="http://schemas.microsoft.com/office/drawing/2014/main" id="{ECFE3529-2CA8-EB1C-03C0-AC4C0A059B17}"/>
+              </a:ext>
+            </a:extLst>
+          </p:cNvPr>
+          <p:cNvSpPr/>
+          <p:nvPr/>
+        </p:nvSpPr>
+        <p:spPr>
+          <a:xfrm>
+            <a:off x="0" y="0"/>
+            <a:ext cx="76200" cy="6858000"/>
           </a:xfrm>
           <a:prstGeom prst="rect">
             <a:avLst/>
           </a:prstGeom>
-          <a:noFill/>
-        </p:spPr>
-        <p:txBody>
-          <a:bodyPr vert="horz" rtlCol="0">
-            <a:spAutoFit/>
-          </a:bodyPr>
-          <a:lstStyle/>
-          <a:p>
-            <a:r>
-              <a:rPr lang="en-US" sz="1000" b="1">
-                <a:solidFill>
-                  <a:srgbClr val="94A3B8"/>
-                </a:solidFill>
-                <a:latin typeface="Segoe UI" panose="020B0502040204020203" pitchFamily="34" charset="0"/>
-              </a:rPr>
-              <a:t>PROJECT 10 OF 11  â€¢  UNSUPERVISED LEARNING &amp; SPECIES CATEGORIZATION</a:t>
-            </a:r>
-            <a:endParaRPr lang="en-IN" sz="1000" b="1">
-              <a:solidFill>
-                <a:srgbClr val="94A3B8"/>
-              </a:solidFill>
-              <a:latin typeface="Segoe UI" panose="020B0502040204020203" pitchFamily="34" charset="0"/>
-            </a:endParaRPr>
-          </a:p>
-        </p:txBody>
-      </p:sp>
-      <p:sp>
-        <p:nvSpPr>
-          <p:cNvPr id="3" name="TextBox 2">
-            <a:extLst>
-              <a:ext uri="{FF2B5EF4-FFF2-40B4-BE49-F238E27FC236}">
-                <a16:creationId xmlns:a16="http://schemas.microsoft.com/office/drawing/2014/main" id="{32DA24D1-A5D6-8893-53F3-7EBDD2A60BCE}"/>
-              </a:ext>
-            </a:extLst>
-          </p:cNvPr>
-          <p:cNvSpPr txBox="1"/>
-          <p:nvPr/>
-        </p:nvSpPr>
-        <p:spPr>
-          <a:xfrm>
-            <a:off x="508000" y="762000"/>
-            <a:ext cx="3810000" cy="769441"/>
-          </a:xfrm>
-          <a:prstGeom prst="rect">
-            <a:avLst/>
-          </a:prstGeom>
-          <a:noFill/>
-        </p:spPr>
-        <p:txBody>
-          <a:bodyPr vert="horz" wrap="square" rtlCol="0">
-            <a:spAutoFit/>
-          </a:bodyPr>
-          <a:lstStyle/>
-          <a:p>
-            <a:r>
-              <a:rPr lang="en-IN" sz="2200" b="1">
-                <a:solidFill>
-                  <a:srgbClr val="FFFFFF"/>
-                </a:solidFill>
-                <a:latin typeface="Segoe UI" panose="020B0502040204020203" pitchFamily="34" charset="0"/>
-              </a:rPr>
-              <a:t>Iris Flower K-Means Clustering</a:t>
-            </a:r>
-          </a:p>
-        </p:txBody>
-      </p:sp>
-      <p:sp>
-        <p:nvSpPr>
-          <p:cNvPr id="4" name="TextBox 3">
-            <a:extLst>
-              <a:ext uri="{FF2B5EF4-FFF2-40B4-BE49-F238E27FC236}">
-                <a16:creationId xmlns:a16="http://schemas.microsoft.com/office/drawing/2014/main" id="{5D26ED68-73CD-F96C-4242-D21AA9766D7E}"/>
-              </a:ext>
-            </a:extLst>
-          </p:cNvPr>
-          <p:cNvSpPr txBox="1"/>
-          <p:nvPr/>
-        </p:nvSpPr>
-        <p:spPr>
-          <a:xfrm>
-            <a:off x="508000" y="1714500"/>
-            <a:ext cx="3810000" cy="461665"/>
-          </a:xfrm>
-          <a:prstGeom prst="rect">
-            <a:avLst/>
-          </a:prstGeom>
-          <a:noFill/>
-        </p:spPr>
-        <p:txBody>
-          <a:bodyPr vert="horz" wrap="square" rtlCol="0">
-            <a:spAutoFit/>
-          </a:bodyPr>
-          <a:lstStyle/>
-          <a:p>
-            <a:r>
-              <a:rPr lang="en-US" sz="1200">
-                <a:solidFill>
-                  <a:srgbClr val="94A3B8"/>
-                </a:solidFill>
-                <a:latin typeface="Segoe UI" panose="020B0502040204020203" pitchFamily="34" charset="0"/>
-              </a:rPr>
-              <a:t>Classic ML clustering visualization analyzing the biological features of Iris flowers</a:t>
-            </a:r>
-            <a:endParaRPr lang="en-IN" sz="1200">
-              <a:solidFill>
-                <a:srgbClr val="94A3B8"/>
-              </a:solidFill>
-              <a:latin typeface="Segoe UI" panose="020B0502040204020203" pitchFamily="34" charset="0"/>
-            </a:endParaRPr>
-          </a:p>
-        </p:txBody>
-      </p:sp>
-      <p:sp>
-        <p:nvSpPr>
-          <p:cNvPr id="5" name="Rectangle 4">
-            <a:extLst>
-              <a:ext uri="{FF2B5EF4-FFF2-40B4-BE49-F238E27FC236}">
-                <a16:creationId xmlns:a16="http://schemas.microsoft.com/office/drawing/2014/main" id="{078A390A-785D-F767-427C-79577785C3C6}"/>
-              </a:ext>
-            </a:extLst>
-          </p:cNvPr>
-          <p:cNvSpPr/>
-          <p:nvPr/>
-        </p:nvSpPr>
-        <p:spPr>
-          <a:xfrm>
-            <a:off x="508000" y="2476500"/>
-            <a:ext cx="762000" cy="38100"/>
-          </a:xfrm>
-          <a:prstGeom prst="rect">
-            <a:avLst/>
-          </a:prstGeom>
           <a:solidFill>
-            <a:srgbClr val="06B6D4"/>
+            <a:srgbClr val="FB923C"/>
           </a:solidFill>
           <a:ln w="19050" cap="flat" cmpd="sng" algn="ctr">
             <a:noFill/>
@@ -4255,10 +4407,72 @@
       </p:sp>
       <p:sp>
         <p:nvSpPr>
-          <p:cNvPr id="6" name="TextBox 5">
-            <a:extLst>
-              <a:ext uri="{FF2B5EF4-FFF2-40B4-BE49-F238E27FC236}">
-                <a16:creationId xmlns:a16="http://schemas.microsoft.com/office/drawing/2014/main" id="{7F974445-150F-D934-ADB3-288679DB7F9D}"/>
+          <p:cNvPr id="3" name="Rectangle: Rounded Corners 2">
+            <a:extLst>
+              <a:ext uri="{FF2B5EF4-FFF2-40B4-BE49-F238E27FC236}">
+                <a16:creationId xmlns:a16="http://schemas.microsoft.com/office/drawing/2014/main" id="{5423FF24-EA3B-B265-623A-0263C839654C}"/>
+              </a:ext>
+            </a:extLst>
+          </p:cNvPr>
+          <p:cNvSpPr/>
+          <p:nvPr/>
+        </p:nvSpPr>
+        <p:spPr>
+          <a:xfrm>
+            <a:off x="508000" y="457200"/>
+            <a:ext cx="1651000" cy="254000"/>
+          </a:xfrm>
+          <a:prstGeom prst="roundRect">
+            <a:avLst/>
+          </a:prstGeom>
+          <a:solidFill>
+            <a:srgbClr val="1E293B"/>
+          </a:solidFill>
+          <a:ln w="12700">
+            <a:solidFill>
+              <a:srgbClr val="FB923C"/>
+            </a:solidFill>
+          </a:ln>
+        </p:spPr>
+        <p:style>
+          <a:lnRef idx="2">
+            <a:schemeClr val="accent1">
+              <a:shade val="15000"/>
+            </a:schemeClr>
+          </a:lnRef>
+          <a:fillRef idx="1">
+            <a:schemeClr val="accent1"/>
+          </a:fillRef>
+          <a:effectRef idx="0">
+            <a:schemeClr val="accent1"/>
+          </a:effectRef>
+          <a:fontRef idx="minor">
+            <a:schemeClr val="lt1"/>
+          </a:fontRef>
+        </p:style>
+        <p:txBody>
+          <a:bodyPr rtlCol="0" anchor="ctr"/>
+          <a:lstStyle/>
+          <a:p>
+            <a:pPr algn="ctr"/>
+            <a:r>
+              <a:rPr lang="en-IN" sz="900" b="1">
+                <a:solidFill>
+                  <a:srgbClr val="FFFFFF"/>
+                </a:solidFill>
+                <a:latin typeface="Segoe UI" panose="020B0502040204020203" pitchFamily="34" charset="0"/>
+              </a:rPr>
+              <a:t>UNSUPERVISED ML</a:t>
+            </a:r>
+          </a:p>
+        </p:txBody>
+      </p:sp>
+      <p:sp>
+        <p:nvSpPr>
+          <p:cNvPr id="4" name="TextBox 3">
+            <a:extLst>
+              <a:ext uri="{FF2B5EF4-FFF2-40B4-BE49-F238E27FC236}">
+                <a16:creationId xmlns:a16="http://schemas.microsoft.com/office/drawing/2014/main" id="{7DB7BCCE-5876-B409-7708-A60F40AA99E7}"/>
               </a:ext>
             </a:extLst>
           </p:cNvPr>
@@ -4267,8 +4481,8 @@
         </p:nvSpPr>
         <p:spPr>
           <a:xfrm>
-            <a:off x="508000" y="2603500"/>
-            <a:ext cx="3810000" cy="261610"/>
+            <a:off x="2349500" y="457200"/>
+            <a:ext cx="2159000" cy="230832"/>
           </a:xfrm>
           <a:prstGeom prst="rect">
             <a:avLst/>
@@ -4282,6 +4496,200 @@
           <a:lstStyle/>
           <a:p>
             <a:r>
+              <a:rPr lang="en-IN" sz="900" b="1">
+                <a:solidFill>
+                  <a:srgbClr val="94A3B8"/>
+                </a:solidFill>
+                <a:latin typeface="Segoe UI" panose="020B0502040204020203" pitchFamily="34" charset="0"/>
+              </a:rPr>
+              <a:t>PROJECT 10 OF 11</a:t>
+            </a:r>
+          </a:p>
+        </p:txBody>
+      </p:sp>
+      <p:sp>
+        <p:nvSpPr>
+          <p:cNvPr id="5" name="TextBox 4">
+            <a:extLst>
+              <a:ext uri="{FF2B5EF4-FFF2-40B4-BE49-F238E27FC236}">
+                <a16:creationId xmlns:a16="http://schemas.microsoft.com/office/drawing/2014/main" id="{C65D36CA-62D9-3D90-F6EF-C0753DFCFB51}"/>
+              </a:ext>
+            </a:extLst>
+          </p:cNvPr>
+          <p:cNvSpPr txBox="1"/>
+          <p:nvPr/>
+        </p:nvSpPr>
+        <p:spPr>
+          <a:xfrm>
+            <a:off x="508000" y="787400"/>
+            <a:ext cx="3810000" cy="769441"/>
+          </a:xfrm>
+          <a:prstGeom prst="rect">
+            <a:avLst/>
+          </a:prstGeom>
+          <a:noFill/>
+        </p:spPr>
+        <p:txBody>
+          <a:bodyPr vert="horz" wrap="square" rtlCol="0">
+            <a:spAutoFit/>
+          </a:bodyPr>
+          <a:lstStyle/>
+          <a:p>
+            <a:r>
+              <a:rPr lang="en-IN" sz="2200" b="1">
+                <a:solidFill>
+                  <a:srgbClr val="FFFFFF"/>
+                </a:solidFill>
+                <a:latin typeface="Segoe UI" panose="020B0502040204020203" pitchFamily="34" charset="0"/>
+              </a:rPr>
+              <a:t>Iris Flower K-Means Clustering</a:t>
+            </a:r>
+          </a:p>
+        </p:txBody>
+      </p:sp>
+      <p:sp>
+        <p:nvSpPr>
+          <p:cNvPr id="6" name="TextBox 5">
+            <a:extLst>
+              <a:ext uri="{FF2B5EF4-FFF2-40B4-BE49-F238E27FC236}">
+                <a16:creationId xmlns:a16="http://schemas.microsoft.com/office/drawing/2014/main" id="{0D41A5FD-56DE-E6E0-FCA7-3DAC32995FC5}"/>
+              </a:ext>
+            </a:extLst>
+          </p:cNvPr>
+          <p:cNvSpPr txBox="1"/>
+          <p:nvPr/>
+        </p:nvSpPr>
+        <p:spPr>
+          <a:xfrm>
+            <a:off x="508000" y="1714500"/>
+            <a:ext cx="3810000" cy="461665"/>
+          </a:xfrm>
+          <a:prstGeom prst="rect">
+            <a:avLst/>
+          </a:prstGeom>
+          <a:noFill/>
+        </p:spPr>
+        <p:txBody>
+          <a:bodyPr vert="horz" wrap="square" rtlCol="0">
+            <a:spAutoFit/>
+          </a:bodyPr>
+          <a:lstStyle/>
+          <a:p>
+            <a:r>
+              <a:rPr lang="en-US" sz="1200">
+                <a:solidFill>
+                  <a:srgbClr val="94A3B8"/>
+                </a:solidFill>
+                <a:latin typeface="Segoe UI" panose="020B0502040204020203" pitchFamily="34" charset="0"/>
+              </a:rPr>
+              <a:t>Classic ML clustering visualization analyzing the biological features of Iris flowers</a:t>
+            </a:r>
+            <a:endParaRPr lang="en-IN" sz="1200">
+              <a:solidFill>
+                <a:srgbClr val="94A3B8"/>
+              </a:solidFill>
+              <a:latin typeface="Segoe UI" panose="020B0502040204020203" pitchFamily="34" charset="0"/>
+            </a:endParaRPr>
+          </a:p>
+        </p:txBody>
+      </p:sp>
+      <p:sp>
+        <p:nvSpPr>
+          <p:cNvPr id="7" name="Rectangle 6">
+            <a:extLst>
+              <a:ext uri="{FF2B5EF4-FFF2-40B4-BE49-F238E27FC236}">
+                <a16:creationId xmlns:a16="http://schemas.microsoft.com/office/drawing/2014/main" id="{ED9C4492-91CB-AEE5-556B-2D6A65A88788}"/>
+              </a:ext>
+            </a:extLst>
+          </p:cNvPr>
+          <p:cNvSpPr/>
+          <p:nvPr/>
+        </p:nvSpPr>
+        <p:spPr>
+          <a:xfrm>
+            <a:off x="508000" y="2476500"/>
+            <a:ext cx="762000" cy="25400"/>
+          </a:xfrm>
+          <a:prstGeom prst="rect">
+            <a:avLst/>
+          </a:prstGeom>
+          <a:solidFill>
+            <a:srgbClr val="FB923C"/>
+          </a:solidFill>
+          <a:ln w="19050" cap="flat" cmpd="sng" algn="ctr">
+            <a:noFill/>
+            <a:prstDash val="solid"/>
+            <a:miter lim="800000"/>
+          </a:ln>
+          <a:effectLst/>
+          <a:extLst>
+            <a:ext uri="{91240B29-F687-4F45-9708-019B960494DF}">
+              <a14:hiddenLine xmlns:a14="http://schemas.microsoft.com/office/drawing/2010/main" w="19050" cap="flat" cmpd="sng" algn="ctr">
+                <a:solidFill>
+                  <a:schemeClr val="accent1">
+                    <a:shade val="15000"/>
+                  </a:schemeClr>
+                </a:solidFill>
+                <a:prstDash val="solid"/>
+                <a:miter lim="800000"/>
+              </a14:hiddenLine>
+            </a:ext>
+          </a:extLst>
+        </p:spPr>
+        <p:style>
+          <a:lnRef idx="2">
+            <a:schemeClr val="accent1">
+              <a:shade val="15000"/>
+            </a:schemeClr>
+          </a:lnRef>
+          <a:fillRef idx="1">
+            <a:schemeClr val="accent1"/>
+          </a:fillRef>
+          <a:effectRef idx="0">
+            <a:schemeClr val="accent1"/>
+          </a:effectRef>
+          <a:fontRef idx="minor">
+            <a:schemeClr val="lt1"/>
+          </a:fontRef>
+        </p:style>
+        <p:txBody>
+          <a:bodyPr rtlCol="0" anchor="ctr"/>
+          <a:lstStyle/>
+          <a:p>
+            <a:pPr algn="ctr"/>
+            <a:endParaRPr lang="en-IN"/>
+          </a:p>
+        </p:txBody>
+      </p:sp>
+      <p:sp>
+        <p:nvSpPr>
+          <p:cNvPr id="8" name="TextBox 7">
+            <a:extLst>
+              <a:ext uri="{FF2B5EF4-FFF2-40B4-BE49-F238E27FC236}">
+                <a16:creationId xmlns:a16="http://schemas.microsoft.com/office/drawing/2014/main" id="{3710E338-BA1F-4845-FAA2-D6DA499E6523}"/>
+              </a:ext>
+            </a:extLst>
+          </p:cNvPr>
+          <p:cNvSpPr txBox="1"/>
+          <p:nvPr/>
+        </p:nvSpPr>
+        <p:spPr>
+          <a:xfrm>
+            <a:off x="508000" y="2603500"/>
+            <a:ext cx="3810000" cy="261610"/>
+          </a:xfrm>
+          <a:prstGeom prst="rect">
+            <a:avLst/>
+          </a:prstGeom>
+          <a:noFill/>
+        </p:spPr>
+        <p:txBody>
+          <a:bodyPr vert="horz" rtlCol="0">
+            <a:spAutoFit/>
+          </a:bodyPr>
+          <a:lstStyle/>
+          <a:p>
+            <a:r>
               <a:rPr lang="en-IN" sz="1100" b="1">
                 <a:solidFill>
                   <a:srgbClr val="FB923C"/>
@@ -4295,10 +4703,10 @@
       </p:sp>
       <p:sp>
         <p:nvSpPr>
-          <p:cNvPr id="7" name="TextBox 6">
-            <a:extLst>
-              <a:ext uri="{FF2B5EF4-FFF2-40B4-BE49-F238E27FC236}">
-                <a16:creationId xmlns:a16="http://schemas.microsoft.com/office/drawing/2014/main" id="{CFC51A10-D32D-F839-3515-741BB4BE34C0}"/>
+          <p:cNvPr id="9" name="TextBox 8">
+            <a:extLst>
+              <a:ext uri="{FF2B5EF4-FFF2-40B4-BE49-F238E27FC236}">
+                <a16:creationId xmlns:a16="http://schemas.microsoft.com/office/drawing/2014/main" id="{78DCC5FD-96ED-A5E2-5F6F-A5D622CBBE8B}"/>
               </a:ext>
             </a:extLst>
           </p:cNvPr>
@@ -4308,7 +4716,7 @@
         <p:spPr>
           <a:xfrm>
             <a:off x="508000" y="2921000"/>
-            <a:ext cx="3810000" cy="1446550"/>
+            <a:ext cx="3810000" cy="1277273"/>
           </a:xfrm>
           <a:prstGeom prst="rect">
             <a:avLst/>
@@ -4328,9 +4736,9 @@
                 </a:solidFill>
                 <a:latin typeface="Segoe UI" panose="020B0502040204020203" pitchFamily="34" charset="0"/>
               </a:rPr>
-              <a:t>â€¢ Pair-wise feature selection dropdowns for sepal/petal dimensions.
-â€¢ Side-by-side comparison of K-Means clusters and actual species.
-â€¢ Dynamic centroids mapped to scatter plot in real-time.</a:t>
+              <a:t>- Pair-wise feature selection dropdowns for sepal/petal dimensions.
+- Side-by-side comparison of K-Means clusters and actual species.
+- Dynamic centroids mapped to scatter plot in real-time.</a:t>
             </a:r>
             <a:endParaRPr lang="en-IN" sz="1100">
               <a:solidFill>
@@ -4343,43 +4751,65 @@
       </p:sp>
       <p:sp>
         <p:nvSpPr>
-          <p:cNvPr id="8" name="TextBox 7">
-            <a:extLst>
-              <a:ext uri="{FF2B5EF4-FFF2-40B4-BE49-F238E27FC236}">
-                <a16:creationId xmlns:a16="http://schemas.microsoft.com/office/drawing/2014/main" id="{019F48FD-7309-F5E8-6071-971D69DE3BAD}"/>
-              </a:ext>
-            </a:extLst>
-          </p:cNvPr>
-          <p:cNvSpPr txBox="1"/>
-          <p:nvPr/>
-        </p:nvSpPr>
-        <p:spPr>
-          <a:xfrm>
-            <a:off x="508000" y="5461000"/>
-            <a:ext cx="3810000" cy="430887"/>
-          </a:xfrm>
-          <a:prstGeom prst="rect">
-            <a:avLst/>
-          </a:prstGeom>
-          <a:noFill/>
-        </p:spPr>
-        <p:txBody>
-          <a:bodyPr vert="horz" wrap="square" rtlCol="0">
-            <a:spAutoFit/>
-          </a:bodyPr>
-          <a:lstStyle/>
-          <a:p>
-            <a:r>
-              <a:rPr lang="en-US" sz="1100" b="1">
+          <p:cNvPr id="10" name="Rectangle: Rounded Corners 9">
+            <a:extLst>
+              <a:ext uri="{FF2B5EF4-FFF2-40B4-BE49-F238E27FC236}">
+                <a16:creationId xmlns:a16="http://schemas.microsoft.com/office/drawing/2014/main" id="{13C9B5C4-57BD-7620-3442-00FFD513F748}"/>
+              </a:ext>
+            </a:extLst>
+          </p:cNvPr>
+          <p:cNvSpPr/>
+          <p:nvPr/>
+        </p:nvSpPr>
+        <p:spPr>
+          <a:xfrm>
+            <a:off x="508000" y="5397500"/>
+            <a:ext cx="3810000" cy="635000"/>
+          </a:xfrm>
+          <a:prstGeom prst="roundRect">
+            <a:avLst/>
+          </a:prstGeom>
+          <a:solidFill>
+            <a:srgbClr val="1E293B"/>
+          </a:solidFill>
+          <a:ln w="12700">
+            <a:solidFill>
+              <a:srgbClr val="06B6D4"/>
+            </a:solidFill>
+          </a:ln>
+        </p:spPr>
+        <p:style>
+          <a:lnRef idx="2">
+            <a:schemeClr val="accent1">
+              <a:shade val="15000"/>
+            </a:schemeClr>
+          </a:lnRef>
+          <a:fillRef idx="1">
+            <a:schemeClr val="accent1"/>
+          </a:fillRef>
+          <a:effectRef idx="0">
+            <a:schemeClr val="accent1"/>
+          </a:effectRef>
+          <a:fontRef idx="minor">
+            <a:schemeClr val="lt1"/>
+          </a:fontRef>
+        </p:style>
+        <p:txBody>
+          <a:bodyPr rtlCol="0" anchor="ctr"/>
+          <a:lstStyle/>
+          <a:p>
+            <a:pPr algn="ctr"/>
+            <a:r>
+              <a:rPr lang="en-US" sz="900" b="1">
                 <a:solidFill>
                   <a:srgbClr val="06B6D4"/>
                 </a:solidFill>
                 <a:latin typeface="Segoe UI" panose="020B0502040204020203" pitchFamily="34" charset="0"/>
               </a:rPr>
-              <a:t>TECH STACK:
+              <a:t>TECH STACK
 Streamlit, Scikit-learn, Plotly, NumPy</a:t>
             </a:r>
-            <a:endParaRPr lang="en-IN" sz="1100" b="1">
+            <a:endParaRPr lang="en-IN" sz="900" b="1">
               <a:solidFill>
                 <a:srgbClr val="06B6D4"/>
               </a:solidFill>
@@ -4390,10 +4820,10 @@
       </p:sp>
       <p:sp>
         <p:nvSpPr>
-          <p:cNvPr id="9" name="Rectangle 8">
-            <a:extLst>
-              <a:ext uri="{FF2B5EF4-FFF2-40B4-BE49-F238E27FC236}">
-                <a16:creationId xmlns:a16="http://schemas.microsoft.com/office/drawing/2014/main" id="{7FCB0030-6AA2-38E2-9E72-5CF7F73E3124}"/>
+          <p:cNvPr id="11" name="Rectangle: Rounded Corners 10">
+            <a:extLst>
+              <a:ext uri="{FF2B5EF4-FFF2-40B4-BE49-F238E27FC236}">
+                <a16:creationId xmlns:a16="http://schemas.microsoft.com/office/drawing/2014/main" id="{151A28D1-F2E2-3D75-D1E7-7D7A86477E37}"/>
               </a:ext>
             </a:extLst>
           </p:cNvPr>
@@ -4405,7 +4835,7 @@
             <a:off x="4445000" y="1143000"/>
             <a:ext cx="7366000" cy="4318000"/>
           </a:xfrm>
-          <a:prstGeom prst="rect">
+          <a:prstGeom prst="roundRect">
             <a:avLst/>
           </a:prstGeom>
           <a:solidFill>
@@ -4458,10 +4888,10 @@
       </p:sp>
       <p:pic>
         <p:nvPicPr>
-          <p:cNvPr id="11" name="Picture 10">
-            <a:extLst>
-              <a:ext uri="{FF2B5EF4-FFF2-40B4-BE49-F238E27FC236}">
-                <a16:creationId xmlns:a16="http://schemas.microsoft.com/office/drawing/2014/main" id="{AC78FB72-0BD0-CE94-4294-F3CFA9AB6447}"/>
+          <p:cNvPr id="13" name="Picture 12">
+            <a:extLst>
+              <a:ext uri="{FF2B5EF4-FFF2-40B4-BE49-F238E27FC236}">
+                <a16:creationId xmlns:a16="http://schemas.microsoft.com/office/drawing/2014/main" id="{136F4098-D50F-760C-8C32-65A02F73582A}"/>
               </a:ext>
             </a:extLst>
           </p:cNvPr>
@@ -4500,7 +4930,7 @@
     </p:spTree>
     <p:extLst>
       <p:ext uri="{BB962C8B-B14F-4D97-AF65-F5344CB8AC3E}">
-        <p14:creationId xmlns:p14="http://schemas.microsoft.com/office/powerpoint/2010/main" val="820665108"/>
+        <p14:creationId xmlns:p14="http://schemas.microsoft.com/office/powerpoint/2010/main" val="538052605"/>
       </p:ext>
     </p:extLst>
   </p:cSld>
@@ -4529,142 +4959,10 @@
       </p:grpSpPr>
       <p:sp>
         <p:nvSpPr>
-          <p:cNvPr id="2" name="TextBox 1">
-            <a:extLst>
-              <a:ext uri="{FF2B5EF4-FFF2-40B4-BE49-F238E27FC236}">
-                <a16:creationId xmlns:a16="http://schemas.microsoft.com/office/drawing/2014/main" id="{FC57D104-96B8-3DBB-9054-7B447380A26E}"/>
-              </a:ext>
-            </a:extLst>
-          </p:cNvPr>
-          <p:cNvSpPr txBox="1"/>
-          <p:nvPr/>
-        </p:nvSpPr>
-        <p:spPr>
-          <a:xfrm>
-            <a:off x="508000" y="508000"/>
-            <a:ext cx="3810000" cy="400110"/>
-          </a:xfrm>
-          <a:prstGeom prst="rect">
-            <a:avLst/>
-          </a:prstGeom>
-          <a:noFill/>
-        </p:spPr>
-        <p:txBody>
-          <a:bodyPr vert="horz" rtlCol="0">
-            <a:spAutoFit/>
-          </a:bodyPr>
-          <a:lstStyle/>
-          <a:p>
-            <a:r>
-              <a:rPr lang="en-US" sz="1000" b="1">
-                <a:solidFill>
-                  <a:srgbClr val="94A3B8"/>
-                </a:solidFill>
-                <a:latin typeface="Segoe UI" panose="020B0502040204020203" pitchFamily="34" charset="0"/>
-              </a:rPr>
-              <a:t>PROJECT 11 OF 11  â€¢  DEEP LEARNING &amp; CLINICAL DIAGNOSTICS</a:t>
-            </a:r>
-            <a:endParaRPr lang="en-IN" sz="1000" b="1">
-              <a:solidFill>
-                <a:srgbClr val="94A3B8"/>
-              </a:solidFill>
-              <a:latin typeface="Segoe UI" panose="020B0502040204020203" pitchFamily="34" charset="0"/>
-            </a:endParaRPr>
-          </a:p>
-        </p:txBody>
-      </p:sp>
-      <p:sp>
-        <p:nvSpPr>
-          <p:cNvPr id="3" name="TextBox 2">
-            <a:extLst>
-              <a:ext uri="{FF2B5EF4-FFF2-40B4-BE49-F238E27FC236}">
-                <a16:creationId xmlns:a16="http://schemas.microsoft.com/office/drawing/2014/main" id="{2F983560-5BB2-8B87-6C80-A7A1BA8457D2}"/>
-              </a:ext>
-            </a:extLst>
-          </p:cNvPr>
-          <p:cNvSpPr txBox="1"/>
-          <p:nvPr/>
-        </p:nvSpPr>
-        <p:spPr>
-          <a:xfrm>
-            <a:off x="508000" y="762000"/>
-            <a:ext cx="3810000" cy="769441"/>
-          </a:xfrm>
-          <a:prstGeom prst="rect">
-            <a:avLst/>
-          </a:prstGeom>
-          <a:noFill/>
-        </p:spPr>
-        <p:txBody>
-          <a:bodyPr vert="horz" wrap="square" rtlCol="0">
-            <a:spAutoFit/>
-          </a:bodyPr>
-          <a:lstStyle/>
-          <a:p>
-            <a:r>
-              <a:rPr lang="en-IN" sz="2200" b="1">
-                <a:solidFill>
-                  <a:srgbClr val="FFFFFF"/>
-                </a:solidFill>
-                <a:latin typeface="Segoe UI" panose="020B0502040204020203" pitchFamily="34" charset="0"/>
-              </a:rPr>
-              <a:t>COVID-19 Chest X-Ray Detector</a:t>
-            </a:r>
-          </a:p>
-        </p:txBody>
-      </p:sp>
-      <p:sp>
-        <p:nvSpPr>
-          <p:cNvPr id="4" name="TextBox 3">
-            <a:extLst>
-              <a:ext uri="{FF2B5EF4-FFF2-40B4-BE49-F238E27FC236}">
-                <a16:creationId xmlns:a16="http://schemas.microsoft.com/office/drawing/2014/main" id="{72B1B69E-8403-6D46-4F78-98789AE3846F}"/>
-              </a:ext>
-            </a:extLst>
-          </p:cNvPr>
-          <p:cNvSpPr txBox="1"/>
-          <p:nvPr/>
-        </p:nvSpPr>
-        <p:spPr>
-          <a:xfrm>
-            <a:off x="508000" y="1714500"/>
-            <a:ext cx="3810000" cy="461665"/>
-          </a:xfrm>
-          <a:prstGeom prst="rect">
-            <a:avLst/>
-          </a:prstGeom>
-          <a:noFill/>
-        </p:spPr>
-        <p:txBody>
-          <a:bodyPr vert="horz" wrap="square" rtlCol="0">
-            <a:spAutoFit/>
-          </a:bodyPr>
-          <a:lstStyle/>
-          <a:p>
-            <a:r>
-              <a:rPr lang="en-US" sz="1200">
-                <a:solidFill>
-                  <a:srgbClr val="94A3B8"/>
-                </a:solidFill>
-                <a:latin typeface="Segoe UI" panose="020B0502040204020203" pitchFamily="34" charset="0"/>
-              </a:rPr>
-              <a:t>Medical imaging diagnostic app scanning chest X-rays to detect potential COVID-19 infection</a:t>
-            </a:r>
-            <a:endParaRPr lang="en-IN" sz="1200">
-              <a:solidFill>
-                <a:srgbClr val="94A3B8"/>
-              </a:solidFill>
-              <a:latin typeface="Segoe UI" panose="020B0502040204020203" pitchFamily="34" charset="0"/>
-            </a:endParaRPr>
-          </a:p>
-        </p:txBody>
-      </p:sp>
-      <p:sp>
-        <p:nvSpPr>
-          <p:cNvPr id="5" name="Rectangle 4">
-            <a:extLst>
-              <a:ext uri="{FF2B5EF4-FFF2-40B4-BE49-F238E27FC236}">
-                <a16:creationId xmlns:a16="http://schemas.microsoft.com/office/drawing/2014/main" id="{05A07A6B-F7CF-1550-C014-0AF5515C32FF}"/>
+          <p:cNvPr id="2" name="Rectangle 1">
+            <a:extLst>
+              <a:ext uri="{FF2B5EF4-FFF2-40B4-BE49-F238E27FC236}">
+                <a16:creationId xmlns:a16="http://schemas.microsoft.com/office/drawing/2014/main" id="{05691D0C-B53D-1FCF-B646-385E389E01AA}"/>
               </a:ext>
             </a:extLst>
           </p:cNvPr>
@@ -4673,8 +4971,8 @@
         </p:nvSpPr>
         <p:spPr>
           <a:xfrm>
-            <a:off x="508000" y="2476500"/>
-            <a:ext cx="762000" cy="38100"/>
+            <a:off x="0" y="0"/>
+            <a:ext cx="76200" cy="6858000"/>
           </a:xfrm>
           <a:prstGeom prst="rect">
             <a:avLst/>
@@ -4729,10 +5027,72 @@
       </p:sp>
       <p:sp>
         <p:nvSpPr>
-          <p:cNvPr id="6" name="TextBox 5">
-            <a:extLst>
-              <a:ext uri="{FF2B5EF4-FFF2-40B4-BE49-F238E27FC236}">
-                <a16:creationId xmlns:a16="http://schemas.microsoft.com/office/drawing/2014/main" id="{83858B19-A70B-7E4A-22E3-C7ADDEEB23E6}"/>
+          <p:cNvPr id="3" name="Rectangle: Rounded Corners 2">
+            <a:extLst>
+              <a:ext uri="{FF2B5EF4-FFF2-40B4-BE49-F238E27FC236}">
+                <a16:creationId xmlns:a16="http://schemas.microsoft.com/office/drawing/2014/main" id="{18C013B8-129B-825B-AF76-E94F4590BAF8}"/>
+              </a:ext>
+            </a:extLst>
+          </p:cNvPr>
+          <p:cNvSpPr/>
+          <p:nvPr/>
+        </p:nvSpPr>
+        <p:spPr>
+          <a:xfrm>
+            <a:off x="508000" y="457200"/>
+            <a:ext cx="1651000" cy="254000"/>
+          </a:xfrm>
+          <a:prstGeom prst="roundRect">
+            <a:avLst/>
+          </a:prstGeom>
+          <a:solidFill>
+            <a:srgbClr val="1E293B"/>
+          </a:solidFill>
+          <a:ln w="12700">
+            <a:solidFill>
+              <a:srgbClr val="06B6D4"/>
+            </a:solidFill>
+          </a:ln>
+        </p:spPr>
+        <p:style>
+          <a:lnRef idx="2">
+            <a:schemeClr val="accent1">
+              <a:shade val="15000"/>
+            </a:schemeClr>
+          </a:lnRef>
+          <a:fillRef idx="1">
+            <a:schemeClr val="accent1"/>
+          </a:fillRef>
+          <a:effectRef idx="0">
+            <a:schemeClr val="accent1"/>
+          </a:effectRef>
+          <a:fontRef idx="minor">
+            <a:schemeClr val="lt1"/>
+          </a:fontRef>
+        </p:style>
+        <p:txBody>
+          <a:bodyPr rtlCol="0" anchor="ctr"/>
+          <a:lstStyle/>
+          <a:p>
+            <a:pPr algn="ctr"/>
+            <a:r>
+              <a:rPr lang="en-IN" sz="900" b="1">
+                <a:solidFill>
+                  <a:srgbClr val="FFFFFF"/>
+                </a:solidFill>
+                <a:latin typeface="Segoe UI" panose="020B0502040204020203" pitchFamily="34" charset="0"/>
+              </a:rPr>
+              <a:t>DEEP LEARNING</a:t>
+            </a:r>
+          </a:p>
+        </p:txBody>
+      </p:sp>
+      <p:sp>
+        <p:nvSpPr>
+          <p:cNvPr id="4" name="TextBox 3">
+            <a:extLst>
+              <a:ext uri="{FF2B5EF4-FFF2-40B4-BE49-F238E27FC236}">
+                <a16:creationId xmlns:a16="http://schemas.microsoft.com/office/drawing/2014/main" id="{7182081B-927D-12DF-B437-6A13C8E45A4F}"/>
               </a:ext>
             </a:extLst>
           </p:cNvPr>
@@ -4741,8 +5101,8 @@
         </p:nvSpPr>
         <p:spPr>
           <a:xfrm>
-            <a:off x="508000" y="2603500"/>
-            <a:ext cx="3810000" cy="261610"/>
+            <a:off x="2349500" y="457200"/>
+            <a:ext cx="2159000" cy="230832"/>
           </a:xfrm>
           <a:prstGeom prst="rect">
             <a:avLst/>
@@ -4756,6 +5116,200 @@
           <a:lstStyle/>
           <a:p>
             <a:r>
+              <a:rPr lang="en-IN" sz="900" b="1">
+                <a:solidFill>
+                  <a:srgbClr val="94A3B8"/>
+                </a:solidFill>
+                <a:latin typeface="Segoe UI" panose="020B0502040204020203" pitchFamily="34" charset="0"/>
+              </a:rPr>
+              <a:t>PROJECT 11 OF 11</a:t>
+            </a:r>
+          </a:p>
+        </p:txBody>
+      </p:sp>
+      <p:sp>
+        <p:nvSpPr>
+          <p:cNvPr id="5" name="TextBox 4">
+            <a:extLst>
+              <a:ext uri="{FF2B5EF4-FFF2-40B4-BE49-F238E27FC236}">
+                <a16:creationId xmlns:a16="http://schemas.microsoft.com/office/drawing/2014/main" id="{0B442D49-C927-6ADB-42C3-A2F361BB0AC0}"/>
+              </a:ext>
+            </a:extLst>
+          </p:cNvPr>
+          <p:cNvSpPr txBox="1"/>
+          <p:nvPr/>
+        </p:nvSpPr>
+        <p:spPr>
+          <a:xfrm>
+            <a:off x="508000" y="787400"/>
+            <a:ext cx="3810000" cy="769441"/>
+          </a:xfrm>
+          <a:prstGeom prst="rect">
+            <a:avLst/>
+          </a:prstGeom>
+          <a:noFill/>
+        </p:spPr>
+        <p:txBody>
+          <a:bodyPr vert="horz" wrap="square" rtlCol="0">
+            <a:spAutoFit/>
+          </a:bodyPr>
+          <a:lstStyle/>
+          <a:p>
+            <a:r>
+              <a:rPr lang="en-IN" sz="2200" b="1">
+                <a:solidFill>
+                  <a:srgbClr val="FFFFFF"/>
+                </a:solidFill>
+                <a:latin typeface="Segoe UI" panose="020B0502040204020203" pitchFamily="34" charset="0"/>
+              </a:rPr>
+              <a:t>COVID-19 Chest X-Ray Detector</a:t>
+            </a:r>
+          </a:p>
+        </p:txBody>
+      </p:sp>
+      <p:sp>
+        <p:nvSpPr>
+          <p:cNvPr id="6" name="TextBox 5">
+            <a:extLst>
+              <a:ext uri="{FF2B5EF4-FFF2-40B4-BE49-F238E27FC236}">
+                <a16:creationId xmlns:a16="http://schemas.microsoft.com/office/drawing/2014/main" id="{A0824212-D4A4-D549-DBAE-80816B05E94A}"/>
+              </a:ext>
+            </a:extLst>
+          </p:cNvPr>
+          <p:cNvSpPr txBox="1"/>
+          <p:nvPr/>
+        </p:nvSpPr>
+        <p:spPr>
+          <a:xfrm>
+            <a:off x="508000" y="1714500"/>
+            <a:ext cx="3810000" cy="461665"/>
+          </a:xfrm>
+          <a:prstGeom prst="rect">
+            <a:avLst/>
+          </a:prstGeom>
+          <a:noFill/>
+        </p:spPr>
+        <p:txBody>
+          <a:bodyPr vert="horz" wrap="square" rtlCol="0">
+            <a:spAutoFit/>
+          </a:bodyPr>
+          <a:lstStyle/>
+          <a:p>
+            <a:r>
+              <a:rPr lang="en-US" sz="1200">
+                <a:solidFill>
+                  <a:srgbClr val="94A3B8"/>
+                </a:solidFill>
+                <a:latin typeface="Segoe UI" panose="020B0502040204020203" pitchFamily="34" charset="0"/>
+              </a:rPr>
+              <a:t>Medical imaging diagnostic app scanning chest X-rays to detect potential COVID-19 infection</a:t>
+            </a:r>
+            <a:endParaRPr lang="en-IN" sz="1200">
+              <a:solidFill>
+                <a:srgbClr val="94A3B8"/>
+              </a:solidFill>
+              <a:latin typeface="Segoe UI" panose="020B0502040204020203" pitchFamily="34" charset="0"/>
+            </a:endParaRPr>
+          </a:p>
+        </p:txBody>
+      </p:sp>
+      <p:sp>
+        <p:nvSpPr>
+          <p:cNvPr id="7" name="Rectangle 6">
+            <a:extLst>
+              <a:ext uri="{FF2B5EF4-FFF2-40B4-BE49-F238E27FC236}">
+                <a16:creationId xmlns:a16="http://schemas.microsoft.com/office/drawing/2014/main" id="{8B7969CC-C9D2-67CE-F014-CA6249CEC4D6}"/>
+              </a:ext>
+            </a:extLst>
+          </p:cNvPr>
+          <p:cNvSpPr/>
+          <p:nvPr/>
+        </p:nvSpPr>
+        <p:spPr>
+          <a:xfrm>
+            <a:off x="508000" y="2476500"/>
+            <a:ext cx="762000" cy="25400"/>
+          </a:xfrm>
+          <a:prstGeom prst="rect">
+            <a:avLst/>
+          </a:prstGeom>
+          <a:solidFill>
+            <a:srgbClr val="06B6D4"/>
+          </a:solidFill>
+          <a:ln w="19050" cap="flat" cmpd="sng" algn="ctr">
+            <a:noFill/>
+            <a:prstDash val="solid"/>
+            <a:miter lim="800000"/>
+          </a:ln>
+          <a:effectLst/>
+          <a:extLst>
+            <a:ext uri="{91240B29-F687-4F45-9708-019B960494DF}">
+              <a14:hiddenLine xmlns:a14="http://schemas.microsoft.com/office/drawing/2010/main" w="19050" cap="flat" cmpd="sng" algn="ctr">
+                <a:solidFill>
+                  <a:schemeClr val="accent1">
+                    <a:shade val="15000"/>
+                  </a:schemeClr>
+                </a:solidFill>
+                <a:prstDash val="solid"/>
+                <a:miter lim="800000"/>
+              </a14:hiddenLine>
+            </a:ext>
+          </a:extLst>
+        </p:spPr>
+        <p:style>
+          <a:lnRef idx="2">
+            <a:schemeClr val="accent1">
+              <a:shade val="15000"/>
+            </a:schemeClr>
+          </a:lnRef>
+          <a:fillRef idx="1">
+            <a:schemeClr val="accent1"/>
+          </a:fillRef>
+          <a:effectRef idx="0">
+            <a:schemeClr val="accent1"/>
+          </a:effectRef>
+          <a:fontRef idx="minor">
+            <a:schemeClr val="lt1"/>
+          </a:fontRef>
+        </p:style>
+        <p:txBody>
+          <a:bodyPr rtlCol="0" anchor="ctr"/>
+          <a:lstStyle/>
+          <a:p>
+            <a:pPr algn="ctr"/>
+            <a:endParaRPr lang="en-IN"/>
+          </a:p>
+        </p:txBody>
+      </p:sp>
+      <p:sp>
+        <p:nvSpPr>
+          <p:cNvPr id="8" name="TextBox 7">
+            <a:extLst>
+              <a:ext uri="{FF2B5EF4-FFF2-40B4-BE49-F238E27FC236}">
+                <a16:creationId xmlns:a16="http://schemas.microsoft.com/office/drawing/2014/main" id="{42AA21A0-CA42-BD9F-DC85-55A8BCF0E8C7}"/>
+              </a:ext>
+            </a:extLst>
+          </p:cNvPr>
+          <p:cNvSpPr txBox="1"/>
+          <p:nvPr/>
+        </p:nvSpPr>
+        <p:spPr>
+          <a:xfrm>
+            <a:off x="508000" y="2603500"/>
+            <a:ext cx="3810000" cy="261610"/>
+          </a:xfrm>
+          <a:prstGeom prst="rect">
+            <a:avLst/>
+          </a:prstGeom>
+          <a:noFill/>
+        </p:spPr>
+        <p:txBody>
+          <a:bodyPr vert="horz" rtlCol="0">
+            <a:spAutoFit/>
+          </a:bodyPr>
+          <a:lstStyle/>
+          <a:p>
+            <a:r>
               <a:rPr lang="en-IN" sz="1100" b="1">
                 <a:solidFill>
                   <a:srgbClr val="FB923C"/>
@@ -4769,10 +5323,10 @@
       </p:sp>
       <p:sp>
         <p:nvSpPr>
-          <p:cNvPr id="7" name="TextBox 6">
-            <a:extLst>
-              <a:ext uri="{FF2B5EF4-FFF2-40B4-BE49-F238E27FC236}">
-                <a16:creationId xmlns:a16="http://schemas.microsoft.com/office/drawing/2014/main" id="{573FB428-C3B4-EF91-DDFD-D2F30C23660D}"/>
+          <p:cNvPr id="9" name="TextBox 8">
+            <a:extLst>
+              <a:ext uri="{FF2B5EF4-FFF2-40B4-BE49-F238E27FC236}">
+                <a16:creationId xmlns:a16="http://schemas.microsoft.com/office/drawing/2014/main" id="{D1B6B60E-F27B-AA97-B75D-23B1F601B80D}"/>
               </a:ext>
             </a:extLst>
           </p:cNvPr>
@@ -4782,7 +5336,7 @@
         <p:spPr>
           <a:xfrm>
             <a:off x="508000" y="2921000"/>
-            <a:ext cx="3810000" cy="1277273"/>
+            <a:ext cx="3810000" cy="1107996"/>
           </a:xfrm>
           <a:prstGeom prst="rect">
             <a:avLst/>
@@ -4802,9 +5356,9 @@
                 </a:solidFill>
                 <a:latin typeface="Segoe UI" panose="020B0502040204020203" pitchFamily="34" charset="0"/>
               </a:rPr>
-              <a:t>â€¢ ResNet/MobileNet deep feature extraction architecture.
-â€¢ Medical scan viewer showing probability breakdown.
-â€¢ Visual progress bar showing clinical probability of COVID-19 vs Normal.</a:t>
+              <a:t>- ResNet/MobileNet deep feature extraction architecture.
+- Medical scan viewer showing probability breakdown.
+- Visual progress bar showing clinical probability of COVID-19 vs Normal.</a:t>
             </a:r>
             <a:endParaRPr lang="en-IN" sz="1100">
               <a:solidFill>
@@ -4817,40 +5371,62 @@
       </p:sp>
       <p:sp>
         <p:nvSpPr>
-          <p:cNvPr id="8" name="TextBox 7">
-            <a:extLst>
-              <a:ext uri="{FF2B5EF4-FFF2-40B4-BE49-F238E27FC236}">
-                <a16:creationId xmlns:a16="http://schemas.microsoft.com/office/drawing/2014/main" id="{A9699CDB-05BA-0FB9-6BE1-D22BBCFC58F4}"/>
-              </a:ext>
-            </a:extLst>
-          </p:cNvPr>
-          <p:cNvSpPr txBox="1"/>
-          <p:nvPr/>
-        </p:nvSpPr>
-        <p:spPr>
-          <a:xfrm>
-            <a:off x="508000" y="5461000"/>
-            <a:ext cx="3810000" cy="430887"/>
-          </a:xfrm>
-          <a:prstGeom prst="rect">
-            <a:avLst/>
-          </a:prstGeom>
-          <a:noFill/>
-        </p:spPr>
-        <p:txBody>
-          <a:bodyPr vert="horz" wrap="square" rtlCol="0">
-            <a:spAutoFit/>
-          </a:bodyPr>
-          <a:lstStyle/>
-          <a:p>
-            <a:r>
-              <a:rPr lang="en-IN" sz="1100" b="1">
+          <p:cNvPr id="10" name="Rectangle: Rounded Corners 9">
+            <a:extLst>
+              <a:ext uri="{FF2B5EF4-FFF2-40B4-BE49-F238E27FC236}">
+                <a16:creationId xmlns:a16="http://schemas.microsoft.com/office/drawing/2014/main" id="{DCA7524E-6986-5FF0-56C4-D46B3283815D}"/>
+              </a:ext>
+            </a:extLst>
+          </p:cNvPr>
+          <p:cNvSpPr/>
+          <p:nvPr/>
+        </p:nvSpPr>
+        <p:spPr>
+          <a:xfrm>
+            <a:off x="508000" y="5397500"/>
+            <a:ext cx="3810000" cy="635000"/>
+          </a:xfrm>
+          <a:prstGeom prst="roundRect">
+            <a:avLst/>
+          </a:prstGeom>
+          <a:solidFill>
+            <a:srgbClr val="1E293B"/>
+          </a:solidFill>
+          <a:ln w="12700">
+            <a:solidFill>
+              <a:srgbClr val="06B6D4"/>
+            </a:solidFill>
+          </a:ln>
+        </p:spPr>
+        <p:style>
+          <a:lnRef idx="2">
+            <a:schemeClr val="accent1">
+              <a:shade val="15000"/>
+            </a:schemeClr>
+          </a:lnRef>
+          <a:fillRef idx="1">
+            <a:schemeClr val="accent1"/>
+          </a:fillRef>
+          <a:effectRef idx="0">
+            <a:schemeClr val="accent1"/>
+          </a:effectRef>
+          <a:fontRef idx="minor">
+            <a:schemeClr val="lt1"/>
+          </a:fontRef>
+        </p:style>
+        <p:txBody>
+          <a:bodyPr rtlCol="0" anchor="ctr"/>
+          <a:lstStyle/>
+          <a:p>
+            <a:pPr algn="ctr"/>
+            <a:r>
+              <a:rPr lang="en-IN" sz="900" b="1">
                 <a:solidFill>
                   <a:srgbClr val="06B6D4"/>
                 </a:solidFill>
                 <a:latin typeface="Segoe UI" panose="020B0502040204020203" pitchFamily="34" charset="0"/>
               </a:rPr>
-              <a:t>TECH STACK:
+              <a:t>TECH STACK
 Streamlit, TensorFlow, Keras, PIL</a:t>
             </a:r>
           </a:p>
@@ -4858,10 +5434,10 @@
       </p:sp>
       <p:sp>
         <p:nvSpPr>
-          <p:cNvPr id="9" name="Rectangle 8">
-            <a:extLst>
-              <a:ext uri="{FF2B5EF4-FFF2-40B4-BE49-F238E27FC236}">
-                <a16:creationId xmlns:a16="http://schemas.microsoft.com/office/drawing/2014/main" id="{10093B94-77B1-A49E-3F7A-EF23432D3AE2}"/>
+          <p:cNvPr id="11" name="Rectangle: Rounded Corners 10">
+            <a:extLst>
+              <a:ext uri="{FF2B5EF4-FFF2-40B4-BE49-F238E27FC236}">
+                <a16:creationId xmlns:a16="http://schemas.microsoft.com/office/drawing/2014/main" id="{80C58812-0B9B-5C48-51C7-AC67C4D532A8}"/>
               </a:ext>
             </a:extLst>
           </p:cNvPr>
@@ -4873,7 +5449,7 @@
             <a:off x="4445000" y="1143000"/>
             <a:ext cx="7366000" cy="4318000"/>
           </a:xfrm>
-          <a:prstGeom prst="rect">
+          <a:prstGeom prst="roundRect">
             <a:avLst/>
           </a:prstGeom>
           <a:solidFill>
@@ -4926,10 +5502,10 @@
       </p:sp>
       <p:pic>
         <p:nvPicPr>
-          <p:cNvPr id="11" name="Picture 10">
-            <a:extLst>
-              <a:ext uri="{FF2B5EF4-FFF2-40B4-BE49-F238E27FC236}">
-                <a16:creationId xmlns:a16="http://schemas.microsoft.com/office/drawing/2014/main" id="{47BE1393-24F5-372B-D522-EF7ADDA0D2B8}"/>
+          <p:cNvPr id="13" name="Picture 12">
+            <a:extLst>
+              <a:ext uri="{FF2B5EF4-FFF2-40B4-BE49-F238E27FC236}">
+                <a16:creationId xmlns:a16="http://schemas.microsoft.com/office/drawing/2014/main" id="{BA89F984-3269-941C-0B07-BC545C233867}"/>
               </a:ext>
             </a:extLst>
           </p:cNvPr>
@@ -4968,7 +5544,7 @@
     </p:spTree>
     <p:extLst>
       <p:ext uri="{BB962C8B-B14F-4D97-AF65-F5344CB8AC3E}">
-        <p14:creationId xmlns:p14="http://schemas.microsoft.com/office/powerpoint/2010/main" val="2570768298"/>
+        <p14:creationId xmlns:p14="http://schemas.microsoft.com/office/powerpoint/2010/main" val="1051388380"/>
       </p:ext>
     </p:extLst>
   </p:cSld>
@@ -5000,7 +5576,7 @@
           <p:cNvPr id="2" name="TextBox 1">
             <a:extLst>
               <a:ext uri="{FF2B5EF4-FFF2-40B4-BE49-F238E27FC236}">
-                <a16:creationId xmlns:a16="http://schemas.microsoft.com/office/drawing/2014/main" id="{F4EC3986-07EB-D585-09B2-1DE25CDF0618}"/>
+                <a16:creationId xmlns:a16="http://schemas.microsoft.com/office/drawing/2014/main" id="{E75CFA47-AD45-5E84-9B3A-6E1D6F9AB325}"/>
               </a:ext>
             </a:extLst>
           </p:cNvPr>
@@ -5040,7 +5616,7 @@
           <p:cNvPr id="3" name="TextBox 2">
             <a:extLst>
               <a:ext uri="{FF2B5EF4-FFF2-40B4-BE49-F238E27FC236}">
-                <a16:creationId xmlns:a16="http://schemas.microsoft.com/office/drawing/2014/main" id="{40EDF0BF-3D1C-0542-8E7B-2020A8DF1DFE}"/>
+                <a16:creationId xmlns:a16="http://schemas.microsoft.com/office/drawing/2014/main" id="{09DB68ED-D191-9B39-F724-D573D4BEED46}"/>
               </a:ext>
             </a:extLst>
           </p:cNvPr>
@@ -5085,7 +5661,7 @@
     </p:spTree>
     <p:extLst>
       <p:ext uri="{BB962C8B-B14F-4D97-AF65-F5344CB8AC3E}">
-        <p14:creationId xmlns:p14="http://schemas.microsoft.com/office/powerpoint/2010/main" val="3913036821"/>
+        <p14:creationId xmlns:p14="http://schemas.microsoft.com/office/powerpoint/2010/main" val="1597173219"/>
       </p:ext>
     </p:extLst>
   </p:cSld>
@@ -5114,148 +5690,10 @@
       </p:grpSpPr>
       <p:sp>
         <p:nvSpPr>
-          <p:cNvPr id="2" name="TextBox 1">
-            <a:extLst>
-              <a:ext uri="{FF2B5EF4-FFF2-40B4-BE49-F238E27FC236}">
-                <a16:creationId xmlns:a16="http://schemas.microsoft.com/office/drawing/2014/main" id="{9BEC7367-1F52-72D2-7523-2068E9F7DE19}"/>
-              </a:ext>
-            </a:extLst>
-          </p:cNvPr>
-          <p:cNvSpPr txBox="1"/>
-          <p:nvPr/>
-        </p:nvSpPr>
-        <p:spPr>
-          <a:xfrm>
-            <a:off x="508000" y="508000"/>
-            <a:ext cx="3810000" cy="400110"/>
-          </a:xfrm>
-          <a:prstGeom prst="rect">
-            <a:avLst/>
-          </a:prstGeom>
-          <a:noFill/>
-        </p:spPr>
-        <p:txBody>
-          <a:bodyPr vert="horz" rtlCol="0">
-            <a:spAutoFit/>
-          </a:bodyPr>
-          <a:lstStyle/>
-          <a:p>
-            <a:r>
-              <a:rPr lang="en-US" sz="1000" b="1">
-                <a:solidFill>
-                  <a:srgbClr val="94A3B8"/>
-                </a:solidFill>
-                <a:latin typeface="Segoe UI" panose="020B0502040204020203" pitchFamily="34" charset="0"/>
-              </a:rPr>
-              <a:t>PROJECT 01 OF 11  â€¢  DATA ANALYSIS &amp; INTERACTIVE VISUALIZATION</a:t>
-            </a:r>
-            <a:endParaRPr lang="en-IN" sz="1000" b="1">
-              <a:solidFill>
-                <a:srgbClr val="94A3B8"/>
-              </a:solidFill>
-              <a:latin typeface="Segoe UI" panose="020B0502040204020203" pitchFamily="34" charset="0"/>
-            </a:endParaRPr>
-          </a:p>
-        </p:txBody>
-      </p:sp>
-      <p:sp>
-        <p:nvSpPr>
-          <p:cNvPr id="3" name="TextBox 2">
-            <a:extLst>
-              <a:ext uri="{FF2B5EF4-FFF2-40B4-BE49-F238E27FC236}">
-                <a16:creationId xmlns:a16="http://schemas.microsoft.com/office/drawing/2014/main" id="{92BF92FD-53ED-E9F3-930F-AF58DAAF2D36}"/>
-              </a:ext>
-            </a:extLst>
-          </p:cNvPr>
-          <p:cNvSpPr txBox="1"/>
-          <p:nvPr/>
-        </p:nvSpPr>
-        <p:spPr>
-          <a:xfrm>
-            <a:off x="508000" y="762000"/>
-            <a:ext cx="3810000" cy="769441"/>
-          </a:xfrm>
-          <a:prstGeom prst="rect">
-            <a:avLst/>
-          </a:prstGeom>
-          <a:noFill/>
-        </p:spPr>
-        <p:txBody>
-          <a:bodyPr vert="horz" wrap="square" rtlCol="0">
-            <a:spAutoFit/>
-          </a:bodyPr>
-          <a:lstStyle/>
-          <a:p>
-            <a:r>
-              <a:rPr lang="en-US" sz="2200" b="1">
-                <a:solidFill>
-                  <a:srgbClr val="FFFFFF"/>
-                </a:solidFill>
-                <a:latin typeface="Segoe UI" panose="020B0502040204020203" pitchFamily="34" charset="0"/>
-              </a:rPr>
-              <a:t>Google Play Store Data Visualization</a:t>
-            </a:r>
-            <a:endParaRPr lang="en-IN" sz="2200" b="1">
-              <a:solidFill>
-                <a:srgbClr val="FFFFFF"/>
-              </a:solidFill>
-              <a:latin typeface="Segoe UI" panose="020B0502040204020203" pitchFamily="34" charset="0"/>
-            </a:endParaRPr>
-          </a:p>
-        </p:txBody>
-      </p:sp>
-      <p:sp>
-        <p:nvSpPr>
-          <p:cNvPr id="4" name="TextBox 3">
-            <a:extLst>
-              <a:ext uri="{FF2B5EF4-FFF2-40B4-BE49-F238E27FC236}">
-                <a16:creationId xmlns:a16="http://schemas.microsoft.com/office/drawing/2014/main" id="{1BBB9493-E679-1A03-4E87-081A5EDB8AE0}"/>
-              </a:ext>
-            </a:extLst>
-          </p:cNvPr>
-          <p:cNvSpPr txBox="1"/>
-          <p:nvPr/>
-        </p:nvSpPr>
-        <p:spPr>
-          <a:xfrm>
-            <a:off x="508000" y="1714500"/>
-            <a:ext cx="3810000" cy="461665"/>
-          </a:xfrm>
-          <a:prstGeom prst="rect">
-            <a:avLst/>
-          </a:prstGeom>
-          <a:noFill/>
-        </p:spPr>
-        <p:txBody>
-          <a:bodyPr vert="horz" wrap="square" rtlCol="0">
-            <a:spAutoFit/>
-          </a:bodyPr>
-          <a:lstStyle/>
-          <a:p>
-            <a:r>
-              <a:rPr lang="en-US" sz="1200">
-                <a:solidFill>
-                  <a:srgbClr val="94A3B8"/>
-                </a:solidFill>
-                <a:latin typeface="Segoe UI" panose="020B0502040204020203" pitchFamily="34" charset="0"/>
-              </a:rPr>
-              <a:t>Interactive dashboard to explore Android app market trends, user ratings, and installations</a:t>
-            </a:r>
-            <a:endParaRPr lang="en-IN" sz="1200">
-              <a:solidFill>
-                <a:srgbClr val="94A3B8"/>
-              </a:solidFill>
-              <a:latin typeface="Segoe UI" panose="020B0502040204020203" pitchFamily="34" charset="0"/>
-            </a:endParaRPr>
-          </a:p>
-        </p:txBody>
-      </p:sp>
-      <p:sp>
-        <p:nvSpPr>
-          <p:cNvPr id="5" name="Rectangle 4">
-            <a:extLst>
-              <a:ext uri="{FF2B5EF4-FFF2-40B4-BE49-F238E27FC236}">
-                <a16:creationId xmlns:a16="http://schemas.microsoft.com/office/drawing/2014/main" id="{98442E2F-72B3-C4E5-E13B-2086B3163404}"/>
+          <p:cNvPr id="2" name="Rectangle 1">
+            <a:extLst>
+              <a:ext uri="{FF2B5EF4-FFF2-40B4-BE49-F238E27FC236}">
+                <a16:creationId xmlns:a16="http://schemas.microsoft.com/office/drawing/2014/main" id="{85078654-8F18-F3E6-3133-087786665A8C}"/>
               </a:ext>
             </a:extLst>
           </p:cNvPr>
@@ -5264,8 +5702,8 @@
         </p:nvSpPr>
         <p:spPr>
           <a:xfrm>
-            <a:off x="508000" y="2476500"/>
-            <a:ext cx="762000" cy="38100"/>
+            <a:off x="0" y="0"/>
+            <a:ext cx="76200" cy="6858000"/>
           </a:xfrm>
           <a:prstGeom prst="rect">
             <a:avLst/>
@@ -5320,10 +5758,72 @@
       </p:sp>
       <p:sp>
         <p:nvSpPr>
-          <p:cNvPr id="6" name="TextBox 5">
-            <a:extLst>
-              <a:ext uri="{FF2B5EF4-FFF2-40B4-BE49-F238E27FC236}">
-                <a16:creationId xmlns:a16="http://schemas.microsoft.com/office/drawing/2014/main" id="{8DEC1F05-44DC-A3E7-66DA-1E9AF2AF853D}"/>
+          <p:cNvPr id="3" name="Rectangle: Rounded Corners 2">
+            <a:extLst>
+              <a:ext uri="{FF2B5EF4-FFF2-40B4-BE49-F238E27FC236}">
+                <a16:creationId xmlns:a16="http://schemas.microsoft.com/office/drawing/2014/main" id="{BABDD8F2-5BEC-DB9E-5659-59C2AB3772C0}"/>
+              </a:ext>
+            </a:extLst>
+          </p:cNvPr>
+          <p:cNvSpPr/>
+          <p:nvPr/>
+        </p:nvSpPr>
+        <p:spPr>
+          <a:xfrm>
+            <a:off x="508000" y="457200"/>
+            <a:ext cx="1651000" cy="254000"/>
+          </a:xfrm>
+          <a:prstGeom prst="roundRect">
+            <a:avLst/>
+          </a:prstGeom>
+          <a:solidFill>
+            <a:srgbClr val="1E293B"/>
+          </a:solidFill>
+          <a:ln w="12700">
+            <a:solidFill>
+              <a:srgbClr val="06B6D4"/>
+            </a:solidFill>
+          </a:ln>
+        </p:spPr>
+        <p:style>
+          <a:lnRef idx="2">
+            <a:schemeClr val="accent1">
+              <a:shade val="15000"/>
+            </a:schemeClr>
+          </a:lnRef>
+          <a:fillRef idx="1">
+            <a:schemeClr val="accent1"/>
+          </a:fillRef>
+          <a:effectRef idx="0">
+            <a:schemeClr val="accent1"/>
+          </a:effectRef>
+          <a:fontRef idx="minor">
+            <a:schemeClr val="lt1"/>
+          </a:fontRef>
+        </p:style>
+        <p:txBody>
+          <a:bodyPr rtlCol="0" anchor="ctr"/>
+          <a:lstStyle/>
+          <a:p>
+            <a:pPr algn="ctr"/>
+            <a:r>
+              <a:rPr lang="en-IN" sz="900" b="1">
+                <a:solidFill>
+                  <a:srgbClr val="FFFFFF"/>
+                </a:solidFill>
+                <a:latin typeface="Segoe UI" panose="020B0502040204020203" pitchFamily="34" charset="0"/>
+              </a:rPr>
+              <a:t>DATA VISUALIZATION</a:t>
+            </a:r>
+          </a:p>
+        </p:txBody>
+      </p:sp>
+      <p:sp>
+        <p:nvSpPr>
+          <p:cNvPr id="4" name="TextBox 3">
+            <a:extLst>
+              <a:ext uri="{FF2B5EF4-FFF2-40B4-BE49-F238E27FC236}">
+                <a16:creationId xmlns:a16="http://schemas.microsoft.com/office/drawing/2014/main" id="{A1486F8B-3D59-6D7B-1C30-9E7CB4F47F75}"/>
               </a:ext>
             </a:extLst>
           </p:cNvPr>
@@ -5332,8 +5832,8 @@
         </p:nvSpPr>
         <p:spPr>
           <a:xfrm>
-            <a:off x="508000" y="2603500"/>
-            <a:ext cx="3810000" cy="261610"/>
+            <a:off x="2349500" y="457200"/>
+            <a:ext cx="2159000" cy="230832"/>
           </a:xfrm>
           <a:prstGeom prst="rect">
             <a:avLst/>
@@ -5347,6 +5847,206 @@
           <a:lstStyle/>
           <a:p>
             <a:r>
+              <a:rPr lang="en-IN" sz="900" b="1">
+                <a:solidFill>
+                  <a:srgbClr val="94A3B8"/>
+                </a:solidFill>
+                <a:latin typeface="Segoe UI" panose="020B0502040204020203" pitchFamily="34" charset="0"/>
+              </a:rPr>
+              <a:t>PROJECT 01 OF 11</a:t>
+            </a:r>
+          </a:p>
+        </p:txBody>
+      </p:sp>
+      <p:sp>
+        <p:nvSpPr>
+          <p:cNvPr id="5" name="TextBox 4">
+            <a:extLst>
+              <a:ext uri="{FF2B5EF4-FFF2-40B4-BE49-F238E27FC236}">
+                <a16:creationId xmlns:a16="http://schemas.microsoft.com/office/drawing/2014/main" id="{C9D9EEA9-BD27-B93A-E218-5396C17CA0E2}"/>
+              </a:ext>
+            </a:extLst>
+          </p:cNvPr>
+          <p:cNvSpPr txBox="1"/>
+          <p:nvPr/>
+        </p:nvSpPr>
+        <p:spPr>
+          <a:xfrm>
+            <a:off x="508000" y="787400"/>
+            <a:ext cx="3810000" cy="769441"/>
+          </a:xfrm>
+          <a:prstGeom prst="rect">
+            <a:avLst/>
+          </a:prstGeom>
+          <a:noFill/>
+        </p:spPr>
+        <p:txBody>
+          <a:bodyPr vert="horz" wrap="square" rtlCol="0">
+            <a:spAutoFit/>
+          </a:bodyPr>
+          <a:lstStyle/>
+          <a:p>
+            <a:r>
+              <a:rPr lang="en-US" sz="2200" b="1">
+                <a:solidFill>
+                  <a:srgbClr val="FFFFFF"/>
+                </a:solidFill>
+                <a:latin typeface="Segoe UI" panose="020B0502040204020203" pitchFamily="34" charset="0"/>
+              </a:rPr>
+              <a:t>Google Play Store Data Visualization</a:t>
+            </a:r>
+            <a:endParaRPr lang="en-IN" sz="2200" b="1">
+              <a:solidFill>
+                <a:srgbClr val="FFFFFF"/>
+              </a:solidFill>
+              <a:latin typeface="Segoe UI" panose="020B0502040204020203" pitchFamily="34" charset="0"/>
+            </a:endParaRPr>
+          </a:p>
+        </p:txBody>
+      </p:sp>
+      <p:sp>
+        <p:nvSpPr>
+          <p:cNvPr id="6" name="TextBox 5">
+            <a:extLst>
+              <a:ext uri="{FF2B5EF4-FFF2-40B4-BE49-F238E27FC236}">
+                <a16:creationId xmlns:a16="http://schemas.microsoft.com/office/drawing/2014/main" id="{08300FFD-2205-5F8D-D0D0-909D10477B34}"/>
+              </a:ext>
+            </a:extLst>
+          </p:cNvPr>
+          <p:cNvSpPr txBox="1"/>
+          <p:nvPr/>
+        </p:nvSpPr>
+        <p:spPr>
+          <a:xfrm>
+            <a:off x="508000" y="1714500"/>
+            <a:ext cx="3810000" cy="461665"/>
+          </a:xfrm>
+          <a:prstGeom prst="rect">
+            <a:avLst/>
+          </a:prstGeom>
+          <a:noFill/>
+        </p:spPr>
+        <p:txBody>
+          <a:bodyPr vert="horz" wrap="square" rtlCol="0">
+            <a:spAutoFit/>
+          </a:bodyPr>
+          <a:lstStyle/>
+          <a:p>
+            <a:r>
+              <a:rPr lang="en-US" sz="1200">
+                <a:solidFill>
+                  <a:srgbClr val="94A3B8"/>
+                </a:solidFill>
+                <a:latin typeface="Segoe UI" panose="020B0502040204020203" pitchFamily="34" charset="0"/>
+              </a:rPr>
+              <a:t>Interactive dashboard to explore Android app market trends, user ratings, and installations</a:t>
+            </a:r>
+            <a:endParaRPr lang="en-IN" sz="1200">
+              <a:solidFill>
+                <a:srgbClr val="94A3B8"/>
+              </a:solidFill>
+              <a:latin typeface="Segoe UI" panose="020B0502040204020203" pitchFamily="34" charset="0"/>
+            </a:endParaRPr>
+          </a:p>
+        </p:txBody>
+      </p:sp>
+      <p:sp>
+        <p:nvSpPr>
+          <p:cNvPr id="7" name="Rectangle 6">
+            <a:extLst>
+              <a:ext uri="{FF2B5EF4-FFF2-40B4-BE49-F238E27FC236}">
+                <a16:creationId xmlns:a16="http://schemas.microsoft.com/office/drawing/2014/main" id="{6ED12976-0C23-BF23-6EFA-DDA961F0293C}"/>
+              </a:ext>
+            </a:extLst>
+          </p:cNvPr>
+          <p:cNvSpPr/>
+          <p:nvPr/>
+        </p:nvSpPr>
+        <p:spPr>
+          <a:xfrm>
+            <a:off x="508000" y="2476500"/>
+            <a:ext cx="762000" cy="25400"/>
+          </a:xfrm>
+          <a:prstGeom prst="rect">
+            <a:avLst/>
+          </a:prstGeom>
+          <a:solidFill>
+            <a:srgbClr val="06B6D4"/>
+          </a:solidFill>
+          <a:ln w="19050" cap="flat" cmpd="sng" algn="ctr">
+            <a:noFill/>
+            <a:prstDash val="solid"/>
+            <a:miter lim="800000"/>
+          </a:ln>
+          <a:effectLst/>
+          <a:extLst>
+            <a:ext uri="{91240B29-F687-4F45-9708-019B960494DF}">
+              <a14:hiddenLine xmlns:a14="http://schemas.microsoft.com/office/drawing/2010/main" w="19050" cap="flat" cmpd="sng" algn="ctr">
+                <a:solidFill>
+                  <a:schemeClr val="accent1">
+                    <a:shade val="15000"/>
+                  </a:schemeClr>
+                </a:solidFill>
+                <a:prstDash val="solid"/>
+                <a:miter lim="800000"/>
+              </a14:hiddenLine>
+            </a:ext>
+          </a:extLst>
+        </p:spPr>
+        <p:style>
+          <a:lnRef idx="2">
+            <a:schemeClr val="accent1">
+              <a:shade val="15000"/>
+            </a:schemeClr>
+          </a:lnRef>
+          <a:fillRef idx="1">
+            <a:schemeClr val="accent1"/>
+          </a:fillRef>
+          <a:effectRef idx="0">
+            <a:schemeClr val="accent1"/>
+          </a:effectRef>
+          <a:fontRef idx="minor">
+            <a:schemeClr val="lt1"/>
+          </a:fontRef>
+        </p:style>
+        <p:txBody>
+          <a:bodyPr rtlCol="0" anchor="ctr"/>
+          <a:lstStyle/>
+          <a:p>
+            <a:pPr algn="ctr"/>
+            <a:endParaRPr lang="en-IN"/>
+          </a:p>
+        </p:txBody>
+      </p:sp>
+      <p:sp>
+        <p:nvSpPr>
+          <p:cNvPr id="8" name="TextBox 7">
+            <a:extLst>
+              <a:ext uri="{FF2B5EF4-FFF2-40B4-BE49-F238E27FC236}">
+                <a16:creationId xmlns:a16="http://schemas.microsoft.com/office/drawing/2014/main" id="{8503B28D-DF76-64F6-6347-D9B9885FCADB}"/>
+              </a:ext>
+            </a:extLst>
+          </p:cNvPr>
+          <p:cNvSpPr txBox="1"/>
+          <p:nvPr/>
+        </p:nvSpPr>
+        <p:spPr>
+          <a:xfrm>
+            <a:off x="508000" y="2603500"/>
+            <a:ext cx="3810000" cy="261610"/>
+          </a:xfrm>
+          <a:prstGeom prst="rect">
+            <a:avLst/>
+          </a:prstGeom>
+          <a:noFill/>
+        </p:spPr>
+        <p:txBody>
+          <a:bodyPr vert="horz" rtlCol="0">
+            <a:spAutoFit/>
+          </a:bodyPr>
+          <a:lstStyle/>
+          <a:p>
+            <a:r>
               <a:rPr lang="en-IN" sz="1100" b="1">
                 <a:solidFill>
                   <a:srgbClr val="FB923C"/>
@@ -5360,10 +6060,10 @@
       </p:sp>
       <p:sp>
         <p:nvSpPr>
-          <p:cNvPr id="7" name="TextBox 6">
-            <a:extLst>
-              <a:ext uri="{FF2B5EF4-FFF2-40B4-BE49-F238E27FC236}">
-                <a16:creationId xmlns:a16="http://schemas.microsoft.com/office/drawing/2014/main" id="{35FB39EF-FF9C-F4E7-EB06-968B94A1686F}"/>
+          <p:cNvPr id="9" name="TextBox 8">
+            <a:extLst>
+              <a:ext uri="{FF2B5EF4-FFF2-40B4-BE49-F238E27FC236}">
+                <a16:creationId xmlns:a16="http://schemas.microsoft.com/office/drawing/2014/main" id="{385E4923-8325-AEC3-B52E-D41FED75CE1C}"/>
               </a:ext>
             </a:extLst>
           </p:cNvPr>
@@ -5387,58 +6087,86 @@
           <a:lstStyle/>
           <a:p>
             <a:r>
-              <a:rPr lang="en-IN" sz="1100">
+              <a:rPr lang="en-US" sz="1100">
                 <a:solidFill>
                   <a:srgbClr val="FFFFFF"/>
                 </a:solidFill>
                 <a:latin typeface="Segoe UI" panose="020B0502040204020203" pitchFamily="34" charset="0"/>
               </a:rPr>
-              <a:t>â€¢ Analyzes app sizes, ratings, pricing, and category distribution.
-â€¢ Interactive sidebar filters for categories, app type, and ratings.
-â€¢ Polished visualizations using dynamic Plotly charts.</a:t>
-            </a:r>
-          </a:p>
-        </p:txBody>
-      </p:sp>
-      <p:sp>
-        <p:nvSpPr>
-          <p:cNvPr id="8" name="TextBox 7">
-            <a:extLst>
-              <a:ext uri="{FF2B5EF4-FFF2-40B4-BE49-F238E27FC236}">
-                <a16:creationId xmlns:a16="http://schemas.microsoft.com/office/drawing/2014/main" id="{3494AB8D-857B-6D17-53C7-D6A2648D96B7}"/>
-              </a:ext>
-            </a:extLst>
-          </p:cNvPr>
-          <p:cNvSpPr txBox="1"/>
-          <p:nvPr/>
-        </p:nvSpPr>
-        <p:spPr>
-          <a:xfrm>
-            <a:off x="508000" y="5461000"/>
-            <a:ext cx="3810000" cy="430887"/>
-          </a:xfrm>
-          <a:prstGeom prst="rect">
-            <a:avLst/>
-          </a:prstGeom>
-          <a:noFill/>
-        </p:spPr>
-        <p:txBody>
-          <a:bodyPr vert="horz" wrap="square" rtlCol="0">
-            <a:spAutoFit/>
-          </a:bodyPr>
-          <a:lstStyle/>
-          <a:p>
-            <a:r>
-              <a:rPr lang="en-US" sz="1100" b="1">
+              <a:t>- Analyzes app sizes, ratings, pricing, and category distribution.
+- Interactive sidebar filters for categories, app type, and ratings.
+- Polished visualizations using dynamic Plotly charts.</a:t>
+            </a:r>
+            <a:endParaRPr lang="en-IN" sz="1100">
+              <a:solidFill>
+                <a:srgbClr val="FFFFFF"/>
+              </a:solidFill>
+              <a:latin typeface="Segoe UI" panose="020B0502040204020203" pitchFamily="34" charset="0"/>
+            </a:endParaRPr>
+          </a:p>
+        </p:txBody>
+      </p:sp>
+      <p:sp>
+        <p:nvSpPr>
+          <p:cNvPr id="10" name="Rectangle: Rounded Corners 9">
+            <a:extLst>
+              <a:ext uri="{FF2B5EF4-FFF2-40B4-BE49-F238E27FC236}">
+                <a16:creationId xmlns:a16="http://schemas.microsoft.com/office/drawing/2014/main" id="{D82F4DF5-1E91-B994-5133-C93B43B488C6}"/>
+              </a:ext>
+            </a:extLst>
+          </p:cNvPr>
+          <p:cNvSpPr/>
+          <p:nvPr/>
+        </p:nvSpPr>
+        <p:spPr>
+          <a:xfrm>
+            <a:off x="508000" y="5397500"/>
+            <a:ext cx="3810000" cy="635000"/>
+          </a:xfrm>
+          <a:prstGeom prst="roundRect">
+            <a:avLst/>
+          </a:prstGeom>
+          <a:solidFill>
+            <a:srgbClr val="1E293B"/>
+          </a:solidFill>
+          <a:ln w="12700">
+            <a:solidFill>
+              <a:srgbClr val="06B6D4"/>
+            </a:solidFill>
+          </a:ln>
+        </p:spPr>
+        <p:style>
+          <a:lnRef idx="2">
+            <a:schemeClr val="accent1">
+              <a:shade val="15000"/>
+            </a:schemeClr>
+          </a:lnRef>
+          <a:fillRef idx="1">
+            <a:schemeClr val="accent1"/>
+          </a:fillRef>
+          <a:effectRef idx="0">
+            <a:schemeClr val="accent1"/>
+          </a:effectRef>
+          <a:fontRef idx="minor">
+            <a:schemeClr val="lt1"/>
+          </a:fontRef>
+        </p:style>
+        <p:txBody>
+          <a:bodyPr rtlCol="0" anchor="ctr"/>
+          <a:lstStyle/>
+          <a:p>
+            <a:pPr algn="ctr"/>
+            <a:r>
+              <a:rPr lang="en-US" sz="900" b="1">
                 <a:solidFill>
                   <a:srgbClr val="06B6D4"/>
                 </a:solidFill>
                 <a:latin typeface="Segoe UI" panose="020B0502040204020203" pitchFamily="34" charset="0"/>
               </a:rPr>
-              <a:t>TECH STACK:
+              <a:t>TECH STACK
 Streamlit, Plotly, Pandas, NumPy</a:t>
             </a:r>
-            <a:endParaRPr lang="en-IN" sz="1100" b="1">
+            <a:endParaRPr lang="en-IN" sz="900" b="1">
               <a:solidFill>
                 <a:srgbClr val="06B6D4"/>
               </a:solidFill>
@@ -5449,10 +6177,10 @@
       </p:sp>
       <p:sp>
         <p:nvSpPr>
-          <p:cNvPr id="9" name="Rectangle 8">
-            <a:extLst>
-              <a:ext uri="{FF2B5EF4-FFF2-40B4-BE49-F238E27FC236}">
-                <a16:creationId xmlns:a16="http://schemas.microsoft.com/office/drawing/2014/main" id="{C81C99EB-0F0C-0E04-5010-DC82971EB9B4}"/>
+          <p:cNvPr id="11" name="Rectangle: Rounded Corners 10">
+            <a:extLst>
+              <a:ext uri="{FF2B5EF4-FFF2-40B4-BE49-F238E27FC236}">
+                <a16:creationId xmlns:a16="http://schemas.microsoft.com/office/drawing/2014/main" id="{E5F9D62D-73BC-FA8A-E30D-696F30B21CEB}"/>
               </a:ext>
             </a:extLst>
           </p:cNvPr>
@@ -5464,7 +6192,7 @@
             <a:off x="4445000" y="1143000"/>
             <a:ext cx="7366000" cy="4318000"/>
           </a:xfrm>
-          <a:prstGeom prst="rect">
+          <a:prstGeom prst="roundRect">
             <a:avLst/>
           </a:prstGeom>
           <a:solidFill>
@@ -5517,10 +6245,10 @@
       </p:sp>
       <p:pic>
         <p:nvPicPr>
-          <p:cNvPr id="11" name="Picture 10">
-            <a:extLst>
-              <a:ext uri="{FF2B5EF4-FFF2-40B4-BE49-F238E27FC236}">
-                <a16:creationId xmlns:a16="http://schemas.microsoft.com/office/drawing/2014/main" id="{9F7F524F-6E17-9A26-860C-27413DB3D435}"/>
+          <p:cNvPr id="13" name="Picture 12">
+            <a:extLst>
+              <a:ext uri="{FF2B5EF4-FFF2-40B4-BE49-F238E27FC236}">
+                <a16:creationId xmlns:a16="http://schemas.microsoft.com/office/drawing/2014/main" id="{7C73BFAF-63ED-1A04-8DA3-6F201C380643}"/>
               </a:ext>
             </a:extLst>
           </p:cNvPr>
@@ -5559,7 +6287,7 @@
     </p:spTree>
     <p:extLst>
       <p:ext uri="{BB962C8B-B14F-4D97-AF65-F5344CB8AC3E}">
-        <p14:creationId xmlns:p14="http://schemas.microsoft.com/office/powerpoint/2010/main" val="3189968948"/>
+        <p14:creationId xmlns:p14="http://schemas.microsoft.com/office/powerpoint/2010/main" val="692814034"/>
       </p:ext>
     </p:extLst>
   </p:cSld>
@@ -5588,164 +6316,26 @@
       </p:grpSpPr>
       <p:sp>
         <p:nvSpPr>
-          <p:cNvPr id="2" name="TextBox 1">
-            <a:extLst>
-              <a:ext uri="{FF2B5EF4-FFF2-40B4-BE49-F238E27FC236}">
-                <a16:creationId xmlns:a16="http://schemas.microsoft.com/office/drawing/2014/main" id="{43314A83-CAFC-1D4D-B335-7D58F6F84CBE}"/>
-              </a:ext>
-            </a:extLst>
-          </p:cNvPr>
-          <p:cNvSpPr txBox="1"/>
-          <p:nvPr/>
-        </p:nvSpPr>
-        <p:spPr>
-          <a:xfrm>
-            <a:off x="508000" y="508000"/>
-            <a:ext cx="3810000" cy="400110"/>
+          <p:cNvPr id="2" name="Rectangle 1">
+            <a:extLst>
+              <a:ext uri="{FF2B5EF4-FFF2-40B4-BE49-F238E27FC236}">
+                <a16:creationId xmlns:a16="http://schemas.microsoft.com/office/drawing/2014/main" id="{72CEF332-129C-4147-4EFA-CEA776112B80}"/>
+              </a:ext>
+            </a:extLst>
+          </p:cNvPr>
+          <p:cNvSpPr/>
+          <p:nvPr/>
+        </p:nvSpPr>
+        <p:spPr>
+          <a:xfrm>
+            <a:off x="0" y="0"/>
+            <a:ext cx="76200" cy="6858000"/>
           </a:xfrm>
           <a:prstGeom prst="rect">
             <a:avLst/>
           </a:prstGeom>
-          <a:noFill/>
-        </p:spPr>
-        <p:txBody>
-          <a:bodyPr vert="horz" rtlCol="0">
-            <a:spAutoFit/>
-          </a:bodyPr>
-          <a:lstStyle/>
-          <a:p>
-            <a:r>
-              <a:rPr lang="en-US" sz="1000" b="1">
-                <a:solidFill>
-                  <a:srgbClr val="94A3B8"/>
-                </a:solidFill>
-                <a:latin typeface="Segoe UI" panose="020B0502040204020203" pitchFamily="34" charset="0"/>
-              </a:rPr>
-              <a:t>PROJECT 02 OF 11  â€¢  DATA CLEANING &amp; STATISTICAL OUTLIER DETECTION</a:t>
-            </a:r>
-            <a:endParaRPr lang="en-IN" sz="1000" b="1">
-              <a:solidFill>
-                <a:srgbClr val="94A3B8"/>
-              </a:solidFill>
-              <a:latin typeface="Segoe UI" panose="020B0502040204020203" pitchFamily="34" charset="0"/>
-            </a:endParaRPr>
-          </a:p>
-        </p:txBody>
-      </p:sp>
-      <p:sp>
-        <p:nvSpPr>
-          <p:cNvPr id="3" name="TextBox 2">
-            <a:extLst>
-              <a:ext uri="{FF2B5EF4-FFF2-40B4-BE49-F238E27FC236}">
-                <a16:creationId xmlns:a16="http://schemas.microsoft.com/office/drawing/2014/main" id="{318CBEDD-B454-CC52-0098-90309BC68E42}"/>
-              </a:ext>
-            </a:extLst>
-          </p:cNvPr>
-          <p:cNvSpPr txBox="1"/>
-          <p:nvPr/>
-        </p:nvSpPr>
-        <p:spPr>
-          <a:xfrm>
-            <a:off x="508000" y="762000"/>
-            <a:ext cx="3810000" cy="769441"/>
-          </a:xfrm>
-          <a:prstGeom prst="rect">
-            <a:avLst/>
-          </a:prstGeom>
-          <a:noFill/>
-        </p:spPr>
-        <p:txBody>
-          <a:bodyPr vert="horz" wrap="square" rtlCol="0">
-            <a:spAutoFit/>
-          </a:bodyPr>
-          <a:lstStyle/>
-          <a:p>
-            <a:r>
-              <a:rPr lang="en-US" sz="2200" b="1">
-                <a:solidFill>
-                  <a:srgbClr val="FFFFFF"/>
-                </a:solidFill>
-                <a:latin typeface="Segoe UI" panose="020B0502040204020203" pitchFamily="34" charset="0"/>
-              </a:rPr>
-              <a:t>Airbnb NYC Outliers Percentile Clipping</a:t>
-            </a:r>
-            <a:endParaRPr lang="en-IN" sz="2200" b="1">
-              <a:solidFill>
-                <a:srgbClr val="FFFFFF"/>
-              </a:solidFill>
-              <a:latin typeface="Segoe UI" panose="020B0502040204020203" pitchFamily="34" charset="0"/>
-            </a:endParaRPr>
-          </a:p>
-        </p:txBody>
-      </p:sp>
-      <p:sp>
-        <p:nvSpPr>
-          <p:cNvPr id="4" name="TextBox 3">
-            <a:extLst>
-              <a:ext uri="{FF2B5EF4-FFF2-40B4-BE49-F238E27FC236}">
-                <a16:creationId xmlns:a16="http://schemas.microsoft.com/office/drawing/2014/main" id="{07A59BBB-AFEC-03CA-B5FB-60F8611E35D8}"/>
-              </a:ext>
-            </a:extLst>
-          </p:cNvPr>
-          <p:cNvSpPr txBox="1"/>
-          <p:nvPr/>
-        </p:nvSpPr>
-        <p:spPr>
-          <a:xfrm>
-            <a:off x="508000" y="1714500"/>
-            <a:ext cx="3810000" cy="461665"/>
-          </a:xfrm>
-          <a:prstGeom prst="rect">
-            <a:avLst/>
-          </a:prstGeom>
-          <a:noFill/>
-        </p:spPr>
-        <p:txBody>
-          <a:bodyPr vert="horz" wrap="square" rtlCol="0">
-            <a:spAutoFit/>
-          </a:bodyPr>
-          <a:lstStyle/>
-          <a:p>
-            <a:r>
-              <a:rPr lang="en-US" sz="1200">
-                <a:solidFill>
-                  <a:srgbClr val="94A3B8"/>
-                </a:solidFill>
-                <a:latin typeface="Segoe UI" panose="020B0502040204020203" pitchFamily="34" charset="0"/>
-              </a:rPr>
-              <a:t>Statistical data cleaning dashboard that detects and filters outliers in NYC housing listing prices</a:t>
-            </a:r>
-            <a:endParaRPr lang="en-IN" sz="1200">
-              <a:solidFill>
-                <a:srgbClr val="94A3B8"/>
-              </a:solidFill>
-              <a:latin typeface="Segoe UI" panose="020B0502040204020203" pitchFamily="34" charset="0"/>
-            </a:endParaRPr>
-          </a:p>
-        </p:txBody>
-      </p:sp>
-      <p:sp>
-        <p:nvSpPr>
-          <p:cNvPr id="5" name="Rectangle 4">
-            <a:extLst>
-              <a:ext uri="{FF2B5EF4-FFF2-40B4-BE49-F238E27FC236}">
-                <a16:creationId xmlns:a16="http://schemas.microsoft.com/office/drawing/2014/main" id="{03B49209-904C-DD33-89A5-090529D779EC}"/>
-              </a:ext>
-            </a:extLst>
-          </p:cNvPr>
-          <p:cNvSpPr/>
-          <p:nvPr/>
-        </p:nvSpPr>
-        <p:spPr>
-          <a:xfrm>
-            <a:off x="508000" y="2476500"/>
-            <a:ext cx="762000" cy="38100"/>
-          </a:xfrm>
-          <a:prstGeom prst="rect">
-            <a:avLst/>
-          </a:prstGeom>
           <a:solidFill>
-            <a:srgbClr val="06B6D4"/>
+            <a:srgbClr val="FB923C"/>
           </a:solidFill>
           <a:ln w="19050" cap="flat" cmpd="sng" algn="ctr">
             <a:noFill/>
@@ -5794,10 +6384,72 @@
       </p:sp>
       <p:sp>
         <p:nvSpPr>
-          <p:cNvPr id="6" name="TextBox 5">
-            <a:extLst>
-              <a:ext uri="{FF2B5EF4-FFF2-40B4-BE49-F238E27FC236}">
-                <a16:creationId xmlns:a16="http://schemas.microsoft.com/office/drawing/2014/main" id="{79BFE2B3-BF4E-5C00-4360-4BF7DB32DA8A}"/>
+          <p:cNvPr id="3" name="Rectangle: Rounded Corners 2">
+            <a:extLst>
+              <a:ext uri="{FF2B5EF4-FFF2-40B4-BE49-F238E27FC236}">
+                <a16:creationId xmlns:a16="http://schemas.microsoft.com/office/drawing/2014/main" id="{F1FEBB7B-EDE1-DFCE-8947-C66E355FE937}"/>
+              </a:ext>
+            </a:extLst>
+          </p:cNvPr>
+          <p:cNvSpPr/>
+          <p:nvPr/>
+        </p:nvSpPr>
+        <p:spPr>
+          <a:xfrm>
+            <a:off x="508000" y="457200"/>
+            <a:ext cx="1651000" cy="254000"/>
+          </a:xfrm>
+          <a:prstGeom prst="roundRect">
+            <a:avLst/>
+          </a:prstGeom>
+          <a:solidFill>
+            <a:srgbClr val="1E293B"/>
+          </a:solidFill>
+          <a:ln w="12700">
+            <a:solidFill>
+              <a:srgbClr val="FB923C"/>
+            </a:solidFill>
+          </a:ln>
+        </p:spPr>
+        <p:style>
+          <a:lnRef idx="2">
+            <a:schemeClr val="accent1">
+              <a:shade val="15000"/>
+            </a:schemeClr>
+          </a:lnRef>
+          <a:fillRef idx="1">
+            <a:schemeClr val="accent1"/>
+          </a:fillRef>
+          <a:effectRef idx="0">
+            <a:schemeClr val="accent1"/>
+          </a:effectRef>
+          <a:fontRef idx="minor">
+            <a:schemeClr val="lt1"/>
+          </a:fontRef>
+        </p:style>
+        <p:txBody>
+          <a:bodyPr rtlCol="0" anchor="ctr"/>
+          <a:lstStyle/>
+          <a:p>
+            <a:pPr algn="ctr"/>
+            <a:r>
+              <a:rPr lang="en-IN" sz="900" b="1">
+                <a:solidFill>
+                  <a:srgbClr val="FFFFFF"/>
+                </a:solidFill>
+                <a:latin typeface="Segoe UI" panose="020B0502040204020203" pitchFamily="34" charset="0"/>
+              </a:rPr>
+              <a:t>DATA CLEANING</a:t>
+            </a:r>
+          </a:p>
+        </p:txBody>
+      </p:sp>
+      <p:sp>
+        <p:nvSpPr>
+          <p:cNvPr id="4" name="TextBox 3">
+            <a:extLst>
+              <a:ext uri="{FF2B5EF4-FFF2-40B4-BE49-F238E27FC236}">
+                <a16:creationId xmlns:a16="http://schemas.microsoft.com/office/drawing/2014/main" id="{5E1A40F0-A86B-85F5-8C1F-66CB30F87991}"/>
               </a:ext>
             </a:extLst>
           </p:cNvPr>
@@ -5806,8 +6458,8 @@
         </p:nvSpPr>
         <p:spPr>
           <a:xfrm>
-            <a:off x="508000" y="2603500"/>
-            <a:ext cx="3810000" cy="261610"/>
+            <a:off x="2349500" y="457200"/>
+            <a:ext cx="2159000" cy="230832"/>
           </a:xfrm>
           <a:prstGeom prst="rect">
             <a:avLst/>
@@ -5821,6 +6473,206 @@
           <a:lstStyle/>
           <a:p>
             <a:r>
+              <a:rPr lang="en-IN" sz="900" b="1">
+                <a:solidFill>
+                  <a:srgbClr val="94A3B8"/>
+                </a:solidFill>
+                <a:latin typeface="Segoe UI" panose="020B0502040204020203" pitchFamily="34" charset="0"/>
+              </a:rPr>
+              <a:t>PROJECT 02 OF 11</a:t>
+            </a:r>
+          </a:p>
+        </p:txBody>
+      </p:sp>
+      <p:sp>
+        <p:nvSpPr>
+          <p:cNvPr id="5" name="TextBox 4">
+            <a:extLst>
+              <a:ext uri="{FF2B5EF4-FFF2-40B4-BE49-F238E27FC236}">
+                <a16:creationId xmlns:a16="http://schemas.microsoft.com/office/drawing/2014/main" id="{39C9FF50-6304-038E-BF48-31597A639E95}"/>
+              </a:ext>
+            </a:extLst>
+          </p:cNvPr>
+          <p:cNvSpPr txBox="1"/>
+          <p:nvPr/>
+        </p:nvSpPr>
+        <p:spPr>
+          <a:xfrm>
+            <a:off x="508000" y="787400"/>
+            <a:ext cx="3810000" cy="769441"/>
+          </a:xfrm>
+          <a:prstGeom prst="rect">
+            <a:avLst/>
+          </a:prstGeom>
+          <a:noFill/>
+        </p:spPr>
+        <p:txBody>
+          <a:bodyPr vert="horz" wrap="square" rtlCol="0">
+            <a:spAutoFit/>
+          </a:bodyPr>
+          <a:lstStyle/>
+          <a:p>
+            <a:r>
+              <a:rPr lang="en-US" sz="2200" b="1">
+                <a:solidFill>
+                  <a:srgbClr val="FFFFFF"/>
+                </a:solidFill>
+                <a:latin typeface="Segoe UI" panose="020B0502040204020203" pitchFamily="34" charset="0"/>
+              </a:rPr>
+              <a:t>Airbnb NYC Outliers Percentile Clipping</a:t>
+            </a:r>
+            <a:endParaRPr lang="en-IN" sz="2200" b="1">
+              <a:solidFill>
+                <a:srgbClr val="FFFFFF"/>
+              </a:solidFill>
+              <a:latin typeface="Segoe UI" panose="020B0502040204020203" pitchFamily="34" charset="0"/>
+            </a:endParaRPr>
+          </a:p>
+        </p:txBody>
+      </p:sp>
+      <p:sp>
+        <p:nvSpPr>
+          <p:cNvPr id="6" name="TextBox 5">
+            <a:extLst>
+              <a:ext uri="{FF2B5EF4-FFF2-40B4-BE49-F238E27FC236}">
+                <a16:creationId xmlns:a16="http://schemas.microsoft.com/office/drawing/2014/main" id="{F72EA9D5-65C8-1823-BABB-D0EFDC07E099}"/>
+              </a:ext>
+            </a:extLst>
+          </p:cNvPr>
+          <p:cNvSpPr txBox="1"/>
+          <p:nvPr/>
+        </p:nvSpPr>
+        <p:spPr>
+          <a:xfrm>
+            <a:off x="508000" y="1714500"/>
+            <a:ext cx="3810000" cy="461665"/>
+          </a:xfrm>
+          <a:prstGeom prst="rect">
+            <a:avLst/>
+          </a:prstGeom>
+          <a:noFill/>
+        </p:spPr>
+        <p:txBody>
+          <a:bodyPr vert="horz" wrap="square" rtlCol="0">
+            <a:spAutoFit/>
+          </a:bodyPr>
+          <a:lstStyle/>
+          <a:p>
+            <a:r>
+              <a:rPr lang="en-US" sz="1200">
+                <a:solidFill>
+                  <a:srgbClr val="94A3B8"/>
+                </a:solidFill>
+                <a:latin typeface="Segoe UI" panose="020B0502040204020203" pitchFamily="34" charset="0"/>
+              </a:rPr>
+              <a:t>Statistical data cleaning dashboard that detects and filters outliers in NYC housing listing prices</a:t>
+            </a:r>
+            <a:endParaRPr lang="en-IN" sz="1200">
+              <a:solidFill>
+                <a:srgbClr val="94A3B8"/>
+              </a:solidFill>
+              <a:latin typeface="Segoe UI" panose="020B0502040204020203" pitchFamily="34" charset="0"/>
+            </a:endParaRPr>
+          </a:p>
+        </p:txBody>
+      </p:sp>
+      <p:sp>
+        <p:nvSpPr>
+          <p:cNvPr id="7" name="Rectangle 6">
+            <a:extLst>
+              <a:ext uri="{FF2B5EF4-FFF2-40B4-BE49-F238E27FC236}">
+                <a16:creationId xmlns:a16="http://schemas.microsoft.com/office/drawing/2014/main" id="{983D168E-28FE-A8AC-6F01-75886C4EF302}"/>
+              </a:ext>
+            </a:extLst>
+          </p:cNvPr>
+          <p:cNvSpPr/>
+          <p:nvPr/>
+        </p:nvSpPr>
+        <p:spPr>
+          <a:xfrm>
+            <a:off x="508000" y="2476500"/>
+            <a:ext cx="762000" cy="25400"/>
+          </a:xfrm>
+          <a:prstGeom prst="rect">
+            <a:avLst/>
+          </a:prstGeom>
+          <a:solidFill>
+            <a:srgbClr val="FB923C"/>
+          </a:solidFill>
+          <a:ln w="19050" cap="flat" cmpd="sng" algn="ctr">
+            <a:noFill/>
+            <a:prstDash val="solid"/>
+            <a:miter lim="800000"/>
+          </a:ln>
+          <a:effectLst/>
+          <a:extLst>
+            <a:ext uri="{91240B29-F687-4F45-9708-019B960494DF}">
+              <a14:hiddenLine xmlns:a14="http://schemas.microsoft.com/office/drawing/2010/main" w="19050" cap="flat" cmpd="sng" algn="ctr">
+                <a:solidFill>
+                  <a:schemeClr val="accent1">
+                    <a:shade val="15000"/>
+                  </a:schemeClr>
+                </a:solidFill>
+                <a:prstDash val="solid"/>
+                <a:miter lim="800000"/>
+              </a14:hiddenLine>
+            </a:ext>
+          </a:extLst>
+        </p:spPr>
+        <p:style>
+          <a:lnRef idx="2">
+            <a:schemeClr val="accent1">
+              <a:shade val="15000"/>
+            </a:schemeClr>
+          </a:lnRef>
+          <a:fillRef idx="1">
+            <a:schemeClr val="accent1"/>
+          </a:fillRef>
+          <a:effectRef idx="0">
+            <a:schemeClr val="accent1"/>
+          </a:effectRef>
+          <a:fontRef idx="minor">
+            <a:schemeClr val="lt1"/>
+          </a:fontRef>
+        </p:style>
+        <p:txBody>
+          <a:bodyPr rtlCol="0" anchor="ctr"/>
+          <a:lstStyle/>
+          <a:p>
+            <a:pPr algn="ctr"/>
+            <a:endParaRPr lang="en-IN"/>
+          </a:p>
+        </p:txBody>
+      </p:sp>
+      <p:sp>
+        <p:nvSpPr>
+          <p:cNvPr id="8" name="TextBox 7">
+            <a:extLst>
+              <a:ext uri="{FF2B5EF4-FFF2-40B4-BE49-F238E27FC236}">
+                <a16:creationId xmlns:a16="http://schemas.microsoft.com/office/drawing/2014/main" id="{BBBD7E15-93C6-A602-932E-294A6AE9DDC1}"/>
+              </a:ext>
+            </a:extLst>
+          </p:cNvPr>
+          <p:cNvSpPr txBox="1"/>
+          <p:nvPr/>
+        </p:nvSpPr>
+        <p:spPr>
+          <a:xfrm>
+            <a:off x="508000" y="2603500"/>
+            <a:ext cx="3810000" cy="261610"/>
+          </a:xfrm>
+          <a:prstGeom prst="rect">
+            <a:avLst/>
+          </a:prstGeom>
+          <a:noFill/>
+        </p:spPr>
+        <p:txBody>
+          <a:bodyPr vert="horz" rtlCol="0">
+            <a:spAutoFit/>
+          </a:bodyPr>
+          <a:lstStyle/>
+          <a:p>
+            <a:r>
               <a:rPr lang="en-IN" sz="1100" b="1">
                 <a:solidFill>
                   <a:srgbClr val="FB923C"/>
@@ -5834,10 +6686,10 @@
       </p:sp>
       <p:sp>
         <p:nvSpPr>
-          <p:cNvPr id="7" name="TextBox 6">
-            <a:extLst>
-              <a:ext uri="{FF2B5EF4-FFF2-40B4-BE49-F238E27FC236}">
-                <a16:creationId xmlns:a16="http://schemas.microsoft.com/office/drawing/2014/main" id="{3DAAE738-10FC-4CB4-F81D-5367E69981AC}"/>
+          <p:cNvPr id="9" name="TextBox 8">
+            <a:extLst>
+              <a:ext uri="{FF2B5EF4-FFF2-40B4-BE49-F238E27FC236}">
+                <a16:creationId xmlns:a16="http://schemas.microsoft.com/office/drawing/2014/main" id="{487394E9-6530-44CA-B70A-9CFEF6D7C6EB}"/>
               </a:ext>
             </a:extLst>
           </p:cNvPr>
@@ -5861,58 +6713,86 @@
           <a:lstStyle/>
           <a:p>
             <a:r>
-              <a:rPr lang="en-IN" sz="1100">
+              <a:rPr lang="en-US" sz="1100">
                 <a:solidFill>
                   <a:srgbClr val="FFFFFF"/>
                 </a:solidFill>
                 <a:latin typeface="Segoe UI" panose="020B0502040204020203" pitchFamily="34" charset="0"/>
               </a:rPr>
-              <a:t>â€¢ Interactive percentile sliders (e.g., P1 to P99 clipping).
-â€¢ Compares data distributions before and after outlier removal.
-â€¢ Geographical map visualizations of listing locations.</a:t>
-            </a:r>
-          </a:p>
-        </p:txBody>
-      </p:sp>
-      <p:sp>
-        <p:nvSpPr>
-          <p:cNvPr id="8" name="TextBox 7">
-            <a:extLst>
-              <a:ext uri="{FF2B5EF4-FFF2-40B4-BE49-F238E27FC236}">
-                <a16:creationId xmlns:a16="http://schemas.microsoft.com/office/drawing/2014/main" id="{50064044-53CA-01CA-D653-26373EF03EBA}"/>
-              </a:ext>
-            </a:extLst>
-          </p:cNvPr>
-          <p:cNvSpPr txBox="1"/>
-          <p:nvPr/>
-        </p:nvSpPr>
-        <p:spPr>
-          <a:xfrm>
-            <a:off x="508000" y="5461000"/>
-            <a:ext cx="3810000" cy="430887"/>
-          </a:xfrm>
-          <a:prstGeom prst="rect">
-            <a:avLst/>
-          </a:prstGeom>
-          <a:noFill/>
-        </p:spPr>
-        <p:txBody>
-          <a:bodyPr vert="horz" wrap="square" rtlCol="0">
-            <a:spAutoFit/>
-          </a:bodyPr>
-          <a:lstStyle/>
-          <a:p>
-            <a:r>
-              <a:rPr lang="en-US" sz="1100" b="1">
+              <a:t>- Interactive percentile sliders (e.g., P1 to P99 clipping).
+- Compares data distributions before and after outlier removal.
+- Geographical map visualizations of listing locations.</a:t>
+            </a:r>
+            <a:endParaRPr lang="en-IN" sz="1100">
+              <a:solidFill>
+                <a:srgbClr val="FFFFFF"/>
+              </a:solidFill>
+              <a:latin typeface="Segoe UI" panose="020B0502040204020203" pitchFamily="34" charset="0"/>
+            </a:endParaRPr>
+          </a:p>
+        </p:txBody>
+      </p:sp>
+      <p:sp>
+        <p:nvSpPr>
+          <p:cNvPr id="10" name="Rectangle: Rounded Corners 9">
+            <a:extLst>
+              <a:ext uri="{FF2B5EF4-FFF2-40B4-BE49-F238E27FC236}">
+                <a16:creationId xmlns:a16="http://schemas.microsoft.com/office/drawing/2014/main" id="{5990BE2B-F938-EFA1-6485-B5A513963B54}"/>
+              </a:ext>
+            </a:extLst>
+          </p:cNvPr>
+          <p:cNvSpPr/>
+          <p:nvPr/>
+        </p:nvSpPr>
+        <p:spPr>
+          <a:xfrm>
+            <a:off x="508000" y="5397500"/>
+            <a:ext cx="3810000" cy="635000"/>
+          </a:xfrm>
+          <a:prstGeom prst="roundRect">
+            <a:avLst/>
+          </a:prstGeom>
+          <a:solidFill>
+            <a:srgbClr val="1E293B"/>
+          </a:solidFill>
+          <a:ln w="12700">
+            <a:solidFill>
+              <a:srgbClr val="06B6D4"/>
+            </a:solidFill>
+          </a:ln>
+        </p:spPr>
+        <p:style>
+          <a:lnRef idx="2">
+            <a:schemeClr val="accent1">
+              <a:shade val="15000"/>
+            </a:schemeClr>
+          </a:lnRef>
+          <a:fillRef idx="1">
+            <a:schemeClr val="accent1"/>
+          </a:fillRef>
+          <a:effectRef idx="0">
+            <a:schemeClr val="accent1"/>
+          </a:effectRef>
+          <a:fontRef idx="minor">
+            <a:schemeClr val="lt1"/>
+          </a:fontRef>
+        </p:style>
+        <p:txBody>
+          <a:bodyPr rtlCol="0" anchor="ctr"/>
+          <a:lstStyle/>
+          <a:p>
+            <a:pPr algn="ctr"/>
+            <a:r>
+              <a:rPr lang="en-US" sz="900" b="1">
                 <a:solidFill>
                   <a:srgbClr val="06B6D4"/>
                 </a:solidFill>
                 <a:latin typeface="Segoe UI" panose="020B0502040204020203" pitchFamily="34" charset="0"/>
               </a:rPr>
-              <a:t>TECH STACK:
+              <a:t>TECH STACK
 Streamlit, Plotly, Pandas, NumPy</a:t>
             </a:r>
-            <a:endParaRPr lang="en-IN" sz="1100" b="1">
+            <a:endParaRPr lang="en-IN" sz="900" b="1">
               <a:solidFill>
                 <a:srgbClr val="06B6D4"/>
               </a:solidFill>
@@ -5923,10 +6803,10 @@
       </p:sp>
       <p:sp>
         <p:nvSpPr>
-          <p:cNvPr id="9" name="Rectangle 8">
-            <a:extLst>
-              <a:ext uri="{FF2B5EF4-FFF2-40B4-BE49-F238E27FC236}">
-                <a16:creationId xmlns:a16="http://schemas.microsoft.com/office/drawing/2014/main" id="{C8A6B82E-E3C7-626E-A10A-0190A7CA1E62}"/>
+          <p:cNvPr id="11" name="Rectangle: Rounded Corners 10">
+            <a:extLst>
+              <a:ext uri="{FF2B5EF4-FFF2-40B4-BE49-F238E27FC236}">
+                <a16:creationId xmlns:a16="http://schemas.microsoft.com/office/drawing/2014/main" id="{63A235EA-3B78-4B31-5281-C4F87F916C05}"/>
               </a:ext>
             </a:extLst>
           </p:cNvPr>
@@ -5938,7 +6818,7 @@
             <a:off x="4445000" y="1143000"/>
             <a:ext cx="7366000" cy="4318000"/>
           </a:xfrm>
-          <a:prstGeom prst="rect">
+          <a:prstGeom prst="roundRect">
             <a:avLst/>
           </a:prstGeom>
           <a:solidFill>
@@ -5991,10 +6871,10 @@
       </p:sp>
       <p:pic>
         <p:nvPicPr>
-          <p:cNvPr id="11" name="Picture 10">
-            <a:extLst>
-              <a:ext uri="{FF2B5EF4-FFF2-40B4-BE49-F238E27FC236}">
-                <a16:creationId xmlns:a16="http://schemas.microsoft.com/office/drawing/2014/main" id="{F626F450-1382-DD46-4912-A4FBD34F5B76}"/>
+          <p:cNvPr id="13" name="Picture 12">
+            <a:extLst>
+              <a:ext uri="{FF2B5EF4-FFF2-40B4-BE49-F238E27FC236}">
+                <a16:creationId xmlns:a16="http://schemas.microsoft.com/office/drawing/2014/main" id="{00C71B3C-BD0D-CDEE-E5D6-761362B7972D}"/>
               </a:ext>
             </a:extLst>
           </p:cNvPr>
@@ -6033,7 +6913,7 @@
     </p:spTree>
     <p:extLst>
       <p:ext uri="{BB962C8B-B14F-4D97-AF65-F5344CB8AC3E}">
-        <p14:creationId xmlns:p14="http://schemas.microsoft.com/office/powerpoint/2010/main" val="3234508941"/>
+        <p14:creationId xmlns:p14="http://schemas.microsoft.com/office/powerpoint/2010/main" val="484959414"/>
       </p:ext>
     </p:extLst>
   </p:cSld>
@@ -6062,148 +6942,10 @@
       </p:grpSpPr>
       <p:sp>
         <p:nvSpPr>
-          <p:cNvPr id="2" name="TextBox 1">
-            <a:extLst>
-              <a:ext uri="{FF2B5EF4-FFF2-40B4-BE49-F238E27FC236}">
-                <a16:creationId xmlns:a16="http://schemas.microsoft.com/office/drawing/2014/main" id="{1915328D-D5D8-327E-AEB1-C46B6F029396}"/>
-              </a:ext>
-            </a:extLst>
-          </p:cNvPr>
-          <p:cNvSpPr txBox="1"/>
-          <p:nvPr/>
-        </p:nvSpPr>
-        <p:spPr>
-          <a:xfrm>
-            <a:off x="508000" y="508000"/>
-            <a:ext cx="3810000" cy="400110"/>
-          </a:xfrm>
-          <a:prstGeom prst="rect">
-            <a:avLst/>
-          </a:prstGeom>
-          <a:noFill/>
-        </p:spPr>
-        <p:txBody>
-          <a:bodyPr vert="horz" rtlCol="0">
-            <a:spAutoFit/>
-          </a:bodyPr>
-          <a:lstStyle/>
-          <a:p>
-            <a:r>
-              <a:rPr lang="en-US" sz="1000" b="1">
-                <a:solidFill>
-                  <a:srgbClr val="94A3B8"/>
-                </a:solidFill>
-                <a:latin typeface="Segoe UI" panose="020B0502040204020203" pitchFamily="34" charset="0"/>
-              </a:rPr>
-              <a:t>PROJECT 03 OF 11  â€¢  COMPUTER VISION &amp; CLASSICAL ML CLASSIFICATION</a:t>
-            </a:r>
-            <a:endParaRPr lang="en-IN" sz="1000" b="1">
-              <a:solidFill>
-                <a:srgbClr val="94A3B8"/>
-              </a:solidFill>
-              <a:latin typeface="Segoe UI" panose="020B0502040204020203" pitchFamily="34" charset="0"/>
-            </a:endParaRPr>
-          </a:p>
-        </p:txBody>
-      </p:sp>
-      <p:sp>
-        <p:nvSpPr>
-          <p:cNvPr id="3" name="TextBox 2">
-            <a:extLst>
-              <a:ext uri="{FF2B5EF4-FFF2-40B4-BE49-F238E27FC236}">
-                <a16:creationId xmlns:a16="http://schemas.microsoft.com/office/drawing/2014/main" id="{A147F472-1971-0F60-751A-553AFC5159EA}"/>
-              </a:ext>
-            </a:extLst>
-          </p:cNvPr>
-          <p:cNvSpPr txBox="1"/>
-          <p:nvPr/>
-        </p:nvSpPr>
-        <p:spPr>
-          <a:xfrm>
-            <a:off x="508000" y="762000"/>
-            <a:ext cx="3810000" cy="430887"/>
-          </a:xfrm>
-          <a:prstGeom prst="rect">
-            <a:avLst/>
-          </a:prstGeom>
-          <a:noFill/>
-        </p:spPr>
-        <p:txBody>
-          <a:bodyPr vert="horz" wrap="square" rtlCol="0">
-            <a:spAutoFit/>
-          </a:bodyPr>
-          <a:lstStyle/>
-          <a:p>
-            <a:r>
-              <a:rPr lang="fr-FR" sz="2200" b="1">
-                <a:solidFill>
-                  <a:srgbClr val="FFFFFF"/>
-                </a:solidFill>
-                <a:latin typeface="Segoe UI" panose="020B0502040204020203" pitchFamily="34" charset="0"/>
-              </a:rPr>
-              <a:t>Cat vs Dog Image Classifier</a:t>
-            </a:r>
-            <a:endParaRPr lang="en-IN" sz="2200" b="1">
-              <a:solidFill>
-                <a:srgbClr val="FFFFFF"/>
-              </a:solidFill>
-              <a:latin typeface="Segoe UI" panose="020B0502040204020203" pitchFamily="34" charset="0"/>
-            </a:endParaRPr>
-          </a:p>
-        </p:txBody>
-      </p:sp>
-      <p:sp>
-        <p:nvSpPr>
-          <p:cNvPr id="4" name="TextBox 3">
-            <a:extLst>
-              <a:ext uri="{FF2B5EF4-FFF2-40B4-BE49-F238E27FC236}">
-                <a16:creationId xmlns:a16="http://schemas.microsoft.com/office/drawing/2014/main" id="{5F1AF7A6-8430-1274-557B-D5A6BE33438E}"/>
-              </a:ext>
-            </a:extLst>
-          </p:cNvPr>
-          <p:cNvSpPr txBox="1"/>
-          <p:nvPr/>
-        </p:nvSpPr>
-        <p:spPr>
-          <a:xfrm>
-            <a:off x="508000" y="1714500"/>
-            <a:ext cx="3810000" cy="461665"/>
-          </a:xfrm>
-          <a:prstGeom prst="rect">
-            <a:avLst/>
-          </a:prstGeom>
-          <a:noFill/>
-        </p:spPr>
-        <p:txBody>
-          <a:bodyPr vert="horz" wrap="square" rtlCol="0">
-            <a:spAutoFit/>
-          </a:bodyPr>
-          <a:lstStyle/>
-          <a:p>
-            <a:r>
-              <a:rPr lang="en-US" sz="1200">
-                <a:solidFill>
-                  <a:srgbClr val="94A3B8"/>
-                </a:solidFill>
-                <a:latin typeface="Segoe UI" panose="020B0502040204020203" pitchFamily="34" charset="0"/>
-              </a:rPr>
-              <a:t>Computer Vision app classifying uploaded images of cats and dogs using machine learning</a:t>
-            </a:r>
-            <a:endParaRPr lang="en-IN" sz="1200">
-              <a:solidFill>
-                <a:srgbClr val="94A3B8"/>
-              </a:solidFill>
-              <a:latin typeface="Segoe UI" panose="020B0502040204020203" pitchFamily="34" charset="0"/>
-            </a:endParaRPr>
-          </a:p>
-        </p:txBody>
-      </p:sp>
-      <p:sp>
-        <p:nvSpPr>
-          <p:cNvPr id="5" name="Rectangle 4">
-            <a:extLst>
-              <a:ext uri="{FF2B5EF4-FFF2-40B4-BE49-F238E27FC236}">
-                <a16:creationId xmlns:a16="http://schemas.microsoft.com/office/drawing/2014/main" id="{028BD9A6-C4F0-8904-429F-C5164082113F}"/>
+          <p:cNvPr id="2" name="Rectangle 1">
+            <a:extLst>
+              <a:ext uri="{FF2B5EF4-FFF2-40B4-BE49-F238E27FC236}">
+                <a16:creationId xmlns:a16="http://schemas.microsoft.com/office/drawing/2014/main" id="{A5D5D087-ED67-EA96-005E-BF4365462E7E}"/>
               </a:ext>
             </a:extLst>
           </p:cNvPr>
@@ -6212,8 +6954,8 @@
         </p:nvSpPr>
         <p:spPr>
           <a:xfrm>
-            <a:off x="508000" y="2476500"/>
-            <a:ext cx="762000" cy="38100"/>
+            <a:off x="0" y="0"/>
+            <a:ext cx="76200" cy="6858000"/>
           </a:xfrm>
           <a:prstGeom prst="rect">
             <a:avLst/>
@@ -6268,10 +7010,72 @@
       </p:sp>
       <p:sp>
         <p:nvSpPr>
-          <p:cNvPr id="6" name="TextBox 5">
-            <a:extLst>
-              <a:ext uri="{FF2B5EF4-FFF2-40B4-BE49-F238E27FC236}">
-                <a16:creationId xmlns:a16="http://schemas.microsoft.com/office/drawing/2014/main" id="{1BBA3E3E-4C12-22A7-F10A-FC91EAE65044}"/>
+          <p:cNvPr id="3" name="Rectangle: Rounded Corners 2">
+            <a:extLst>
+              <a:ext uri="{FF2B5EF4-FFF2-40B4-BE49-F238E27FC236}">
+                <a16:creationId xmlns:a16="http://schemas.microsoft.com/office/drawing/2014/main" id="{60A0C30B-94E9-39F9-BC7A-74FA458D4600}"/>
+              </a:ext>
+            </a:extLst>
+          </p:cNvPr>
+          <p:cNvSpPr/>
+          <p:nvPr/>
+        </p:nvSpPr>
+        <p:spPr>
+          <a:xfrm>
+            <a:off x="508000" y="457200"/>
+            <a:ext cx="1651000" cy="254000"/>
+          </a:xfrm>
+          <a:prstGeom prst="roundRect">
+            <a:avLst/>
+          </a:prstGeom>
+          <a:solidFill>
+            <a:srgbClr val="1E293B"/>
+          </a:solidFill>
+          <a:ln w="12700">
+            <a:solidFill>
+              <a:srgbClr val="06B6D4"/>
+            </a:solidFill>
+          </a:ln>
+        </p:spPr>
+        <p:style>
+          <a:lnRef idx="2">
+            <a:schemeClr val="accent1">
+              <a:shade val="15000"/>
+            </a:schemeClr>
+          </a:lnRef>
+          <a:fillRef idx="1">
+            <a:schemeClr val="accent1"/>
+          </a:fillRef>
+          <a:effectRef idx="0">
+            <a:schemeClr val="accent1"/>
+          </a:effectRef>
+          <a:fontRef idx="minor">
+            <a:schemeClr val="lt1"/>
+          </a:fontRef>
+        </p:style>
+        <p:txBody>
+          <a:bodyPr rtlCol="0" anchor="ctr"/>
+          <a:lstStyle/>
+          <a:p>
+            <a:pPr algn="ctr"/>
+            <a:r>
+              <a:rPr lang="en-IN" sz="900" b="1">
+                <a:solidFill>
+                  <a:srgbClr val="FFFFFF"/>
+                </a:solidFill>
+                <a:latin typeface="Segoe UI" panose="020B0502040204020203" pitchFamily="34" charset="0"/>
+              </a:rPr>
+              <a:t>COMPUTER VISION</a:t>
+            </a:r>
+          </a:p>
+        </p:txBody>
+      </p:sp>
+      <p:sp>
+        <p:nvSpPr>
+          <p:cNvPr id="4" name="TextBox 3">
+            <a:extLst>
+              <a:ext uri="{FF2B5EF4-FFF2-40B4-BE49-F238E27FC236}">
+                <a16:creationId xmlns:a16="http://schemas.microsoft.com/office/drawing/2014/main" id="{38DE93BD-7050-AF6B-F8F7-734C697B4305}"/>
               </a:ext>
             </a:extLst>
           </p:cNvPr>
@@ -6280,8 +7084,8 @@
         </p:nvSpPr>
         <p:spPr>
           <a:xfrm>
-            <a:off x="508000" y="2603500"/>
-            <a:ext cx="3810000" cy="261610"/>
+            <a:off x="2349500" y="457200"/>
+            <a:ext cx="2159000" cy="230832"/>
           </a:xfrm>
           <a:prstGeom prst="rect">
             <a:avLst/>
@@ -6295,6 +7099,206 @@
           <a:lstStyle/>
           <a:p>
             <a:r>
+              <a:rPr lang="en-IN" sz="900" b="1">
+                <a:solidFill>
+                  <a:srgbClr val="94A3B8"/>
+                </a:solidFill>
+                <a:latin typeface="Segoe UI" panose="020B0502040204020203" pitchFamily="34" charset="0"/>
+              </a:rPr>
+              <a:t>PROJECT 03 OF 11</a:t>
+            </a:r>
+          </a:p>
+        </p:txBody>
+      </p:sp>
+      <p:sp>
+        <p:nvSpPr>
+          <p:cNvPr id="5" name="TextBox 4">
+            <a:extLst>
+              <a:ext uri="{FF2B5EF4-FFF2-40B4-BE49-F238E27FC236}">
+                <a16:creationId xmlns:a16="http://schemas.microsoft.com/office/drawing/2014/main" id="{402BA4C0-4987-0690-E4A5-1EF6628B4040}"/>
+              </a:ext>
+            </a:extLst>
+          </p:cNvPr>
+          <p:cNvSpPr txBox="1"/>
+          <p:nvPr/>
+        </p:nvSpPr>
+        <p:spPr>
+          <a:xfrm>
+            <a:off x="508000" y="787400"/>
+            <a:ext cx="3810000" cy="430887"/>
+          </a:xfrm>
+          <a:prstGeom prst="rect">
+            <a:avLst/>
+          </a:prstGeom>
+          <a:noFill/>
+        </p:spPr>
+        <p:txBody>
+          <a:bodyPr vert="horz" wrap="square" rtlCol="0">
+            <a:spAutoFit/>
+          </a:bodyPr>
+          <a:lstStyle/>
+          <a:p>
+            <a:r>
+              <a:rPr lang="fr-FR" sz="2200" b="1">
+                <a:solidFill>
+                  <a:srgbClr val="FFFFFF"/>
+                </a:solidFill>
+                <a:latin typeface="Segoe UI" panose="020B0502040204020203" pitchFamily="34" charset="0"/>
+              </a:rPr>
+              <a:t>Cat vs Dog Image Classifier</a:t>
+            </a:r>
+            <a:endParaRPr lang="en-IN" sz="2200" b="1">
+              <a:solidFill>
+                <a:srgbClr val="FFFFFF"/>
+              </a:solidFill>
+              <a:latin typeface="Segoe UI" panose="020B0502040204020203" pitchFamily="34" charset="0"/>
+            </a:endParaRPr>
+          </a:p>
+        </p:txBody>
+      </p:sp>
+      <p:sp>
+        <p:nvSpPr>
+          <p:cNvPr id="6" name="TextBox 5">
+            <a:extLst>
+              <a:ext uri="{FF2B5EF4-FFF2-40B4-BE49-F238E27FC236}">
+                <a16:creationId xmlns:a16="http://schemas.microsoft.com/office/drawing/2014/main" id="{02771A8C-0629-F19E-50B7-332DFB1D9A9F}"/>
+              </a:ext>
+            </a:extLst>
+          </p:cNvPr>
+          <p:cNvSpPr txBox="1"/>
+          <p:nvPr/>
+        </p:nvSpPr>
+        <p:spPr>
+          <a:xfrm>
+            <a:off x="508000" y="1714500"/>
+            <a:ext cx="3810000" cy="461665"/>
+          </a:xfrm>
+          <a:prstGeom prst="rect">
+            <a:avLst/>
+          </a:prstGeom>
+          <a:noFill/>
+        </p:spPr>
+        <p:txBody>
+          <a:bodyPr vert="horz" wrap="square" rtlCol="0">
+            <a:spAutoFit/>
+          </a:bodyPr>
+          <a:lstStyle/>
+          <a:p>
+            <a:r>
+              <a:rPr lang="en-US" sz="1200">
+                <a:solidFill>
+                  <a:srgbClr val="94A3B8"/>
+                </a:solidFill>
+                <a:latin typeface="Segoe UI" panose="020B0502040204020203" pitchFamily="34" charset="0"/>
+              </a:rPr>
+              <a:t>Computer Vision app classifying uploaded images of cats and dogs using machine learning</a:t>
+            </a:r>
+            <a:endParaRPr lang="en-IN" sz="1200">
+              <a:solidFill>
+                <a:srgbClr val="94A3B8"/>
+              </a:solidFill>
+              <a:latin typeface="Segoe UI" panose="020B0502040204020203" pitchFamily="34" charset="0"/>
+            </a:endParaRPr>
+          </a:p>
+        </p:txBody>
+      </p:sp>
+      <p:sp>
+        <p:nvSpPr>
+          <p:cNvPr id="7" name="Rectangle 6">
+            <a:extLst>
+              <a:ext uri="{FF2B5EF4-FFF2-40B4-BE49-F238E27FC236}">
+                <a16:creationId xmlns:a16="http://schemas.microsoft.com/office/drawing/2014/main" id="{92BA3A89-A259-DEC4-786B-46F3734E0B17}"/>
+              </a:ext>
+            </a:extLst>
+          </p:cNvPr>
+          <p:cNvSpPr/>
+          <p:nvPr/>
+        </p:nvSpPr>
+        <p:spPr>
+          <a:xfrm>
+            <a:off x="508000" y="2476500"/>
+            <a:ext cx="762000" cy="25400"/>
+          </a:xfrm>
+          <a:prstGeom prst="rect">
+            <a:avLst/>
+          </a:prstGeom>
+          <a:solidFill>
+            <a:srgbClr val="06B6D4"/>
+          </a:solidFill>
+          <a:ln w="19050" cap="flat" cmpd="sng" algn="ctr">
+            <a:noFill/>
+            <a:prstDash val="solid"/>
+            <a:miter lim="800000"/>
+          </a:ln>
+          <a:effectLst/>
+          <a:extLst>
+            <a:ext uri="{91240B29-F687-4F45-9708-019B960494DF}">
+              <a14:hiddenLine xmlns:a14="http://schemas.microsoft.com/office/drawing/2010/main" w="19050" cap="flat" cmpd="sng" algn="ctr">
+                <a:solidFill>
+                  <a:schemeClr val="accent1">
+                    <a:shade val="15000"/>
+                  </a:schemeClr>
+                </a:solidFill>
+                <a:prstDash val="solid"/>
+                <a:miter lim="800000"/>
+              </a14:hiddenLine>
+            </a:ext>
+          </a:extLst>
+        </p:spPr>
+        <p:style>
+          <a:lnRef idx="2">
+            <a:schemeClr val="accent1">
+              <a:shade val="15000"/>
+            </a:schemeClr>
+          </a:lnRef>
+          <a:fillRef idx="1">
+            <a:schemeClr val="accent1"/>
+          </a:fillRef>
+          <a:effectRef idx="0">
+            <a:schemeClr val="accent1"/>
+          </a:effectRef>
+          <a:fontRef idx="minor">
+            <a:schemeClr val="lt1"/>
+          </a:fontRef>
+        </p:style>
+        <p:txBody>
+          <a:bodyPr rtlCol="0" anchor="ctr"/>
+          <a:lstStyle/>
+          <a:p>
+            <a:pPr algn="ctr"/>
+            <a:endParaRPr lang="en-IN"/>
+          </a:p>
+        </p:txBody>
+      </p:sp>
+      <p:sp>
+        <p:nvSpPr>
+          <p:cNvPr id="8" name="TextBox 7">
+            <a:extLst>
+              <a:ext uri="{FF2B5EF4-FFF2-40B4-BE49-F238E27FC236}">
+                <a16:creationId xmlns:a16="http://schemas.microsoft.com/office/drawing/2014/main" id="{36843865-DCA2-3707-91A0-1878EE88A723}"/>
+              </a:ext>
+            </a:extLst>
+          </p:cNvPr>
+          <p:cNvSpPr txBox="1"/>
+          <p:nvPr/>
+        </p:nvSpPr>
+        <p:spPr>
+          <a:xfrm>
+            <a:off x="508000" y="2603500"/>
+            <a:ext cx="3810000" cy="261610"/>
+          </a:xfrm>
+          <a:prstGeom prst="rect">
+            <a:avLst/>
+          </a:prstGeom>
+          <a:noFill/>
+        </p:spPr>
+        <p:txBody>
+          <a:bodyPr vert="horz" rtlCol="0">
+            <a:spAutoFit/>
+          </a:bodyPr>
+          <a:lstStyle/>
+          <a:p>
+            <a:r>
               <a:rPr lang="en-IN" sz="1100" b="1">
                 <a:solidFill>
                   <a:srgbClr val="FB923C"/>
@@ -6308,10 +7312,10 @@
       </p:sp>
       <p:sp>
         <p:nvSpPr>
-          <p:cNvPr id="7" name="TextBox 6">
-            <a:extLst>
-              <a:ext uri="{FF2B5EF4-FFF2-40B4-BE49-F238E27FC236}">
-                <a16:creationId xmlns:a16="http://schemas.microsoft.com/office/drawing/2014/main" id="{8644DD71-3AB3-6FE5-AD24-23564FB9A59C}"/>
+          <p:cNvPr id="9" name="TextBox 8">
+            <a:extLst>
+              <a:ext uri="{FF2B5EF4-FFF2-40B4-BE49-F238E27FC236}">
+                <a16:creationId xmlns:a16="http://schemas.microsoft.com/office/drawing/2014/main" id="{C25D9836-0EF0-88A2-81DC-36E0E85BF9BB}"/>
               </a:ext>
             </a:extLst>
           </p:cNvPr>
@@ -6341,9 +7345,9 @@
                 </a:solidFill>
                 <a:latin typeface="Segoe UI" panose="020B0502040204020203" pitchFamily="34" charset="0"/>
               </a:rPr>
-              <a:t>â€¢ Drag-and-drop file uploader for JPG/PNG images.
-â€¢ SVM classifier trained on image features with standard scaling.
-â€¢ Displays real-time confidence scores and probability break-downs.</a:t>
+              <a:t>- Drag-and-drop file uploader for JPG/PNG images.
+- SVM classifier trained on image features with standard scaling.
+- Displays real-time confidence scores and probability break-downs.</a:t>
             </a:r>
             <a:endParaRPr lang="en-IN" sz="1100">
               <a:solidFill>
@@ -6356,43 +7360,65 @@
       </p:sp>
       <p:sp>
         <p:nvSpPr>
-          <p:cNvPr id="8" name="TextBox 7">
-            <a:extLst>
-              <a:ext uri="{FF2B5EF4-FFF2-40B4-BE49-F238E27FC236}">
-                <a16:creationId xmlns:a16="http://schemas.microsoft.com/office/drawing/2014/main" id="{4EA1750A-B639-A10D-2E10-CEADE0C54295}"/>
-              </a:ext>
-            </a:extLst>
-          </p:cNvPr>
-          <p:cNvSpPr txBox="1"/>
-          <p:nvPr/>
-        </p:nvSpPr>
-        <p:spPr>
-          <a:xfrm>
-            <a:off x="508000" y="5461000"/>
-            <a:ext cx="3810000" cy="430887"/>
-          </a:xfrm>
-          <a:prstGeom prst="rect">
-            <a:avLst/>
-          </a:prstGeom>
-          <a:noFill/>
-        </p:spPr>
-        <p:txBody>
-          <a:bodyPr vert="horz" wrap="square" rtlCol="0">
-            <a:spAutoFit/>
-          </a:bodyPr>
-          <a:lstStyle/>
-          <a:p>
-            <a:r>
-              <a:rPr lang="en-US" sz="1100" b="1">
+          <p:cNvPr id="10" name="Rectangle: Rounded Corners 9">
+            <a:extLst>
+              <a:ext uri="{FF2B5EF4-FFF2-40B4-BE49-F238E27FC236}">
+                <a16:creationId xmlns:a16="http://schemas.microsoft.com/office/drawing/2014/main" id="{839A2213-33C3-5044-8618-BF310FDEB4C0}"/>
+              </a:ext>
+            </a:extLst>
+          </p:cNvPr>
+          <p:cNvSpPr/>
+          <p:nvPr/>
+        </p:nvSpPr>
+        <p:spPr>
+          <a:xfrm>
+            <a:off x="508000" y="5397500"/>
+            <a:ext cx="3810000" cy="635000"/>
+          </a:xfrm>
+          <a:prstGeom prst="roundRect">
+            <a:avLst/>
+          </a:prstGeom>
+          <a:solidFill>
+            <a:srgbClr val="1E293B"/>
+          </a:solidFill>
+          <a:ln w="12700">
+            <a:solidFill>
+              <a:srgbClr val="06B6D4"/>
+            </a:solidFill>
+          </a:ln>
+        </p:spPr>
+        <p:style>
+          <a:lnRef idx="2">
+            <a:schemeClr val="accent1">
+              <a:shade val="15000"/>
+            </a:schemeClr>
+          </a:lnRef>
+          <a:fillRef idx="1">
+            <a:schemeClr val="accent1"/>
+          </a:fillRef>
+          <a:effectRef idx="0">
+            <a:schemeClr val="accent1"/>
+          </a:effectRef>
+          <a:fontRef idx="minor">
+            <a:schemeClr val="lt1"/>
+          </a:fontRef>
+        </p:style>
+        <p:txBody>
+          <a:bodyPr rtlCol="0" anchor="ctr"/>
+          <a:lstStyle/>
+          <a:p>
+            <a:pPr algn="ctr"/>
+            <a:r>
+              <a:rPr lang="en-US" sz="900" b="1">
                 <a:solidFill>
                   <a:srgbClr val="06B6D4"/>
                 </a:solidFill>
                 <a:latin typeface="Segoe UI" panose="020B0502040204020203" pitchFamily="34" charset="0"/>
               </a:rPr>
-              <a:t>TECH STACK:
+              <a:t>TECH STACK
 Streamlit, Scikit-learn, PIL, NumPy</a:t>
             </a:r>
-            <a:endParaRPr lang="en-IN" sz="1100" b="1">
+            <a:endParaRPr lang="en-IN" sz="900" b="1">
               <a:solidFill>
                 <a:srgbClr val="06B6D4"/>
               </a:solidFill>
@@ -6403,10 +7429,10 @@
       </p:sp>
       <p:sp>
         <p:nvSpPr>
-          <p:cNvPr id="9" name="Rectangle 8">
-            <a:extLst>
-              <a:ext uri="{FF2B5EF4-FFF2-40B4-BE49-F238E27FC236}">
-                <a16:creationId xmlns:a16="http://schemas.microsoft.com/office/drawing/2014/main" id="{F217E78B-E743-BC26-F640-19D3654B299C}"/>
+          <p:cNvPr id="11" name="Rectangle: Rounded Corners 10">
+            <a:extLst>
+              <a:ext uri="{FF2B5EF4-FFF2-40B4-BE49-F238E27FC236}">
+                <a16:creationId xmlns:a16="http://schemas.microsoft.com/office/drawing/2014/main" id="{D14635AB-F529-5CF8-7F0F-24CA8CAA3068}"/>
               </a:ext>
             </a:extLst>
           </p:cNvPr>
@@ -6418,7 +7444,7 @@
             <a:off x="4445000" y="1143000"/>
             <a:ext cx="7366000" cy="4318000"/>
           </a:xfrm>
-          <a:prstGeom prst="rect">
+          <a:prstGeom prst="roundRect">
             <a:avLst/>
           </a:prstGeom>
           <a:solidFill>
@@ -6471,10 +7497,10 @@
       </p:sp>
       <p:pic>
         <p:nvPicPr>
-          <p:cNvPr id="11" name="Picture 10">
-            <a:extLst>
-              <a:ext uri="{FF2B5EF4-FFF2-40B4-BE49-F238E27FC236}">
-                <a16:creationId xmlns:a16="http://schemas.microsoft.com/office/drawing/2014/main" id="{E57B7F58-8AED-1982-F41E-EB9F2AF81431}"/>
+          <p:cNvPr id="13" name="Picture 12">
+            <a:extLst>
+              <a:ext uri="{FF2B5EF4-FFF2-40B4-BE49-F238E27FC236}">
+                <a16:creationId xmlns:a16="http://schemas.microsoft.com/office/drawing/2014/main" id="{A7B95409-ACBF-6DD2-AC41-38419B38B127}"/>
               </a:ext>
             </a:extLst>
           </p:cNvPr>
@@ -6513,7 +7539,7 @@
     </p:spTree>
     <p:extLst>
       <p:ext uri="{BB962C8B-B14F-4D97-AF65-F5344CB8AC3E}">
-        <p14:creationId xmlns:p14="http://schemas.microsoft.com/office/powerpoint/2010/main" val="1313113073"/>
+        <p14:creationId xmlns:p14="http://schemas.microsoft.com/office/powerpoint/2010/main" val="1887090045"/>
       </p:ext>
     </p:extLst>
   </p:cSld>
@@ -6542,158 +7568,26 @@
       </p:grpSpPr>
       <p:sp>
         <p:nvSpPr>
-          <p:cNvPr id="2" name="TextBox 1">
-            <a:extLst>
-              <a:ext uri="{FF2B5EF4-FFF2-40B4-BE49-F238E27FC236}">
-                <a16:creationId xmlns:a16="http://schemas.microsoft.com/office/drawing/2014/main" id="{BED85D11-47A0-A4C0-A892-12B0AC1A00D2}"/>
-              </a:ext>
-            </a:extLst>
-          </p:cNvPr>
-          <p:cNvSpPr txBox="1"/>
-          <p:nvPr/>
-        </p:nvSpPr>
-        <p:spPr>
-          <a:xfrm>
-            <a:off x="508000" y="508000"/>
-            <a:ext cx="3810000" cy="400110"/>
+          <p:cNvPr id="2" name="Rectangle 1">
+            <a:extLst>
+              <a:ext uri="{FF2B5EF4-FFF2-40B4-BE49-F238E27FC236}">
+                <a16:creationId xmlns:a16="http://schemas.microsoft.com/office/drawing/2014/main" id="{14D62072-127A-8FC7-C807-D70D20EF8208}"/>
+              </a:ext>
+            </a:extLst>
+          </p:cNvPr>
+          <p:cNvSpPr/>
+          <p:nvPr/>
+        </p:nvSpPr>
+        <p:spPr>
+          <a:xfrm>
+            <a:off x="0" y="0"/>
+            <a:ext cx="76200" cy="6858000"/>
           </a:xfrm>
           <a:prstGeom prst="rect">
             <a:avLst/>
           </a:prstGeom>
-          <a:noFill/>
-        </p:spPr>
-        <p:txBody>
-          <a:bodyPr vert="horz" rtlCol="0">
-            <a:spAutoFit/>
-          </a:bodyPr>
-          <a:lstStyle/>
-          <a:p>
-            <a:r>
-              <a:rPr lang="en-US" sz="1000" b="1">
-                <a:solidFill>
-                  <a:srgbClr val="94A3B8"/>
-                </a:solidFill>
-                <a:latin typeface="Segoe UI" panose="020B0502040204020203" pitchFamily="34" charset="0"/>
-              </a:rPr>
-              <a:t>PROJECT 04 OF 11  â€¢  BUSINESS INTELLIGENCE &amp; HR ANALYTICS</a:t>
-            </a:r>
-            <a:endParaRPr lang="en-IN" sz="1000" b="1">
-              <a:solidFill>
-                <a:srgbClr val="94A3B8"/>
-              </a:solidFill>
-              <a:latin typeface="Segoe UI" panose="020B0502040204020203" pitchFamily="34" charset="0"/>
-            </a:endParaRPr>
-          </a:p>
-        </p:txBody>
-      </p:sp>
-      <p:sp>
-        <p:nvSpPr>
-          <p:cNvPr id="3" name="TextBox 2">
-            <a:extLst>
-              <a:ext uri="{FF2B5EF4-FFF2-40B4-BE49-F238E27FC236}">
-                <a16:creationId xmlns:a16="http://schemas.microsoft.com/office/drawing/2014/main" id="{78BED19B-C51F-11E9-04F7-4BD034B26127}"/>
-              </a:ext>
-            </a:extLst>
-          </p:cNvPr>
-          <p:cNvSpPr txBox="1"/>
-          <p:nvPr/>
-        </p:nvSpPr>
-        <p:spPr>
-          <a:xfrm>
-            <a:off x="508000" y="762000"/>
-            <a:ext cx="3810000" cy="769441"/>
-          </a:xfrm>
-          <a:prstGeom prst="rect">
-            <a:avLst/>
-          </a:prstGeom>
-          <a:noFill/>
-        </p:spPr>
-        <p:txBody>
-          <a:bodyPr vert="horz" wrap="square" rtlCol="0">
-            <a:spAutoFit/>
-          </a:bodyPr>
-          <a:lstStyle/>
-          <a:p>
-            <a:r>
-              <a:rPr lang="en-IN" sz="2200" b="1">
-                <a:solidFill>
-                  <a:srgbClr val="FFFFFF"/>
-                </a:solidFill>
-                <a:latin typeface="Segoe UI" panose="020B0502040204020203" pitchFamily="34" charset="0"/>
-              </a:rPr>
-              <a:t>Employee Retention Analysis</a:t>
-            </a:r>
-          </a:p>
-        </p:txBody>
-      </p:sp>
-      <p:sp>
-        <p:nvSpPr>
-          <p:cNvPr id="4" name="TextBox 3">
-            <a:extLst>
-              <a:ext uri="{FF2B5EF4-FFF2-40B4-BE49-F238E27FC236}">
-                <a16:creationId xmlns:a16="http://schemas.microsoft.com/office/drawing/2014/main" id="{C65596BF-1F2E-9B08-6337-3E5FE4179F4B}"/>
-              </a:ext>
-            </a:extLst>
-          </p:cNvPr>
-          <p:cNvSpPr txBox="1"/>
-          <p:nvPr/>
-        </p:nvSpPr>
-        <p:spPr>
-          <a:xfrm>
-            <a:off x="508000" y="1714500"/>
-            <a:ext cx="3810000" cy="461665"/>
-          </a:xfrm>
-          <a:prstGeom prst="rect">
-            <a:avLst/>
-          </a:prstGeom>
-          <a:noFill/>
-        </p:spPr>
-        <p:txBody>
-          <a:bodyPr vert="horz" wrap="square" rtlCol="0">
-            <a:spAutoFit/>
-          </a:bodyPr>
-          <a:lstStyle/>
-          <a:p>
-            <a:r>
-              <a:rPr lang="en-US" sz="1200">
-                <a:solidFill>
-                  <a:srgbClr val="94A3B8"/>
-                </a:solidFill>
-                <a:latin typeface="Segoe UI" panose="020B0502040204020203" pitchFamily="34" charset="0"/>
-              </a:rPr>
-              <a:t>Human Resources analytics platform investigating factors driving employee resignation rates</a:t>
-            </a:r>
-            <a:endParaRPr lang="en-IN" sz="1200">
-              <a:solidFill>
-                <a:srgbClr val="94A3B8"/>
-              </a:solidFill>
-              <a:latin typeface="Segoe UI" panose="020B0502040204020203" pitchFamily="34" charset="0"/>
-            </a:endParaRPr>
-          </a:p>
-        </p:txBody>
-      </p:sp>
-      <p:sp>
-        <p:nvSpPr>
-          <p:cNvPr id="5" name="Rectangle 4">
-            <a:extLst>
-              <a:ext uri="{FF2B5EF4-FFF2-40B4-BE49-F238E27FC236}">
-                <a16:creationId xmlns:a16="http://schemas.microsoft.com/office/drawing/2014/main" id="{BA8CF232-6BC6-A53A-ABCF-D4528011FFC1}"/>
-              </a:ext>
-            </a:extLst>
-          </p:cNvPr>
-          <p:cNvSpPr/>
-          <p:nvPr/>
-        </p:nvSpPr>
-        <p:spPr>
-          <a:xfrm>
-            <a:off x="508000" y="2476500"/>
-            <a:ext cx="762000" cy="38100"/>
-          </a:xfrm>
-          <a:prstGeom prst="rect">
-            <a:avLst/>
-          </a:prstGeom>
           <a:solidFill>
-            <a:srgbClr val="06B6D4"/>
+            <a:srgbClr val="FB923C"/>
           </a:solidFill>
           <a:ln w="19050" cap="flat" cmpd="sng" algn="ctr">
             <a:noFill/>
@@ -6742,10 +7636,72 @@
       </p:sp>
       <p:sp>
         <p:nvSpPr>
-          <p:cNvPr id="6" name="TextBox 5">
-            <a:extLst>
-              <a:ext uri="{FF2B5EF4-FFF2-40B4-BE49-F238E27FC236}">
-                <a16:creationId xmlns:a16="http://schemas.microsoft.com/office/drawing/2014/main" id="{C9579E84-91C8-5ABD-4CC5-3202EE2CFA50}"/>
+          <p:cNvPr id="3" name="Rectangle: Rounded Corners 2">
+            <a:extLst>
+              <a:ext uri="{FF2B5EF4-FFF2-40B4-BE49-F238E27FC236}">
+                <a16:creationId xmlns:a16="http://schemas.microsoft.com/office/drawing/2014/main" id="{DE2C4860-D20A-763C-CC94-EAC331FF8B25}"/>
+              </a:ext>
+            </a:extLst>
+          </p:cNvPr>
+          <p:cNvSpPr/>
+          <p:nvPr/>
+        </p:nvSpPr>
+        <p:spPr>
+          <a:xfrm>
+            <a:off x="508000" y="457200"/>
+            <a:ext cx="1651000" cy="254000"/>
+          </a:xfrm>
+          <a:prstGeom prst="roundRect">
+            <a:avLst/>
+          </a:prstGeom>
+          <a:solidFill>
+            <a:srgbClr val="1E293B"/>
+          </a:solidFill>
+          <a:ln w="12700">
+            <a:solidFill>
+              <a:srgbClr val="FB923C"/>
+            </a:solidFill>
+          </a:ln>
+        </p:spPr>
+        <p:style>
+          <a:lnRef idx="2">
+            <a:schemeClr val="accent1">
+              <a:shade val="15000"/>
+            </a:schemeClr>
+          </a:lnRef>
+          <a:fillRef idx="1">
+            <a:schemeClr val="accent1"/>
+          </a:fillRef>
+          <a:effectRef idx="0">
+            <a:schemeClr val="accent1"/>
+          </a:effectRef>
+          <a:fontRef idx="minor">
+            <a:schemeClr val="lt1"/>
+          </a:fontRef>
+        </p:style>
+        <p:txBody>
+          <a:bodyPr rtlCol="0" anchor="ctr"/>
+          <a:lstStyle/>
+          <a:p>
+            <a:pPr algn="ctr"/>
+            <a:r>
+              <a:rPr lang="en-IN" sz="900" b="1">
+                <a:solidFill>
+                  <a:srgbClr val="FFFFFF"/>
+                </a:solidFill>
+                <a:latin typeface="Segoe UI" panose="020B0502040204020203" pitchFamily="34" charset="0"/>
+              </a:rPr>
+              <a:t>HR ANALYTICS</a:t>
+            </a:r>
+          </a:p>
+        </p:txBody>
+      </p:sp>
+      <p:sp>
+        <p:nvSpPr>
+          <p:cNvPr id="4" name="TextBox 3">
+            <a:extLst>
+              <a:ext uri="{FF2B5EF4-FFF2-40B4-BE49-F238E27FC236}">
+                <a16:creationId xmlns:a16="http://schemas.microsoft.com/office/drawing/2014/main" id="{7D1E33AD-589B-B6C5-29B6-FB6DFB2CAFEC}"/>
               </a:ext>
             </a:extLst>
           </p:cNvPr>
@@ -6754,8 +7710,8 @@
         </p:nvSpPr>
         <p:spPr>
           <a:xfrm>
-            <a:off x="508000" y="2603500"/>
-            <a:ext cx="3810000" cy="261610"/>
+            <a:off x="2349500" y="457200"/>
+            <a:ext cx="2159000" cy="230832"/>
           </a:xfrm>
           <a:prstGeom prst="rect">
             <a:avLst/>
@@ -6769,6 +7725,200 @@
           <a:lstStyle/>
           <a:p>
             <a:r>
+              <a:rPr lang="en-IN" sz="900" b="1">
+                <a:solidFill>
+                  <a:srgbClr val="94A3B8"/>
+                </a:solidFill>
+                <a:latin typeface="Segoe UI" panose="020B0502040204020203" pitchFamily="34" charset="0"/>
+              </a:rPr>
+              <a:t>PROJECT 04 OF 11</a:t>
+            </a:r>
+          </a:p>
+        </p:txBody>
+      </p:sp>
+      <p:sp>
+        <p:nvSpPr>
+          <p:cNvPr id="5" name="TextBox 4">
+            <a:extLst>
+              <a:ext uri="{FF2B5EF4-FFF2-40B4-BE49-F238E27FC236}">
+                <a16:creationId xmlns:a16="http://schemas.microsoft.com/office/drawing/2014/main" id="{D3EB943F-DDD6-3D99-72BA-102E8F27B310}"/>
+              </a:ext>
+            </a:extLst>
+          </p:cNvPr>
+          <p:cNvSpPr txBox="1"/>
+          <p:nvPr/>
+        </p:nvSpPr>
+        <p:spPr>
+          <a:xfrm>
+            <a:off x="508000" y="787400"/>
+            <a:ext cx="3810000" cy="769441"/>
+          </a:xfrm>
+          <a:prstGeom prst="rect">
+            <a:avLst/>
+          </a:prstGeom>
+          <a:noFill/>
+        </p:spPr>
+        <p:txBody>
+          <a:bodyPr vert="horz" wrap="square" rtlCol="0">
+            <a:spAutoFit/>
+          </a:bodyPr>
+          <a:lstStyle/>
+          <a:p>
+            <a:r>
+              <a:rPr lang="en-IN" sz="2200" b="1">
+                <a:solidFill>
+                  <a:srgbClr val="FFFFFF"/>
+                </a:solidFill>
+                <a:latin typeface="Segoe UI" panose="020B0502040204020203" pitchFamily="34" charset="0"/>
+              </a:rPr>
+              <a:t>Employee Retention Analysis</a:t>
+            </a:r>
+          </a:p>
+        </p:txBody>
+      </p:sp>
+      <p:sp>
+        <p:nvSpPr>
+          <p:cNvPr id="6" name="TextBox 5">
+            <a:extLst>
+              <a:ext uri="{FF2B5EF4-FFF2-40B4-BE49-F238E27FC236}">
+                <a16:creationId xmlns:a16="http://schemas.microsoft.com/office/drawing/2014/main" id="{B1BAA177-36C8-C533-6D05-942EF9C4BC02}"/>
+              </a:ext>
+            </a:extLst>
+          </p:cNvPr>
+          <p:cNvSpPr txBox="1"/>
+          <p:nvPr/>
+        </p:nvSpPr>
+        <p:spPr>
+          <a:xfrm>
+            <a:off x="508000" y="1714500"/>
+            <a:ext cx="3810000" cy="461665"/>
+          </a:xfrm>
+          <a:prstGeom prst="rect">
+            <a:avLst/>
+          </a:prstGeom>
+          <a:noFill/>
+        </p:spPr>
+        <p:txBody>
+          <a:bodyPr vert="horz" wrap="square" rtlCol="0">
+            <a:spAutoFit/>
+          </a:bodyPr>
+          <a:lstStyle/>
+          <a:p>
+            <a:r>
+              <a:rPr lang="en-US" sz="1200">
+                <a:solidFill>
+                  <a:srgbClr val="94A3B8"/>
+                </a:solidFill>
+                <a:latin typeface="Segoe UI" panose="020B0502040204020203" pitchFamily="34" charset="0"/>
+              </a:rPr>
+              <a:t>Human Resources analytics platform investigating factors driving employee resignation rates</a:t>
+            </a:r>
+            <a:endParaRPr lang="en-IN" sz="1200">
+              <a:solidFill>
+                <a:srgbClr val="94A3B8"/>
+              </a:solidFill>
+              <a:latin typeface="Segoe UI" panose="020B0502040204020203" pitchFamily="34" charset="0"/>
+            </a:endParaRPr>
+          </a:p>
+        </p:txBody>
+      </p:sp>
+      <p:sp>
+        <p:nvSpPr>
+          <p:cNvPr id="7" name="Rectangle 6">
+            <a:extLst>
+              <a:ext uri="{FF2B5EF4-FFF2-40B4-BE49-F238E27FC236}">
+                <a16:creationId xmlns:a16="http://schemas.microsoft.com/office/drawing/2014/main" id="{A83C01B8-C20B-2ED5-B089-FD7BE263F99A}"/>
+              </a:ext>
+            </a:extLst>
+          </p:cNvPr>
+          <p:cNvSpPr/>
+          <p:nvPr/>
+        </p:nvSpPr>
+        <p:spPr>
+          <a:xfrm>
+            <a:off x="508000" y="2476500"/>
+            <a:ext cx="762000" cy="25400"/>
+          </a:xfrm>
+          <a:prstGeom prst="rect">
+            <a:avLst/>
+          </a:prstGeom>
+          <a:solidFill>
+            <a:srgbClr val="FB923C"/>
+          </a:solidFill>
+          <a:ln w="19050" cap="flat" cmpd="sng" algn="ctr">
+            <a:noFill/>
+            <a:prstDash val="solid"/>
+            <a:miter lim="800000"/>
+          </a:ln>
+          <a:effectLst/>
+          <a:extLst>
+            <a:ext uri="{91240B29-F687-4F45-9708-019B960494DF}">
+              <a14:hiddenLine xmlns:a14="http://schemas.microsoft.com/office/drawing/2010/main" w="19050" cap="flat" cmpd="sng" algn="ctr">
+                <a:solidFill>
+                  <a:schemeClr val="accent1">
+                    <a:shade val="15000"/>
+                  </a:schemeClr>
+                </a:solidFill>
+                <a:prstDash val="solid"/>
+                <a:miter lim="800000"/>
+              </a14:hiddenLine>
+            </a:ext>
+          </a:extLst>
+        </p:spPr>
+        <p:style>
+          <a:lnRef idx="2">
+            <a:schemeClr val="accent1">
+              <a:shade val="15000"/>
+            </a:schemeClr>
+          </a:lnRef>
+          <a:fillRef idx="1">
+            <a:schemeClr val="accent1"/>
+          </a:fillRef>
+          <a:effectRef idx="0">
+            <a:schemeClr val="accent1"/>
+          </a:effectRef>
+          <a:fontRef idx="minor">
+            <a:schemeClr val="lt1"/>
+          </a:fontRef>
+        </p:style>
+        <p:txBody>
+          <a:bodyPr rtlCol="0" anchor="ctr"/>
+          <a:lstStyle/>
+          <a:p>
+            <a:pPr algn="ctr"/>
+            <a:endParaRPr lang="en-IN"/>
+          </a:p>
+        </p:txBody>
+      </p:sp>
+      <p:sp>
+        <p:nvSpPr>
+          <p:cNvPr id="8" name="TextBox 7">
+            <a:extLst>
+              <a:ext uri="{FF2B5EF4-FFF2-40B4-BE49-F238E27FC236}">
+                <a16:creationId xmlns:a16="http://schemas.microsoft.com/office/drawing/2014/main" id="{08EB9B84-CE8B-E886-BF28-8AE7819377E2}"/>
+              </a:ext>
+            </a:extLst>
+          </p:cNvPr>
+          <p:cNvSpPr txBox="1"/>
+          <p:nvPr/>
+        </p:nvSpPr>
+        <p:spPr>
+          <a:xfrm>
+            <a:off x="508000" y="2603500"/>
+            <a:ext cx="3810000" cy="261610"/>
+          </a:xfrm>
+          <a:prstGeom prst="rect">
+            <a:avLst/>
+          </a:prstGeom>
+          <a:noFill/>
+        </p:spPr>
+        <p:txBody>
+          <a:bodyPr vert="horz" rtlCol="0">
+            <a:spAutoFit/>
+          </a:bodyPr>
+          <a:lstStyle/>
+          <a:p>
+            <a:r>
               <a:rPr lang="en-IN" sz="1100" b="1">
                 <a:solidFill>
                   <a:srgbClr val="FB923C"/>
@@ -6782,10 +7932,10 @@
       </p:sp>
       <p:sp>
         <p:nvSpPr>
-          <p:cNvPr id="7" name="TextBox 6">
-            <a:extLst>
-              <a:ext uri="{FF2B5EF4-FFF2-40B4-BE49-F238E27FC236}">
-                <a16:creationId xmlns:a16="http://schemas.microsoft.com/office/drawing/2014/main" id="{CF770065-C86B-96BA-AE12-AE94BCE7DB49}"/>
+          <p:cNvPr id="9" name="TextBox 8">
+            <a:extLst>
+              <a:ext uri="{FF2B5EF4-FFF2-40B4-BE49-F238E27FC236}">
+                <a16:creationId xmlns:a16="http://schemas.microsoft.com/office/drawing/2014/main" id="{5C95B3C5-9E0C-FD24-FA12-7BBF2D6361E6}"/>
               </a:ext>
             </a:extLst>
           </p:cNvPr>
@@ -6815,9 +7965,9 @@
                 </a:solidFill>
                 <a:latin typeface="Segoe UI" panose="020B0502040204020203" pitchFamily="34" charset="0"/>
               </a:rPr>
-              <a:t>â€¢ Departmental attrition analysis showing which roles have highest turnover.
-â€¢ Salary level comparisons highlighting the impact of compensation.
-â€¢ Interactive filtering widgets for tailored exploration of data.</a:t>
+              <a:t>- Departmental attrition analysis showing which roles have highest turnover.
+- Salary level comparisons highlighting the impact of compensation.
+- Interactive filtering widgets for tailored exploration of data.</a:t>
             </a:r>
             <a:endParaRPr lang="en-IN" sz="1100">
               <a:solidFill>
@@ -6830,43 +7980,65 @@
       </p:sp>
       <p:sp>
         <p:nvSpPr>
-          <p:cNvPr id="8" name="TextBox 7">
-            <a:extLst>
-              <a:ext uri="{FF2B5EF4-FFF2-40B4-BE49-F238E27FC236}">
-                <a16:creationId xmlns:a16="http://schemas.microsoft.com/office/drawing/2014/main" id="{BD689AC0-1F42-4580-953E-D10EC77F7EBC}"/>
-              </a:ext>
-            </a:extLst>
-          </p:cNvPr>
-          <p:cNvSpPr txBox="1"/>
-          <p:nvPr/>
-        </p:nvSpPr>
-        <p:spPr>
-          <a:xfrm>
-            <a:off x="508000" y="5461000"/>
-            <a:ext cx="3810000" cy="430887"/>
-          </a:xfrm>
-          <a:prstGeom prst="rect">
-            <a:avLst/>
-          </a:prstGeom>
-          <a:noFill/>
-        </p:spPr>
-        <p:txBody>
-          <a:bodyPr vert="horz" wrap="square" rtlCol="0">
-            <a:spAutoFit/>
-          </a:bodyPr>
-          <a:lstStyle/>
-          <a:p>
-            <a:r>
-              <a:rPr lang="en-US" sz="1100" b="1">
+          <p:cNvPr id="10" name="Rectangle: Rounded Corners 9">
+            <a:extLst>
+              <a:ext uri="{FF2B5EF4-FFF2-40B4-BE49-F238E27FC236}">
+                <a16:creationId xmlns:a16="http://schemas.microsoft.com/office/drawing/2014/main" id="{C9C166AD-F30E-5B9C-DCCF-2F5DB94BC67C}"/>
+              </a:ext>
+            </a:extLst>
+          </p:cNvPr>
+          <p:cNvSpPr/>
+          <p:nvPr/>
+        </p:nvSpPr>
+        <p:spPr>
+          <a:xfrm>
+            <a:off x="508000" y="5397500"/>
+            <a:ext cx="3810000" cy="635000"/>
+          </a:xfrm>
+          <a:prstGeom prst="roundRect">
+            <a:avLst/>
+          </a:prstGeom>
+          <a:solidFill>
+            <a:srgbClr val="1E293B"/>
+          </a:solidFill>
+          <a:ln w="12700">
+            <a:solidFill>
+              <a:srgbClr val="06B6D4"/>
+            </a:solidFill>
+          </a:ln>
+        </p:spPr>
+        <p:style>
+          <a:lnRef idx="2">
+            <a:schemeClr val="accent1">
+              <a:shade val="15000"/>
+            </a:schemeClr>
+          </a:lnRef>
+          <a:fillRef idx="1">
+            <a:schemeClr val="accent1"/>
+          </a:fillRef>
+          <a:effectRef idx="0">
+            <a:schemeClr val="accent1"/>
+          </a:effectRef>
+          <a:fontRef idx="minor">
+            <a:schemeClr val="lt1"/>
+          </a:fontRef>
+        </p:style>
+        <p:txBody>
+          <a:bodyPr rtlCol="0" anchor="ctr"/>
+          <a:lstStyle/>
+          <a:p>
+            <a:pPr algn="ctr"/>
+            <a:r>
+              <a:rPr lang="en-US" sz="900" b="1">
                 <a:solidFill>
                   <a:srgbClr val="06B6D4"/>
                 </a:solidFill>
                 <a:latin typeface="Segoe UI" panose="020B0502040204020203" pitchFamily="34" charset="0"/>
               </a:rPr>
-              <a:t>TECH STACK:
+              <a:t>TECH STACK
 Streamlit, Plotly, Pandas, NumPy</a:t>
             </a:r>
-            <a:endParaRPr lang="en-IN" sz="1100" b="1">
+            <a:endParaRPr lang="en-IN" sz="900" b="1">
               <a:solidFill>
                 <a:srgbClr val="06B6D4"/>
               </a:solidFill>
@@ -6877,10 +8049,10 @@
       </p:sp>
       <p:sp>
         <p:nvSpPr>
-          <p:cNvPr id="9" name="Rectangle 8">
-            <a:extLst>
-              <a:ext uri="{FF2B5EF4-FFF2-40B4-BE49-F238E27FC236}">
-                <a16:creationId xmlns:a16="http://schemas.microsoft.com/office/drawing/2014/main" id="{8296103E-B6BA-83DA-D2CE-EAED73B80F85}"/>
+          <p:cNvPr id="11" name="Rectangle: Rounded Corners 10">
+            <a:extLst>
+              <a:ext uri="{FF2B5EF4-FFF2-40B4-BE49-F238E27FC236}">
+                <a16:creationId xmlns:a16="http://schemas.microsoft.com/office/drawing/2014/main" id="{6DD34F5C-5E8F-3EBD-E7C5-D5148A1EA9EB}"/>
               </a:ext>
             </a:extLst>
           </p:cNvPr>
@@ -6892,7 +8064,7 @@
             <a:off x="4445000" y="1143000"/>
             <a:ext cx="7366000" cy="4318000"/>
           </a:xfrm>
-          <a:prstGeom prst="rect">
+          <a:prstGeom prst="roundRect">
             <a:avLst/>
           </a:prstGeom>
           <a:solidFill>
@@ -6945,10 +8117,10 @@
       </p:sp>
       <p:pic>
         <p:nvPicPr>
-          <p:cNvPr id="11" name="Picture 10">
-            <a:extLst>
-              <a:ext uri="{FF2B5EF4-FFF2-40B4-BE49-F238E27FC236}">
-                <a16:creationId xmlns:a16="http://schemas.microsoft.com/office/drawing/2014/main" id="{626868D7-C010-5080-0322-F03CCFDDEC32}"/>
+          <p:cNvPr id="13" name="Picture 12">
+            <a:extLst>
+              <a:ext uri="{FF2B5EF4-FFF2-40B4-BE49-F238E27FC236}">
+                <a16:creationId xmlns:a16="http://schemas.microsoft.com/office/drawing/2014/main" id="{210CC083-20EA-A724-DE09-558EDDB0ADC4}"/>
               </a:ext>
             </a:extLst>
           </p:cNvPr>
@@ -6987,7 +8159,7 @@
     </p:spTree>
     <p:extLst>
       <p:ext uri="{BB962C8B-B14F-4D97-AF65-F5344CB8AC3E}">
-        <p14:creationId xmlns:p14="http://schemas.microsoft.com/office/powerpoint/2010/main" val="3617670471"/>
+        <p14:creationId xmlns:p14="http://schemas.microsoft.com/office/powerpoint/2010/main" val="3116820295"/>
       </p:ext>
     </p:extLst>
   </p:cSld>
@@ -7016,142 +8188,10 @@
       </p:grpSpPr>
       <p:sp>
         <p:nvSpPr>
-          <p:cNvPr id="2" name="TextBox 1">
-            <a:extLst>
-              <a:ext uri="{FF2B5EF4-FFF2-40B4-BE49-F238E27FC236}">
-                <a16:creationId xmlns:a16="http://schemas.microsoft.com/office/drawing/2014/main" id="{DB9FFF45-38F3-F8E8-F6B0-3AA91519162A}"/>
-              </a:ext>
-            </a:extLst>
-          </p:cNvPr>
-          <p:cNvSpPr txBox="1"/>
-          <p:nvPr/>
-        </p:nvSpPr>
-        <p:spPr>
-          <a:xfrm>
-            <a:off x="508000" y="508000"/>
-            <a:ext cx="3810000" cy="400110"/>
-          </a:xfrm>
-          <a:prstGeom prst="rect">
-            <a:avLst/>
-          </a:prstGeom>
-          <a:noFill/>
-        </p:spPr>
-        <p:txBody>
-          <a:bodyPr vert="horz" rtlCol="0">
-            <a:spAutoFit/>
-          </a:bodyPr>
-          <a:lstStyle/>
-          <a:p>
-            <a:r>
-              <a:rPr lang="en-US" sz="1000" b="1">
-                <a:solidFill>
-                  <a:srgbClr val="94A3B8"/>
-                </a:solidFill>
-                <a:latin typeface="Segoe UI" panose="020B0502040204020203" pitchFamily="34" charset="0"/>
-              </a:rPr>
-              <a:t>PROJECT 05 OF 11  â€¢  UNSUPERVISED LEARNING &amp; SEGMENTATION</a:t>
-            </a:r>
-            <a:endParaRPr lang="en-IN" sz="1000" b="1">
-              <a:solidFill>
-                <a:srgbClr val="94A3B8"/>
-              </a:solidFill>
-              <a:latin typeface="Segoe UI" panose="020B0502040204020203" pitchFamily="34" charset="0"/>
-            </a:endParaRPr>
-          </a:p>
-        </p:txBody>
-      </p:sp>
-      <p:sp>
-        <p:nvSpPr>
-          <p:cNvPr id="3" name="TextBox 2">
-            <a:extLst>
-              <a:ext uri="{FF2B5EF4-FFF2-40B4-BE49-F238E27FC236}">
-                <a16:creationId xmlns:a16="http://schemas.microsoft.com/office/drawing/2014/main" id="{474DA2E1-E09A-542D-8370-27E0A7F2AC07}"/>
-              </a:ext>
-            </a:extLst>
-          </p:cNvPr>
-          <p:cNvSpPr txBox="1"/>
-          <p:nvPr/>
-        </p:nvSpPr>
-        <p:spPr>
-          <a:xfrm>
-            <a:off x="508000" y="762000"/>
-            <a:ext cx="3810000" cy="430887"/>
-          </a:xfrm>
-          <a:prstGeom prst="rect">
-            <a:avLst/>
-          </a:prstGeom>
-          <a:noFill/>
-        </p:spPr>
-        <p:txBody>
-          <a:bodyPr vert="horz" wrap="square" rtlCol="0">
-            <a:spAutoFit/>
-          </a:bodyPr>
-          <a:lstStyle/>
-          <a:p>
-            <a:r>
-              <a:rPr lang="en-IN" sz="2200" b="1">
-                <a:solidFill>
-                  <a:srgbClr val="FFFFFF"/>
-                </a:solidFill>
-                <a:latin typeface="Segoe UI" panose="020B0502040204020203" pitchFamily="34" charset="0"/>
-              </a:rPr>
-              <a:t>K-Means Income Clustering</a:t>
-            </a:r>
-          </a:p>
-        </p:txBody>
-      </p:sp>
-      <p:sp>
-        <p:nvSpPr>
-          <p:cNvPr id="4" name="TextBox 3">
-            <a:extLst>
-              <a:ext uri="{FF2B5EF4-FFF2-40B4-BE49-F238E27FC236}">
-                <a16:creationId xmlns:a16="http://schemas.microsoft.com/office/drawing/2014/main" id="{959B07A9-8EF0-8710-4AC8-DF8C9877D588}"/>
-              </a:ext>
-            </a:extLst>
-          </p:cNvPr>
-          <p:cNvSpPr txBox="1"/>
-          <p:nvPr/>
-        </p:nvSpPr>
-        <p:spPr>
-          <a:xfrm>
-            <a:off x="508000" y="1714500"/>
-            <a:ext cx="3810000" cy="646331"/>
-          </a:xfrm>
-          <a:prstGeom prst="rect">
-            <a:avLst/>
-          </a:prstGeom>
-          <a:noFill/>
-        </p:spPr>
-        <p:txBody>
-          <a:bodyPr vert="horz" wrap="square" rtlCol="0">
-            <a:spAutoFit/>
-          </a:bodyPr>
-          <a:lstStyle/>
-          <a:p>
-            <a:r>
-              <a:rPr lang="en-US" sz="1200">
-                <a:solidFill>
-                  <a:srgbClr val="94A3B8"/>
-                </a:solidFill>
-                <a:latin typeface="Segoe UI" panose="020B0502040204020203" pitchFamily="34" charset="0"/>
-              </a:rPr>
-              <a:t>Unsupervised learning app grouping customers into distinct demographic segments based on age and income</a:t>
-            </a:r>
-            <a:endParaRPr lang="en-IN" sz="1200">
-              <a:solidFill>
-                <a:srgbClr val="94A3B8"/>
-              </a:solidFill>
-              <a:latin typeface="Segoe UI" panose="020B0502040204020203" pitchFamily="34" charset="0"/>
-            </a:endParaRPr>
-          </a:p>
-        </p:txBody>
-      </p:sp>
-      <p:sp>
-        <p:nvSpPr>
-          <p:cNvPr id="5" name="Rectangle 4">
-            <a:extLst>
-              <a:ext uri="{FF2B5EF4-FFF2-40B4-BE49-F238E27FC236}">
-                <a16:creationId xmlns:a16="http://schemas.microsoft.com/office/drawing/2014/main" id="{F0D80DC9-F2CB-43A8-120A-ED2556948F72}"/>
+          <p:cNvPr id="2" name="Rectangle 1">
+            <a:extLst>
+              <a:ext uri="{FF2B5EF4-FFF2-40B4-BE49-F238E27FC236}">
+                <a16:creationId xmlns:a16="http://schemas.microsoft.com/office/drawing/2014/main" id="{B9370052-5213-4EB7-B915-7F69A87923B6}"/>
               </a:ext>
             </a:extLst>
           </p:cNvPr>
@@ -7160,8 +8200,8 @@
         </p:nvSpPr>
         <p:spPr>
           <a:xfrm>
-            <a:off x="508000" y="2476500"/>
-            <a:ext cx="762000" cy="38100"/>
+            <a:off x="0" y="0"/>
+            <a:ext cx="76200" cy="6858000"/>
           </a:xfrm>
           <a:prstGeom prst="rect">
             <a:avLst/>
@@ -7216,10 +8256,72 @@
       </p:sp>
       <p:sp>
         <p:nvSpPr>
-          <p:cNvPr id="6" name="TextBox 5">
-            <a:extLst>
-              <a:ext uri="{FF2B5EF4-FFF2-40B4-BE49-F238E27FC236}">
-                <a16:creationId xmlns:a16="http://schemas.microsoft.com/office/drawing/2014/main" id="{3AE406CE-9256-8865-0A53-4449E875E057}"/>
+          <p:cNvPr id="3" name="Rectangle: Rounded Corners 2">
+            <a:extLst>
+              <a:ext uri="{FF2B5EF4-FFF2-40B4-BE49-F238E27FC236}">
+                <a16:creationId xmlns:a16="http://schemas.microsoft.com/office/drawing/2014/main" id="{870A8412-F16E-1EFB-C7B1-81F27FE1F3F3}"/>
+              </a:ext>
+            </a:extLst>
+          </p:cNvPr>
+          <p:cNvSpPr/>
+          <p:nvPr/>
+        </p:nvSpPr>
+        <p:spPr>
+          <a:xfrm>
+            <a:off x="508000" y="457200"/>
+            <a:ext cx="1651000" cy="254000"/>
+          </a:xfrm>
+          <a:prstGeom prst="roundRect">
+            <a:avLst/>
+          </a:prstGeom>
+          <a:solidFill>
+            <a:srgbClr val="1E293B"/>
+          </a:solidFill>
+          <a:ln w="12700">
+            <a:solidFill>
+              <a:srgbClr val="06B6D4"/>
+            </a:solidFill>
+          </a:ln>
+        </p:spPr>
+        <p:style>
+          <a:lnRef idx="2">
+            <a:schemeClr val="accent1">
+              <a:shade val="15000"/>
+            </a:schemeClr>
+          </a:lnRef>
+          <a:fillRef idx="1">
+            <a:schemeClr val="accent1"/>
+          </a:fillRef>
+          <a:effectRef idx="0">
+            <a:schemeClr val="accent1"/>
+          </a:effectRef>
+          <a:fontRef idx="minor">
+            <a:schemeClr val="lt1"/>
+          </a:fontRef>
+        </p:style>
+        <p:txBody>
+          <a:bodyPr rtlCol="0" anchor="ctr"/>
+          <a:lstStyle/>
+          <a:p>
+            <a:pPr algn="ctr"/>
+            <a:r>
+              <a:rPr lang="en-IN" sz="900" b="1">
+                <a:solidFill>
+                  <a:srgbClr val="FFFFFF"/>
+                </a:solidFill>
+                <a:latin typeface="Segoe UI" panose="020B0502040204020203" pitchFamily="34" charset="0"/>
+              </a:rPr>
+              <a:t>UNSUPERVISED ML</a:t>
+            </a:r>
+          </a:p>
+        </p:txBody>
+      </p:sp>
+      <p:sp>
+        <p:nvSpPr>
+          <p:cNvPr id="4" name="TextBox 3">
+            <a:extLst>
+              <a:ext uri="{FF2B5EF4-FFF2-40B4-BE49-F238E27FC236}">
+                <a16:creationId xmlns:a16="http://schemas.microsoft.com/office/drawing/2014/main" id="{BB0C8B07-2436-BAD9-09F5-2EDC2745AA4E}"/>
               </a:ext>
             </a:extLst>
           </p:cNvPr>
@@ -7228,8 +8330,8 @@
         </p:nvSpPr>
         <p:spPr>
           <a:xfrm>
-            <a:off x="508000" y="2603500"/>
-            <a:ext cx="3810000" cy="261610"/>
+            <a:off x="2349500" y="457200"/>
+            <a:ext cx="2159000" cy="230832"/>
           </a:xfrm>
           <a:prstGeom prst="rect">
             <a:avLst/>
@@ -7243,6 +8345,200 @@
           <a:lstStyle/>
           <a:p>
             <a:r>
+              <a:rPr lang="en-IN" sz="900" b="1">
+                <a:solidFill>
+                  <a:srgbClr val="94A3B8"/>
+                </a:solidFill>
+                <a:latin typeface="Segoe UI" panose="020B0502040204020203" pitchFamily="34" charset="0"/>
+              </a:rPr>
+              <a:t>PROJECT 05 OF 11</a:t>
+            </a:r>
+          </a:p>
+        </p:txBody>
+      </p:sp>
+      <p:sp>
+        <p:nvSpPr>
+          <p:cNvPr id="5" name="TextBox 4">
+            <a:extLst>
+              <a:ext uri="{FF2B5EF4-FFF2-40B4-BE49-F238E27FC236}">
+                <a16:creationId xmlns:a16="http://schemas.microsoft.com/office/drawing/2014/main" id="{8AA4BBE5-9924-946D-D276-860413C90A4C}"/>
+              </a:ext>
+            </a:extLst>
+          </p:cNvPr>
+          <p:cNvSpPr txBox="1"/>
+          <p:nvPr/>
+        </p:nvSpPr>
+        <p:spPr>
+          <a:xfrm>
+            <a:off x="508000" y="787400"/>
+            <a:ext cx="3810000" cy="430887"/>
+          </a:xfrm>
+          <a:prstGeom prst="rect">
+            <a:avLst/>
+          </a:prstGeom>
+          <a:noFill/>
+        </p:spPr>
+        <p:txBody>
+          <a:bodyPr vert="horz" wrap="square" rtlCol="0">
+            <a:spAutoFit/>
+          </a:bodyPr>
+          <a:lstStyle/>
+          <a:p>
+            <a:r>
+              <a:rPr lang="en-IN" sz="2200" b="1">
+                <a:solidFill>
+                  <a:srgbClr val="FFFFFF"/>
+                </a:solidFill>
+                <a:latin typeface="Segoe UI" panose="020B0502040204020203" pitchFamily="34" charset="0"/>
+              </a:rPr>
+              <a:t>K-Means Income Clustering</a:t>
+            </a:r>
+          </a:p>
+        </p:txBody>
+      </p:sp>
+      <p:sp>
+        <p:nvSpPr>
+          <p:cNvPr id="6" name="TextBox 5">
+            <a:extLst>
+              <a:ext uri="{FF2B5EF4-FFF2-40B4-BE49-F238E27FC236}">
+                <a16:creationId xmlns:a16="http://schemas.microsoft.com/office/drawing/2014/main" id="{89F4329F-5212-AB59-303A-A41BA42750B3}"/>
+              </a:ext>
+            </a:extLst>
+          </p:cNvPr>
+          <p:cNvSpPr txBox="1"/>
+          <p:nvPr/>
+        </p:nvSpPr>
+        <p:spPr>
+          <a:xfrm>
+            <a:off x="508000" y="1714500"/>
+            <a:ext cx="3810000" cy="646331"/>
+          </a:xfrm>
+          <a:prstGeom prst="rect">
+            <a:avLst/>
+          </a:prstGeom>
+          <a:noFill/>
+        </p:spPr>
+        <p:txBody>
+          <a:bodyPr vert="horz" wrap="square" rtlCol="0">
+            <a:spAutoFit/>
+          </a:bodyPr>
+          <a:lstStyle/>
+          <a:p>
+            <a:r>
+              <a:rPr lang="en-US" sz="1200">
+                <a:solidFill>
+                  <a:srgbClr val="94A3B8"/>
+                </a:solidFill>
+                <a:latin typeface="Segoe UI" panose="020B0502040204020203" pitchFamily="34" charset="0"/>
+              </a:rPr>
+              <a:t>Unsupervised learning app grouping customers into distinct demographic segments based on age and income</a:t>
+            </a:r>
+            <a:endParaRPr lang="en-IN" sz="1200">
+              <a:solidFill>
+                <a:srgbClr val="94A3B8"/>
+              </a:solidFill>
+              <a:latin typeface="Segoe UI" panose="020B0502040204020203" pitchFamily="34" charset="0"/>
+            </a:endParaRPr>
+          </a:p>
+        </p:txBody>
+      </p:sp>
+      <p:sp>
+        <p:nvSpPr>
+          <p:cNvPr id="7" name="Rectangle 6">
+            <a:extLst>
+              <a:ext uri="{FF2B5EF4-FFF2-40B4-BE49-F238E27FC236}">
+                <a16:creationId xmlns:a16="http://schemas.microsoft.com/office/drawing/2014/main" id="{DE6CDE7F-84E0-8673-18EB-7A74E40A37AA}"/>
+              </a:ext>
+            </a:extLst>
+          </p:cNvPr>
+          <p:cNvSpPr/>
+          <p:nvPr/>
+        </p:nvSpPr>
+        <p:spPr>
+          <a:xfrm>
+            <a:off x="508000" y="2476500"/>
+            <a:ext cx="762000" cy="25400"/>
+          </a:xfrm>
+          <a:prstGeom prst="rect">
+            <a:avLst/>
+          </a:prstGeom>
+          <a:solidFill>
+            <a:srgbClr val="06B6D4"/>
+          </a:solidFill>
+          <a:ln w="19050" cap="flat" cmpd="sng" algn="ctr">
+            <a:noFill/>
+            <a:prstDash val="solid"/>
+            <a:miter lim="800000"/>
+          </a:ln>
+          <a:effectLst/>
+          <a:extLst>
+            <a:ext uri="{91240B29-F687-4F45-9708-019B960494DF}">
+              <a14:hiddenLine xmlns:a14="http://schemas.microsoft.com/office/drawing/2010/main" w="19050" cap="flat" cmpd="sng" algn="ctr">
+                <a:solidFill>
+                  <a:schemeClr val="accent1">
+                    <a:shade val="15000"/>
+                  </a:schemeClr>
+                </a:solidFill>
+                <a:prstDash val="solid"/>
+                <a:miter lim="800000"/>
+              </a14:hiddenLine>
+            </a:ext>
+          </a:extLst>
+        </p:spPr>
+        <p:style>
+          <a:lnRef idx="2">
+            <a:schemeClr val="accent1">
+              <a:shade val="15000"/>
+            </a:schemeClr>
+          </a:lnRef>
+          <a:fillRef idx="1">
+            <a:schemeClr val="accent1"/>
+          </a:fillRef>
+          <a:effectRef idx="0">
+            <a:schemeClr val="accent1"/>
+          </a:effectRef>
+          <a:fontRef idx="minor">
+            <a:schemeClr val="lt1"/>
+          </a:fontRef>
+        </p:style>
+        <p:txBody>
+          <a:bodyPr rtlCol="0" anchor="ctr"/>
+          <a:lstStyle/>
+          <a:p>
+            <a:pPr algn="ctr"/>
+            <a:endParaRPr lang="en-IN"/>
+          </a:p>
+        </p:txBody>
+      </p:sp>
+      <p:sp>
+        <p:nvSpPr>
+          <p:cNvPr id="8" name="TextBox 7">
+            <a:extLst>
+              <a:ext uri="{FF2B5EF4-FFF2-40B4-BE49-F238E27FC236}">
+                <a16:creationId xmlns:a16="http://schemas.microsoft.com/office/drawing/2014/main" id="{503D24F5-3C7E-48F6-D74B-D28E17AC4C7A}"/>
+              </a:ext>
+            </a:extLst>
+          </p:cNvPr>
+          <p:cNvSpPr txBox="1"/>
+          <p:nvPr/>
+        </p:nvSpPr>
+        <p:spPr>
+          <a:xfrm>
+            <a:off x="508000" y="2603500"/>
+            <a:ext cx="3810000" cy="261610"/>
+          </a:xfrm>
+          <a:prstGeom prst="rect">
+            <a:avLst/>
+          </a:prstGeom>
+          <a:noFill/>
+        </p:spPr>
+        <p:txBody>
+          <a:bodyPr vert="horz" rtlCol="0">
+            <a:spAutoFit/>
+          </a:bodyPr>
+          <a:lstStyle/>
+          <a:p>
+            <a:r>
               <a:rPr lang="en-IN" sz="1100" b="1">
                 <a:solidFill>
                   <a:srgbClr val="FB923C"/>
@@ -7256,10 +8552,10 @@
       </p:sp>
       <p:sp>
         <p:nvSpPr>
-          <p:cNvPr id="7" name="TextBox 6">
-            <a:extLst>
-              <a:ext uri="{FF2B5EF4-FFF2-40B4-BE49-F238E27FC236}">
-                <a16:creationId xmlns:a16="http://schemas.microsoft.com/office/drawing/2014/main" id="{5F4C2700-EB2E-8AEE-A2C5-5249321BB15B}"/>
+          <p:cNvPr id="9" name="TextBox 8">
+            <a:extLst>
+              <a:ext uri="{FF2B5EF4-FFF2-40B4-BE49-F238E27FC236}">
+                <a16:creationId xmlns:a16="http://schemas.microsoft.com/office/drawing/2014/main" id="{9B0C754E-C100-9B64-FF06-90C7BA706E80}"/>
               </a:ext>
             </a:extLst>
           </p:cNvPr>
@@ -7283,58 +8579,86 @@
           <a:lstStyle/>
           <a:p>
             <a:r>
-              <a:rPr lang="en-IN" sz="1100">
+              <a:rPr lang="en-US" sz="1100">
                 <a:solidFill>
                   <a:srgbClr val="FFFFFF"/>
                 </a:solidFill>
                 <a:latin typeface="Segoe UI" panose="020B0502040204020203" pitchFamily="34" charset="0"/>
               </a:rPr>
-              <a:t>â€¢ Dynamic cluster count selector (K slider) for rapid iteration.
-â€¢ Elbow method chart built-in for finding optimal cluster count.
-â€¢ Interactive scatter plots visualizing cluster centroids.</a:t>
-            </a:r>
-          </a:p>
-        </p:txBody>
-      </p:sp>
-      <p:sp>
-        <p:nvSpPr>
-          <p:cNvPr id="8" name="TextBox 7">
-            <a:extLst>
-              <a:ext uri="{FF2B5EF4-FFF2-40B4-BE49-F238E27FC236}">
-                <a16:creationId xmlns:a16="http://schemas.microsoft.com/office/drawing/2014/main" id="{B4949DDF-4842-9D8F-44B6-86BA7237DF0C}"/>
-              </a:ext>
-            </a:extLst>
-          </p:cNvPr>
-          <p:cNvSpPr txBox="1"/>
-          <p:nvPr/>
-        </p:nvSpPr>
-        <p:spPr>
-          <a:xfrm>
-            <a:off x="508000" y="5461000"/>
-            <a:ext cx="3810000" cy="430887"/>
-          </a:xfrm>
-          <a:prstGeom prst="rect">
-            <a:avLst/>
-          </a:prstGeom>
-          <a:noFill/>
-        </p:spPr>
-        <p:txBody>
-          <a:bodyPr vert="horz" wrap="square" rtlCol="0">
-            <a:spAutoFit/>
-          </a:bodyPr>
-          <a:lstStyle/>
-          <a:p>
-            <a:r>
-              <a:rPr lang="en-US" sz="1100" b="1">
+              <a:t>- Dynamic cluster count selector (K slider) for rapid iteration.
+- Elbow method chart built-in for finding optimal cluster count.
+- Interactive scatter plots visualizing cluster centroids.</a:t>
+            </a:r>
+            <a:endParaRPr lang="en-IN" sz="1100">
+              <a:solidFill>
+                <a:srgbClr val="FFFFFF"/>
+              </a:solidFill>
+              <a:latin typeface="Segoe UI" panose="020B0502040204020203" pitchFamily="34" charset="0"/>
+            </a:endParaRPr>
+          </a:p>
+        </p:txBody>
+      </p:sp>
+      <p:sp>
+        <p:nvSpPr>
+          <p:cNvPr id="10" name="Rectangle: Rounded Corners 9">
+            <a:extLst>
+              <a:ext uri="{FF2B5EF4-FFF2-40B4-BE49-F238E27FC236}">
+                <a16:creationId xmlns:a16="http://schemas.microsoft.com/office/drawing/2014/main" id="{34513726-2673-08EF-1FB9-535DFBC380EE}"/>
+              </a:ext>
+            </a:extLst>
+          </p:cNvPr>
+          <p:cNvSpPr/>
+          <p:nvPr/>
+        </p:nvSpPr>
+        <p:spPr>
+          <a:xfrm>
+            <a:off x="508000" y="5397500"/>
+            <a:ext cx="3810000" cy="635000"/>
+          </a:xfrm>
+          <a:prstGeom prst="roundRect">
+            <a:avLst/>
+          </a:prstGeom>
+          <a:solidFill>
+            <a:srgbClr val="1E293B"/>
+          </a:solidFill>
+          <a:ln w="12700">
+            <a:solidFill>
+              <a:srgbClr val="06B6D4"/>
+            </a:solidFill>
+          </a:ln>
+        </p:spPr>
+        <p:style>
+          <a:lnRef idx="2">
+            <a:schemeClr val="accent1">
+              <a:shade val="15000"/>
+            </a:schemeClr>
+          </a:lnRef>
+          <a:fillRef idx="1">
+            <a:schemeClr val="accent1"/>
+          </a:fillRef>
+          <a:effectRef idx="0">
+            <a:schemeClr val="accent1"/>
+          </a:effectRef>
+          <a:fontRef idx="minor">
+            <a:schemeClr val="lt1"/>
+          </a:fontRef>
+        </p:style>
+        <p:txBody>
+          <a:bodyPr rtlCol="0" anchor="ctr"/>
+          <a:lstStyle/>
+          <a:p>
+            <a:pPr algn="ctr"/>
+            <a:r>
+              <a:rPr lang="en-US" sz="900" b="1">
                 <a:solidFill>
                   <a:srgbClr val="06B6D4"/>
                 </a:solidFill>
                 <a:latin typeface="Segoe UI" panose="020B0502040204020203" pitchFamily="34" charset="0"/>
               </a:rPr>
-              <a:t>TECH STACK:
+              <a:t>TECH STACK
 Streamlit, Scikit-learn, Plotly, Pandas</a:t>
             </a:r>
-            <a:endParaRPr lang="en-IN" sz="1100" b="1">
+            <a:endParaRPr lang="en-IN" sz="900" b="1">
               <a:solidFill>
                 <a:srgbClr val="06B6D4"/>
               </a:solidFill>
@@ -7345,10 +8669,10 @@
       </p:sp>
       <p:sp>
         <p:nvSpPr>
-          <p:cNvPr id="9" name="Rectangle 8">
-            <a:extLst>
-              <a:ext uri="{FF2B5EF4-FFF2-40B4-BE49-F238E27FC236}">
-                <a16:creationId xmlns:a16="http://schemas.microsoft.com/office/drawing/2014/main" id="{6FAE92CA-B89E-B762-05A3-D79CA173CF47}"/>
+          <p:cNvPr id="11" name="Rectangle: Rounded Corners 10">
+            <a:extLst>
+              <a:ext uri="{FF2B5EF4-FFF2-40B4-BE49-F238E27FC236}">
+                <a16:creationId xmlns:a16="http://schemas.microsoft.com/office/drawing/2014/main" id="{F103DAFC-0D67-A2C4-4706-B42BC97BA019}"/>
               </a:ext>
             </a:extLst>
           </p:cNvPr>
@@ -7360,7 +8684,7 @@
             <a:off x="4445000" y="1143000"/>
             <a:ext cx="7366000" cy="4318000"/>
           </a:xfrm>
-          <a:prstGeom prst="rect">
+          <a:prstGeom prst="roundRect">
             <a:avLst/>
           </a:prstGeom>
           <a:solidFill>
@@ -7413,10 +8737,10 @@
       </p:sp>
       <p:pic>
         <p:nvPicPr>
-          <p:cNvPr id="11" name="Picture 10">
-            <a:extLst>
-              <a:ext uri="{FF2B5EF4-FFF2-40B4-BE49-F238E27FC236}">
-                <a16:creationId xmlns:a16="http://schemas.microsoft.com/office/drawing/2014/main" id="{FFCB994B-AC8D-FE58-03CD-518CE3D143BF}"/>
+          <p:cNvPr id="13" name="Picture 12">
+            <a:extLst>
+              <a:ext uri="{FF2B5EF4-FFF2-40B4-BE49-F238E27FC236}">
+                <a16:creationId xmlns:a16="http://schemas.microsoft.com/office/drawing/2014/main" id="{B22EAA2D-85A9-40EE-4AA5-6431670A55FB}"/>
               </a:ext>
             </a:extLst>
           </p:cNvPr>
@@ -7455,7 +8779,7 @@
     </p:spTree>
     <p:extLst>
       <p:ext uri="{BB962C8B-B14F-4D97-AF65-F5344CB8AC3E}">
-        <p14:creationId xmlns:p14="http://schemas.microsoft.com/office/powerpoint/2010/main" val="2487497220"/>
+        <p14:creationId xmlns:p14="http://schemas.microsoft.com/office/powerpoint/2010/main" val="18598819"/>
       </p:ext>
     </p:extLst>
   </p:cSld>
@@ -7484,158 +8808,26 @@
       </p:grpSpPr>
       <p:sp>
         <p:nvSpPr>
-          <p:cNvPr id="2" name="TextBox 1">
-            <a:extLst>
-              <a:ext uri="{FF2B5EF4-FFF2-40B4-BE49-F238E27FC236}">
-                <a16:creationId xmlns:a16="http://schemas.microsoft.com/office/drawing/2014/main" id="{C7257E03-7CB3-C3EA-D96F-D0B155E0B938}"/>
-              </a:ext>
-            </a:extLst>
-          </p:cNvPr>
-          <p:cNvSpPr txBox="1"/>
-          <p:nvPr/>
-        </p:nvSpPr>
-        <p:spPr>
-          <a:xfrm>
-            <a:off x="508000" y="508000"/>
-            <a:ext cx="3810000" cy="400110"/>
+          <p:cNvPr id="2" name="Rectangle 1">
+            <a:extLst>
+              <a:ext uri="{FF2B5EF4-FFF2-40B4-BE49-F238E27FC236}">
+                <a16:creationId xmlns:a16="http://schemas.microsoft.com/office/drawing/2014/main" id="{AAB6FAB3-6641-7537-0466-2FFC76A05349}"/>
+              </a:ext>
+            </a:extLst>
+          </p:cNvPr>
+          <p:cNvSpPr/>
+          <p:nvPr/>
+        </p:nvSpPr>
+        <p:spPr>
+          <a:xfrm>
+            <a:off x="0" y="0"/>
+            <a:ext cx="76200" cy="6858000"/>
           </a:xfrm>
           <a:prstGeom prst="rect">
             <a:avLst/>
           </a:prstGeom>
-          <a:noFill/>
-        </p:spPr>
-        <p:txBody>
-          <a:bodyPr vert="horz" rtlCol="0">
-            <a:spAutoFit/>
-          </a:bodyPr>
-          <a:lstStyle/>
-          <a:p>
-            <a:r>
-              <a:rPr lang="en-US" sz="1000" b="1">
-                <a:solidFill>
-                  <a:srgbClr val="94A3B8"/>
-                </a:solidFill>
-                <a:latin typeface="Segoe UI" panose="020B0502040204020203" pitchFamily="34" charset="0"/>
-              </a:rPr>
-              <a:t>PROJECT 06 OF 11  â€¢  SUPERVISED ML &amp; REGRESSION VALUATION</a:t>
-            </a:r>
-            <a:endParaRPr lang="en-IN" sz="1000" b="1">
-              <a:solidFill>
-                <a:srgbClr val="94A3B8"/>
-              </a:solidFill>
-              <a:latin typeface="Segoe UI" panose="020B0502040204020203" pitchFamily="34" charset="0"/>
-            </a:endParaRPr>
-          </a:p>
-        </p:txBody>
-      </p:sp>
-      <p:sp>
-        <p:nvSpPr>
-          <p:cNvPr id="3" name="TextBox 2">
-            <a:extLst>
-              <a:ext uri="{FF2B5EF4-FFF2-40B4-BE49-F238E27FC236}">
-                <a16:creationId xmlns:a16="http://schemas.microsoft.com/office/drawing/2014/main" id="{DCE41083-3714-6990-DE1F-28440E0B454B}"/>
-              </a:ext>
-            </a:extLst>
-          </p:cNvPr>
-          <p:cNvSpPr txBox="1"/>
-          <p:nvPr/>
-        </p:nvSpPr>
-        <p:spPr>
-          <a:xfrm>
-            <a:off x="508000" y="762000"/>
-            <a:ext cx="3810000" cy="430887"/>
-          </a:xfrm>
-          <a:prstGeom prst="rect">
-            <a:avLst/>
-          </a:prstGeom>
-          <a:noFill/>
-        </p:spPr>
-        <p:txBody>
-          <a:bodyPr vert="horz" wrap="square" rtlCol="0">
-            <a:spAutoFit/>
-          </a:bodyPr>
-          <a:lstStyle/>
-          <a:p>
-            <a:r>
-              <a:rPr lang="en-IN" sz="2200" b="1">
-                <a:solidFill>
-                  <a:srgbClr val="FFFFFF"/>
-                </a:solidFill>
-                <a:latin typeface="Segoe UI" panose="020B0502040204020203" pitchFamily="34" charset="0"/>
-              </a:rPr>
-              <a:t>House Price Prediction</a:t>
-            </a:r>
-          </a:p>
-        </p:txBody>
-      </p:sp>
-      <p:sp>
-        <p:nvSpPr>
-          <p:cNvPr id="4" name="TextBox 3">
-            <a:extLst>
-              <a:ext uri="{FF2B5EF4-FFF2-40B4-BE49-F238E27FC236}">
-                <a16:creationId xmlns:a16="http://schemas.microsoft.com/office/drawing/2014/main" id="{7CC62DD2-4771-A691-2468-C3A23CB913B0}"/>
-              </a:ext>
-            </a:extLst>
-          </p:cNvPr>
-          <p:cNvSpPr txBox="1"/>
-          <p:nvPr/>
-        </p:nvSpPr>
-        <p:spPr>
-          <a:xfrm>
-            <a:off x="508000" y="1714500"/>
-            <a:ext cx="3810000" cy="461665"/>
-          </a:xfrm>
-          <a:prstGeom prst="rect">
-            <a:avLst/>
-          </a:prstGeom>
-          <a:noFill/>
-        </p:spPr>
-        <p:txBody>
-          <a:bodyPr vert="horz" wrap="square" rtlCol="0">
-            <a:spAutoFit/>
-          </a:bodyPr>
-          <a:lstStyle/>
-          <a:p>
-            <a:r>
-              <a:rPr lang="en-US" sz="1200">
-                <a:solidFill>
-                  <a:srgbClr val="94A3B8"/>
-                </a:solidFill>
-                <a:latin typeface="Segoe UI" panose="020B0502040204020203" pitchFamily="34" charset="0"/>
-              </a:rPr>
-              <a:t>Predictive modeling application estimating real estate valuations based on square footage</a:t>
-            </a:r>
-            <a:endParaRPr lang="en-IN" sz="1200">
-              <a:solidFill>
-                <a:srgbClr val="94A3B8"/>
-              </a:solidFill>
-              <a:latin typeface="Segoe UI" panose="020B0502040204020203" pitchFamily="34" charset="0"/>
-            </a:endParaRPr>
-          </a:p>
-        </p:txBody>
-      </p:sp>
-      <p:sp>
-        <p:nvSpPr>
-          <p:cNvPr id="5" name="Rectangle 4">
-            <a:extLst>
-              <a:ext uri="{FF2B5EF4-FFF2-40B4-BE49-F238E27FC236}">
-                <a16:creationId xmlns:a16="http://schemas.microsoft.com/office/drawing/2014/main" id="{DEFFB017-B7A5-A856-532D-D7FB21D50131}"/>
-              </a:ext>
-            </a:extLst>
-          </p:cNvPr>
-          <p:cNvSpPr/>
-          <p:nvPr/>
-        </p:nvSpPr>
-        <p:spPr>
-          <a:xfrm>
-            <a:off x="508000" y="2476500"/>
-            <a:ext cx="762000" cy="38100"/>
-          </a:xfrm>
-          <a:prstGeom prst="rect">
-            <a:avLst/>
-          </a:prstGeom>
           <a:solidFill>
-            <a:srgbClr val="06B6D4"/>
+            <a:srgbClr val="FB923C"/>
           </a:solidFill>
           <a:ln w="19050" cap="flat" cmpd="sng" algn="ctr">
             <a:noFill/>
@@ -7684,10 +8876,72 @@
       </p:sp>
       <p:sp>
         <p:nvSpPr>
-          <p:cNvPr id="6" name="TextBox 5">
-            <a:extLst>
-              <a:ext uri="{FF2B5EF4-FFF2-40B4-BE49-F238E27FC236}">
-                <a16:creationId xmlns:a16="http://schemas.microsoft.com/office/drawing/2014/main" id="{0C335DEB-E61F-4EE4-91DB-25A836D9D640}"/>
+          <p:cNvPr id="3" name="Rectangle: Rounded Corners 2">
+            <a:extLst>
+              <a:ext uri="{FF2B5EF4-FFF2-40B4-BE49-F238E27FC236}">
+                <a16:creationId xmlns:a16="http://schemas.microsoft.com/office/drawing/2014/main" id="{79E8EFA3-1D70-959E-9575-29C532A47E3B}"/>
+              </a:ext>
+            </a:extLst>
+          </p:cNvPr>
+          <p:cNvSpPr/>
+          <p:nvPr/>
+        </p:nvSpPr>
+        <p:spPr>
+          <a:xfrm>
+            <a:off x="508000" y="457200"/>
+            <a:ext cx="1651000" cy="254000"/>
+          </a:xfrm>
+          <a:prstGeom prst="roundRect">
+            <a:avLst/>
+          </a:prstGeom>
+          <a:solidFill>
+            <a:srgbClr val="1E293B"/>
+          </a:solidFill>
+          <a:ln w="12700">
+            <a:solidFill>
+              <a:srgbClr val="FB923C"/>
+            </a:solidFill>
+          </a:ln>
+        </p:spPr>
+        <p:style>
+          <a:lnRef idx="2">
+            <a:schemeClr val="accent1">
+              <a:shade val="15000"/>
+            </a:schemeClr>
+          </a:lnRef>
+          <a:fillRef idx="1">
+            <a:schemeClr val="accent1"/>
+          </a:fillRef>
+          <a:effectRef idx="0">
+            <a:schemeClr val="accent1"/>
+          </a:effectRef>
+          <a:fontRef idx="minor">
+            <a:schemeClr val="lt1"/>
+          </a:fontRef>
+        </p:style>
+        <p:txBody>
+          <a:bodyPr rtlCol="0" anchor="ctr"/>
+          <a:lstStyle/>
+          <a:p>
+            <a:pPr algn="ctr"/>
+            <a:r>
+              <a:rPr lang="en-IN" sz="900" b="1">
+                <a:solidFill>
+                  <a:srgbClr val="FFFFFF"/>
+                </a:solidFill>
+                <a:latin typeface="Segoe UI" panose="020B0502040204020203" pitchFamily="34" charset="0"/>
+              </a:rPr>
+              <a:t>SUPERVISED ML</a:t>
+            </a:r>
+          </a:p>
+        </p:txBody>
+      </p:sp>
+      <p:sp>
+        <p:nvSpPr>
+          <p:cNvPr id="4" name="TextBox 3">
+            <a:extLst>
+              <a:ext uri="{FF2B5EF4-FFF2-40B4-BE49-F238E27FC236}">
+                <a16:creationId xmlns:a16="http://schemas.microsoft.com/office/drawing/2014/main" id="{7AEB02A1-89DE-23D8-619E-0EFEC77982CD}"/>
               </a:ext>
             </a:extLst>
           </p:cNvPr>
@@ -7696,8 +8950,8 @@
         </p:nvSpPr>
         <p:spPr>
           <a:xfrm>
-            <a:off x="508000" y="2603500"/>
-            <a:ext cx="3810000" cy="261610"/>
+            <a:off x="2349500" y="457200"/>
+            <a:ext cx="2159000" cy="230832"/>
           </a:xfrm>
           <a:prstGeom prst="rect">
             <a:avLst/>
@@ -7711,6 +8965,200 @@
           <a:lstStyle/>
           <a:p>
             <a:r>
+              <a:rPr lang="en-IN" sz="900" b="1">
+                <a:solidFill>
+                  <a:srgbClr val="94A3B8"/>
+                </a:solidFill>
+                <a:latin typeface="Segoe UI" panose="020B0502040204020203" pitchFamily="34" charset="0"/>
+              </a:rPr>
+              <a:t>PROJECT 06 OF 11</a:t>
+            </a:r>
+          </a:p>
+        </p:txBody>
+      </p:sp>
+      <p:sp>
+        <p:nvSpPr>
+          <p:cNvPr id="5" name="TextBox 4">
+            <a:extLst>
+              <a:ext uri="{FF2B5EF4-FFF2-40B4-BE49-F238E27FC236}">
+                <a16:creationId xmlns:a16="http://schemas.microsoft.com/office/drawing/2014/main" id="{F888BA8A-C66A-7ED8-D3EA-269A69B5F2EA}"/>
+              </a:ext>
+            </a:extLst>
+          </p:cNvPr>
+          <p:cNvSpPr txBox="1"/>
+          <p:nvPr/>
+        </p:nvSpPr>
+        <p:spPr>
+          <a:xfrm>
+            <a:off x="508000" y="787400"/>
+            <a:ext cx="3810000" cy="430887"/>
+          </a:xfrm>
+          <a:prstGeom prst="rect">
+            <a:avLst/>
+          </a:prstGeom>
+          <a:noFill/>
+        </p:spPr>
+        <p:txBody>
+          <a:bodyPr vert="horz" wrap="square" rtlCol="0">
+            <a:spAutoFit/>
+          </a:bodyPr>
+          <a:lstStyle/>
+          <a:p>
+            <a:r>
+              <a:rPr lang="en-IN" sz="2200" b="1">
+                <a:solidFill>
+                  <a:srgbClr val="FFFFFF"/>
+                </a:solidFill>
+                <a:latin typeface="Segoe UI" panose="020B0502040204020203" pitchFamily="34" charset="0"/>
+              </a:rPr>
+              <a:t>House Price Prediction</a:t>
+            </a:r>
+          </a:p>
+        </p:txBody>
+      </p:sp>
+      <p:sp>
+        <p:nvSpPr>
+          <p:cNvPr id="6" name="TextBox 5">
+            <a:extLst>
+              <a:ext uri="{FF2B5EF4-FFF2-40B4-BE49-F238E27FC236}">
+                <a16:creationId xmlns:a16="http://schemas.microsoft.com/office/drawing/2014/main" id="{480F349A-4C94-F2A1-F2DB-2D05B7A983F9}"/>
+              </a:ext>
+            </a:extLst>
+          </p:cNvPr>
+          <p:cNvSpPr txBox="1"/>
+          <p:nvPr/>
+        </p:nvSpPr>
+        <p:spPr>
+          <a:xfrm>
+            <a:off x="508000" y="1714500"/>
+            <a:ext cx="3810000" cy="461665"/>
+          </a:xfrm>
+          <a:prstGeom prst="rect">
+            <a:avLst/>
+          </a:prstGeom>
+          <a:noFill/>
+        </p:spPr>
+        <p:txBody>
+          <a:bodyPr vert="horz" wrap="square" rtlCol="0">
+            <a:spAutoFit/>
+          </a:bodyPr>
+          <a:lstStyle/>
+          <a:p>
+            <a:r>
+              <a:rPr lang="en-US" sz="1200">
+                <a:solidFill>
+                  <a:srgbClr val="94A3B8"/>
+                </a:solidFill>
+                <a:latin typeface="Segoe UI" panose="020B0502040204020203" pitchFamily="34" charset="0"/>
+              </a:rPr>
+              <a:t>Predictive modeling application estimating real estate valuations based on square footage</a:t>
+            </a:r>
+            <a:endParaRPr lang="en-IN" sz="1200">
+              <a:solidFill>
+                <a:srgbClr val="94A3B8"/>
+              </a:solidFill>
+              <a:latin typeface="Segoe UI" panose="020B0502040204020203" pitchFamily="34" charset="0"/>
+            </a:endParaRPr>
+          </a:p>
+        </p:txBody>
+      </p:sp>
+      <p:sp>
+        <p:nvSpPr>
+          <p:cNvPr id="7" name="Rectangle 6">
+            <a:extLst>
+              <a:ext uri="{FF2B5EF4-FFF2-40B4-BE49-F238E27FC236}">
+                <a16:creationId xmlns:a16="http://schemas.microsoft.com/office/drawing/2014/main" id="{993F4BEC-A9D0-24FD-44A4-1538588EF9A8}"/>
+              </a:ext>
+            </a:extLst>
+          </p:cNvPr>
+          <p:cNvSpPr/>
+          <p:nvPr/>
+        </p:nvSpPr>
+        <p:spPr>
+          <a:xfrm>
+            <a:off x="508000" y="2476500"/>
+            <a:ext cx="762000" cy="25400"/>
+          </a:xfrm>
+          <a:prstGeom prst="rect">
+            <a:avLst/>
+          </a:prstGeom>
+          <a:solidFill>
+            <a:srgbClr val="FB923C"/>
+          </a:solidFill>
+          <a:ln w="19050" cap="flat" cmpd="sng" algn="ctr">
+            <a:noFill/>
+            <a:prstDash val="solid"/>
+            <a:miter lim="800000"/>
+          </a:ln>
+          <a:effectLst/>
+          <a:extLst>
+            <a:ext uri="{91240B29-F687-4F45-9708-019B960494DF}">
+              <a14:hiddenLine xmlns:a14="http://schemas.microsoft.com/office/drawing/2010/main" w="19050" cap="flat" cmpd="sng" algn="ctr">
+                <a:solidFill>
+                  <a:schemeClr val="accent1">
+                    <a:shade val="15000"/>
+                  </a:schemeClr>
+                </a:solidFill>
+                <a:prstDash val="solid"/>
+                <a:miter lim="800000"/>
+              </a14:hiddenLine>
+            </a:ext>
+          </a:extLst>
+        </p:spPr>
+        <p:style>
+          <a:lnRef idx="2">
+            <a:schemeClr val="accent1">
+              <a:shade val="15000"/>
+            </a:schemeClr>
+          </a:lnRef>
+          <a:fillRef idx="1">
+            <a:schemeClr val="accent1"/>
+          </a:fillRef>
+          <a:effectRef idx="0">
+            <a:schemeClr val="accent1"/>
+          </a:effectRef>
+          <a:fontRef idx="minor">
+            <a:schemeClr val="lt1"/>
+          </a:fontRef>
+        </p:style>
+        <p:txBody>
+          <a:bodyPr rtlCol="0" anchor="ctr"/>
+          <a:lstStyle/>
+          <a:p>
+            <a:pPr algn="ctr"/>
+            <a:endParaRPr lang="en-IN"/>
+          </a:p>
+        </p:txBody>
+      </p:sp>
+      <p:sp>
+        <p:nvSpPr>
+          <p:cNvPr id="8" name="TextBox 7">
+            <a:extLst>
+              <a:ext uri="{FF2B5EF4-FFF2-40B4-BE49-F238E27FC236}">
+                <a16:creationId xmlns:a16="http://schemas.microsoft.com/office/drawing/2014/main" id="{0E3FDCF5-0FDE-A615-0778-50089522DFF8}"/>
+              </a:ext>
+            </a:extLst>
+          </p:cNvPr>
+          <p:cNvSpPr txBox="1"/>
+          <p:nvPr/>
+        </p:nvSpPr>
+        <p:spPr>
+          <a:xfrm>
+            <a:off x="508000" y="2603500"/>
+            <a:ext cx="3810000" cy="261610"/>
+          </a:xfrm>
+          <a:prstGeom prst="rect">
+            <a:avLst/>
+          </a:prstGeom>
+          <a:noFill/>
+        </p:spPr>
+        <p:txBody>
+          <a:bodyPr vert="horz" rtlCol="0">
+            <a:spAutoFit/>
+          </a:bodyPr>
+          <a:lstStyle/>
+          <a:p>
+            <a:r>
               <a:rPr lang="en-IN" sz="1100" b="1">
                 <a:solidFill>
                   <a:srgbClr val="FB923C"/>
@@ -7724,10 +9172,10 @@
       </p:sp>
       <p:sp>
         <p:nvSpPr>
-          <p:cNvPr id="7" name="TextBox 6">
-            <a:extLst>
-              <a:ext uri="{FF2B5EF4-FFF2-40B4-BE49-F238E27FC236}">
-                <a16:creationId xmlns:a16="http://schemas.microsoft.com/office/drawing/2014/main" id="{DCC9FF34-E906-674E-6547-D19395C4EB5F}"/>
+          <p:cNvPr id="9" name="TextBox 8">
+            <a:extLst>
+              <a:ext uri="{FF2B5EF4-FFF2-40B4-BE49-F238E27FC236}">
+                <a16:creationId xmlns:a16="http://schemas.microsoft.com/office/drawing/2014/main" id="{4FF17582-E8E7-8B6B-14CC-D2D4256378DD}"/>
               </a:ext>
             </a:extLst>
           </p:cNvPr>
@@ -7737,7 +9185,7 @@
         <p:spPr>
           <a:xfrm>
             <a:off x="508000" y="2921000"/>
-            <a:ext cx="3810000" cy="1446550"/>
+            <a:ext cx="3810000" cy="1277273"/>
           </a:xfrm>
           <a:prstGeom prst="rect">
             <a:avLst/>
@@ -7751,58 +9199,86 @@
           <a:lstStyle/>
           <a:p>
             <a:r>
-              <a:rPr lang="en-IN" sz="1100">
+              <a:rPr lang="en-US" sz="1100">
                 <a:solidFill>
                   <a:srgbClr val="FFFFFF"/>
                 </a:solidFill>
                 <a:latin typeface="Segoe UI" panose="020B0502040204020203" pitchFamily="34" charset="0"/>
               </a:rPr>
-              <a:t>â€¢ Interactive area input box with instantaneous prediction response.
-â€¢ Real-time linear regression line fitting to visualize trends.
-â€¢ Displays slope and intercept parameters for mathematical transparency.</a:t>
-            </a:r>
-          </a:p>
-        </p:txBody>
-      </p:sp>
-      <p:sp>
-        <p:nvSpPr>
-          <p:cNvPr id="8" name="TextBox 7">
-            <a:extLst>
-              <a:ext uri="{FF2B5EF4-FFF2-40B4-BE49-F238E27FC236}">
-                <a16:creationId xmlns:a16="http://schemas.microsoft.com/office/drawing/2014/main" id="{950D55A2-D3BA-CB50-F184-13D2B3FA999B}"/>
-              </a:ext>
-            </a:extLst>
-          </p:cNvPr>
-          <p:cNvSpPr txBox="1"/>
-          <p:nvPr/>
-        </p:nvSpPr>
-        <p:spPr>
-          <a:xfrm>
-            <a:off x="508000" y="5461000"/>
-            <a:ext cx="3810000" cy="430887"/>
-          </a:xfrm>
-          <a:prstGeom prst="rect">
-            <a:avLst/>
-          </a:prstGeom>
-          <a:noFill/>
-        </p:spPr>
-        <p:txBody>
-          <a:bodyPr vert="horz" wrap="square" rtlCol="0">
-            <a:spAutoFit/>
-          </a:bodyPr>
-          <a:lstStyle/>
-          <a:p>
-            <a:r>
-              <a:rPr lang="en-US" sz="1100" b="1">
+              <a:t>- Interactive area input box with instantaneous prediction response.
+- Real-time linear regression line fitting to visualize trends.
+- Displays slope and intercept parameters for mathematical transparency.</a:t>
+            </a:r>
+            <a:endParaRPr lang="en-IN" sz="1100">
+              <a:solidFill>
+                <a:srgbClr val="FFFFFF"/>
+              </a:solidFill>
+              <a:latin typeface="Segoe UI" panose="020B0502040204020203" pitchFamily="34" charset="0"/>
+            </a:endParaRPr>
+          </a:p>
+        </p:txBody>
+      </p:sp>
+      <p:sp>
+        <p:nvSpPr>
+          <p:cNvPr id="10" name="Rectangle: Rounded Corners 9">
+            <a:extLst>
+              <a:ext uri="{FF2B5EF4-FFF2-40B4-BE49-F238E27FC236}">
+                <a16:creationId xmlns:a16="http://schemas.microsoft.com/office/drawing/2014/main" id="{1C369F7F-22D5-B45D-DDAB-B702DB500B09}"/>
+              </a:ext>
+            </a:extLst>
+          </p:cNvPr>
+          <p:cNvSpPr/>
+          <p:nvPr/>
+        </p:nvSpPr>
+        <p:spPr>
+          <a:xfrm>
+            <a:off x="508000" y="5397500"/>
+            <a:ext cx="3810000" cy="635000"/>
+          </a:xfrm>
+          <a:prstGeom prst="roundRect">
+            <a:avLst/>
+          </a:prstGeom>
+          <a:solidFill>
+            <a:srgbClr val="1E293B"/>
+          </a:solidFill>
+          <a:ln w="12700">
+            <a:solidFill>
+              <a:srgbClr val="06B6D4"/>
+            </a:solidFill>
+          </a:ln>
+        </p:spPr>
+        <p:style>
+          <a:lnRef idx="2">
+            <a:schemeClr val="accent1">
+              <a:shade val="15000"/>
+            </a:schemeClr>
+          </a:lnRef>
+          <a:fillRef idx="1">
+            <a:schemeClr val="accent1"/>
+          </a:fillRef>
+          <a:effectRef idx="0">
+            <a:schemeClr val="accent1"/>
+          </a:effectRef>
+          <a:fontRef idx="minor">
+            <a:schemeClr val="lt1"/>
+          </a:fontRef>
+        </p:style>
+        <p:txBody>
+          <a:bodyPr rtlCol="0" anchor="ctr"/>
+          <a:lstStyle/>
+          <a:p>
+            <a:pPr algn="ctr"/>
+            <a:r>
+              <a:rPr lang="en-US" sz="900" b="1">
                 <a:solidFill>
                   <a:srgbClr val="06B6D4"/>
                 </a:solidFill>
                 <a:latin typeface="Segoe UI" panose="020B0502040204020203" pitchFamily="34" charset="0"/>
               </a:rPr>
-              <a:t>TECH STACK:
+              <a:t>TECH STACK
 Streamlit, Scikit-learn, Plotly, Pandas</a:t>
             </a:r>
-            <a:endParaRPr lang="en-IN" sz="1100" b="1">
+            <a:endParaRPr lang="en-IN" sz="900" b="1">
               <a:solidFill>
                 <a:srgbClr val="06B6D4"/>
               </a:solidFill>
@@ -7813,10 +9289,10 @@
       </p:sp>
       <p:sp>
         <p:nvSpPr>
-          <p:cNvPr id="9" name="Rectangle 8">
-            <a:extLst>
-              <a:ext uri="{FF2B5EF4-FFF2-40B4-BE49-F238E27FC236}">
-                <a16:creationId xmlns:a16="http://schemas.microsoft.com/office/drawing/2014/main" id="{5D1AA313-3785-0E25-D14F-7DC601183EF1}"/>
+          <p:cNvPr id="11" name="Rectangle: Rounded Corners 10">
+            <a:extLst>
+              <a:ext uri="{FF2B5EF4-FFF2-40B4-BE49-F238E27FC236}">
+                <a16:creationId xmlns:a16="http://schemas.microsoft.com/office/drawing/2014/main" id="{8B139261-3968-1B22-BAA7-75F6244059F7}"/>
               </a:ext>
             </a:extLst>
           </p:cNvPr>
@@ -7828,7 +9304,7 @@
             <a:off x="4445000" y="1143000"/>
             <a:ext cx="7366000" cy="4318000"/>
           </a:xfrm>
-          <a:prstGeom prst="rect">
+          <a:prstGeom prst="roundRect">
             <a:avLst/>
           </a:prstGeom>
           <a:solidFill>
@@ -7881,10 +9357,10 @@
       </p:sp>
       <p:pic>
         <p:nvPicPr>
-          <p:cNvPr id="11" name="Picture 10">
-            <a:extLst>
-              <a:ext uri="{FF2B5EF4-FFF2-40B4-BE49-F238E27FC236}">
-                <a16:creationId xmlns:a16="http://schemas.microsoft.com/office/drawing/2014/main" id="{676B387F-AA63-961C-A052-F0DB391528B3}"/>
+          <p:cNvPr id="13" name="Picture 12">
+            <a:extLst>
+              <a:ext uri="{FF2B5EF4-FFF2-40B4-BE49-F238E27FC236}">
+                <a16:creationId xmlns:a16="http://schemas.microsoft.com/office/drawing/2014/main" id="{FC932DA1-0FE6-7CBA-D965-F9A09ED32D87}"/>
               </a:ext>
             </a:extLst>
           </p:cNvPr>
@@ -7923,7 +9399,7 @@
     </p:spTree>
     <p:extLst>
       <p:ext uri="{BB962C8B-B14F-4D97-AF65-F5344CB8AC3E}">
-        <p14:creationId xmlns:p14="http://schemas.microsoft.com/office/powerpoint/2010/main" val="4005079793"/>
+        <p14:creationId xmlns:p14="http://schemas.microsoft.com/office/powerpoint/2010/main" val="1150483510"/>
       </p:ext>
     </p:extLst>
   </p:cSld>
@@ -7952,142 +9428,10 @@
       </p:grpSpPr>
       <p:sp>
         <p:nvSpPr>
-          <p:cNvPr id="2" name="TextBox 1">
-            <a:extLst>
-              <a:ext uri="{FF2B5EF4-FFF2-40B4-BE49-F238E27FC236}">
-                <a16:creationId xmlns:a16="http://schemas.microsoft.com/office/drawing/2014/main" id="{626F1DF1-F9CF-5179-D4B9-69946A3BBD9F}"/>
-              </a:ext>
-            </a:extLst>
-          </p:cNvPr>
-          <p:cNvSpPr txBox="1"/>
-          <p:nvPr/>
-        </p:nvSpPr>
-        <p:spPr>
-          <a:xfrm>
-            <a:off x="508000" y="508000"/>
-            <a:ext cx="3810000" cy="400110"/>
-          </a:xfrm>
-          <a:prstGeom prst="rect">
-            <a:avLst/>
-          </a:prstGeom>
-          <a:noFill/>
-        </p:spPr>
-        <p:txBody>
-          <a:bodyPr vert="horz" rtlCol="0">
-            <a:spAutoFit/>
-          </a:bodyPr>
-          <a:lstStyle/>
-          <a:p>
-            <a:r>
-              <a:rPr lang="en-US" sz="1000" b="1">
-                <a:solidFill>
-                  <a:srgbClr val="94A3B8"/>
-                </a:solidFill>
-                <a:latin typeface="Segoe UI" panose="020B0502040204020203" pitchFamily="34" charset="0"/>
-              </a:rPr>
-              <a:t>PROJECT 07 OF 11  â€¢  SUPERVISED ML &amp; BINARY CLASSIFICATION</a:t>
-            </a:r>
-            <a:endParaRPr lang="en-IN" sz="1000" b="1">
-              <a:solidFill>
-                <a:srgbClr val="94A3B8"/>
-              </a:solidFill>
-              <a:latin typeface="Segoe UI" panose="020B0502040204020203" pitchFamily="34" charset="0"/>
-            </a:endParaRPr>
-          </a:p>
-        </p:txBody>
-      </p:sp>
-      <p:sp>
-        <p:nvSpPr>
-          <p:cNvPr id="3" name="TextBox 2">
-            <a:extLst>
-              <a:ext uri="{FF2B5EF4-FFF2-40B4-BE49-F238E27FC236}">
-                <a16:creationId xmlns:a16="http://schemas.microsoft.com/office/drawing/2014/main" id="{77D34E09-8208-FC5D-E99E-706C03131754}"/>
-              </a:ext>
-            </a:extLst>
-          </p:cNvPr>
-          <p:cNvSpPr txBox="1"/>
-          <p:nvPr/>
-        </p:nvSpPr>
-        <p:spPr>
-          <a:xfrm>
-            <a:off x="508000" y="762000"/>
-            <a:ext cx="3810000" cy="769441"/>
-          </a:xfrm>
-          <a:prstGeom prst="rect">
-            <a:avLst/>
-          </a:prstGeom>
-          <a:noFill/>
-        </p:spPr>
-        <p:txBody>
-          <a:bodyPr vert="horz" wrap="square" rtlCol="0">
-            <a:spAutoFit/>
-          </a:bodyPr>
-          <a:lstStyle/>
-          <a:p>
-            <a:r>
-              <a:rPr lang="en-IN" sz="2200" b="1">
-                <a:solidFill>
-                  <a:srgbClr val="FFFFFF"/>
-                </a:solidFill>
-                <a:latin typeface="Segoe UI" panose="020B0502040204020203" pitchFamily="34" charset="0"/>
-              </a:rPr>
-              <a:t>Insurance Logistic Regression</a:t>
-            </a:r>
-          </a:p>
-        </p:txBody>
-      </p:sp>
-      <p:sp>
-        <p:nvSpPr>
-          <p:cNvPr id="4" name="TextBox 3">
-            <a:extLst>
-              <a:ext uri="{FF2B5EF4-FFF2-40B4-BE49-F238E27FC236}">
-                <a16:creationId xmlns:a16="http://schemas.microsoft.com/office/drawing/2014/main" id="{0B08C9B2-C0FD-0596-55A0-8363BAD523D1}"/>
-              </a:ext>
-            </a:extLst>
-          </p:cNvPr>
-          <p:cNvSpPr txBox="1"/>
-          <p:nvPr/>
-        </p:nvSpPr>
-        <p:spPr>
-          <a:xfrm>
-            <a:off x="508000" y="1714500"/>
-            <a:ext cx="3810000" cy="461665"/>
-          </a:xfrm>
-          <a:prstGeom prst="rect">
-            <a:avLst/>
-          </a:prstGeom>
-          <a:noFill/>
-        </p:spPr>
-        <p:txBody>
-          <a:bodyPr vert="horz" wrap="square" rtlCol="0">
-            <a:spAutoFit/>
-          </a:bodyPr>
-          <a:lstStyle/>
-          <a:p>
-            <a:r>
-              <a:rPr lang="en-US" sz="1200">
-                <a:solidFill>
-                  <a:srgbClr val="94A3B8"/>
-                </a:solidFill>
-                <a:latin typeface="Segoe UI" panose="020B0502040204020203" pitchFamily="34" charset="0"/>
-              </a:rPr>
-              <a:t>Classification model predicting whether a customer will purchase insurance based on age</a:t>
-            </a:r>
-            <a:endParaRPr lang="en-IN" sz="1200">
-              <a:solidFill>
-                <a:srgbClr val="94A3B8"/>
-              </a:solidFill>
-              <a:latin typeface="Segoe UI" panose="020B0502040204020203" pitchFamily="34" charset="0"/>
-            </a:endParaRPr>
-          </a:p>
-        </p:txBody>
-      </p:sp>
-      <p:sp>
-        <p:nvSpPr>
-          <p:cNvPr id="5" name="Rectangle 4">
-            <a:extLst>
-              <a:ext uri="{FF2B5EF4-FFF2-40B4-BE49-F238E27FC236}">
-                <a16:creationId xmlns:a16="http://schemas.microsoft.com/office/drawing/2014/main" id="{B55B7501-152C-A330-18DD-138B36C49550}"/>
+          <p:cNvPr id="2" name="Rectangle 1">
+            <a:extLst>
+              <a:ext uri="{FF2B5EF4-FFF2-40B4-BE49-F238E27FC236}">
+                <a16:creationId xmlns:a16="http://schemas.microsoft.com/office/drawing/2014/main" id="{4E530233-3975-F5A7-EC08-D487EF12FE86}"/>
               </a:ext>
             </a:extLst>
           </p:cNvPr>
@@ -8096,8 +9440,8 @@
         </p:nvSpPr>
         <p:spPr>
           <a:xfrm>
-            <a:off x="508000" y="2476500"/>
-            <a:ext cx="762000" cy="38100"/>
+            <a:off x="0" y="0"/>
+            <a:ext cx="76200" cy="6858000"/>
           </a:xfrm>
           <a:prstGeom prst="rect">
             <a:avLst/>
@@ -8152,10 +9496,72 @@
       </p:sp>
       <p:sp>
         <p:nvSpPr>
-          <p:cNvPr id="6" name="TextBox 5">
-            <a:extLst>
-              <a:ext uri="{FF2B5EF4-FFF2-40B4-BE49-F238E27FC236}">
-                <a16:creationId xmlns:a16="http://schemas.microsoft.com/office/drawing/2014/main" id="{51D85850-3F62-4921-C240-799A8A0B99F2}"/>
+          <p:cNvPr id="3" name="Rectangle: Rounded Corners 2">
+            <a:extLst>
+              <a:ext uri="{FF2B5EF4-FFF2-40B4-BE49-F238E27FC236}">
+                <a16:creationId xmlns:a16="http://schemas.microsoft.com/office/drawing/2014/main" id="{AA98AB93-BDE0-C05C-2350-E2EC873E3A90}"/>
+              </a:ext>
+            </a:extLst>
+          </p:cNvPr>
+          <p:cNvSpPr/>
+          <p:nvPr/>
+        </p:nvSpPr>
+        <p:spPr>
+          <a:xfrm>
+            <a:off x="508000" y="457200"/>
+            <a:ext cx="1651000" cy="254000"/>
+          </a:xfrm>
+          <a:prstGeom prst="roundRect">
+            <a:avLst/>
+          </a:prstGeom>
+          <a:solidFill>
+            <a:srgbClr val="1E293B"/>
+          </a:solidFill>
+          <a:ln w="12700">
+            <a:solidFill>
+              <a:srgbClr val="06B6D4"/>
+            </a:solidFill>
+          </a:ln>
+        </p:spPr>
+        <p:style>
+          <a:lnRef idx="2">
+            <a:schemeClr val="accent1">
+              <a:shade val="15000"/>
+            </a:schemeClr>
+          </a:lnRef>
+          <a:fillRef idx="1">
+            <a:schemeClr val="accent1"/>
+          </a:fillRef>
+          <a:effectRef idx="0">
+            <a:schemeClr val="accent1"/>
+          </a:effectRef>
+          <a:fontRef idx="minor">
+            <a:schemeClr val="lt1"/>
+          </a:fontRef>
+        </p:style>
+        <p:txBody>
+          <a:bodyPr rtlCol="0" anchor="ctr"/>
+          <a:lstStyle/>
+          <a:p>
+            <a:pPr algn="ctr"/>
+            <a:r>
+              <a:rPr lang="en-IN" sz="900" b="1">
+                <a:solidFill>
+                  <a:srgbClr val="FFFFFF"/>
+                </a:solidFill>
+                <a:latin typeface="Segoe UI" panose="020B0502040204020203" pitchFamily="34" charset="0"/>
+              </a:rPr>
+              <a:t>SUPERVISED ML</a:t>
+            </a:r>
+          </a:p>
+        </p:txBody>
+      </p:sp>
+      <p:sp>
+        <p:nvSpPr>
+          <p:cNvPr id="4" name="TextBox 3">
+            <a:extLst>
+              <a:ext uri="{FF2B5EF4-FFF2-40B4-BE49-F238E27FC236}">
+                <a16:creationId xmlns:a16="http://schemas.microsoft.com/office/drawing/2014/main" id="{186C2F10-B022-60D4-86DA-5F37170D8F99}"/>
               </a:ext>
             </a:extLst>
           </p:cNvPr>
@@ -8164,8 +9570,8 @@
         </p:nvSpPr>
         <p:spPr>
           <a:xfrm>
-            <a:off x="508000" y="2603500"/>
-            <a:ext cx="3810000" cy="261610"/>
+            <a:off x="2349500" y="457200"/>
+            <a:ext cx="2159000" cy="230832"/>
           </a:xfrm>
           <a:prstGeom prst="rect">
             <a:avLst/>
@@ -8179,6 +9585,200 @@
           <a:lstStyle/>
           <a:p>
             <a:r>
+              <a:rPr lang="en-IN" sz="900" b="1">
+                <a:solidFill>
+                  <a:srgbClr val="94A3B8"/>
+                </a:solidFill>
+                <a:latin typeface="Segoe UI" panose="020B0502040204020203" pitchFamily="34" charset="0"/>
+              </a:rPr>
+              <a:t>PROJECT 07 OF 11</a:t>
+            </a:r>
+          </a:p>
+        </p:txBody>
+      </p:sp>
+      <p:sp>
+        <p:nvSpPr>
+          <p:cNvPr id="5" name="TextBox 4">
+            <a:extLst>
+              <a:ext uri="{FF2B5EF4-FFF2-40B4-BE49-F238E27FC236}">
+                <a16:creationId xmlns:a16="http://schemas.microsoft.com/office/drawing/2014/main" id="{ABDABA07-111A-27E2-FC72-EDDCDC2FB477}"/>
+              </a:ext>
+            </a:extLst>
+          </p:cNvPr>
+          <p:cNvSpPr txBox="1"/>
+          <p:nvPr/>
+        </p:nvSpPr>
+        <p:spPr>
+          <a:xfrm>
+            <a:off x="508000" y="787400"/>
+            <a:ext cx="3810000" cy="769441"/>
+          </a:xfrm>
+          <a:prstGeom prst="rect">
+            <a:avLst/>
+          </a:prstGeom>
+          <a:noFill/>
+        </p:spPr>
+        <p:txBody>
+          <a:bodyPr vert="horz" wrap="square" rtlCol="0">
+            <a:spAutoFit/>
+          </a:bodyPr>
+          <a:lstStyle/>
+          <a:p>
+            <a:r>
+              <a:rPr lang="en-IN" sz="2200" b="1">
+                <a:solidFill>
+                  <a:srgbClr val="FFFFFF"/>
+                </a:solidFill>
+                <a:latin typeface="Segoe UI" panose="020B0502040204020203" pitchFamily="34" charset="0"/>
+              </a:rPr>
+              <a:t>Insurance Logistic Regression</a:t>
+            </a:r>
+          </a:p>
+        </p:txBody>
+      </p:sp>
+      <p:sp>
+        <p:nvSpPr>
+          <p:cNvPr id="6" name="TextBox 5">
+            <a:extLst>
+              <a:ext uri="{FF2B5EF4-FFF2-40B4-BE49-F238E27FC236}">
+                <a16:creationId xmlns:a16="http://schemas.microsoft.com/office/drawing/2014/main" id="{880A4D21-FCE3-3C86-89A6-3E05322D8752}"/>
+              </a:ext>
+            </a:extLst>
+          </p:cNvPr>
+          <p:cNvSpPr txBox="1"/>
+          <p:nvPr/>
+        </p:nvSpPr>
+        <p:spPr>
+          <a:xfrm>
+            <a:off x="508000" y="1714500"/>
+            <a:ext cx="3810000" cy="461665"/>
+          </a:xfrm>
+          <a:prstGeom prst="rect">
+            <a:avLst/>
+          </a:prstGeom>
+          <a:noFill/>
+        </p:spPr>
+        <p:txBody>
+          <a:bodyPr vert="horz" wrap="square" rtlCol="0">
+            <a:spAutoFit/>
+          </a:bodyPr>
+          <a:lstStyle/>
+          <a:p>
+            <a:r>
+              <a:rPr lang="en-US" sz="1200">
+                <a:solidFill>
+                  <a:srgbClr val="94A3B8"/>
+                </a:solidFill>
+                <a:latin typeface="Segoe UI" panose="020B0502040204020203" pitchFamily="34" charset="0"/>
+              </a:rPr>
+              <a:t>Classification model predicting whether a customer will purchase insurance based on age</a:t>
+            </a:r>
+            <a:endParaRPr lang="en-IN" sz="1200">
+              <a:solidFill>
+                <a:srgbClr val="94A3B8"/>
+              </a:solidFill>
+              <a:latin typeface="Segoe UI" panose="020B0502040204020203" pitchFamily="34" charset="0"/>
+            </a:endParaRPr>
+          </a:p>
+        </p:txBody>
+      </p:sp>
+      <p:sp>
+        <p:nvSpPr>
+          <p:cNvPr id="7" name="Rectangle 6">
+            <a:extLst>
+              <a:ext uri="{FF2B5EF4-FFF2-40B4-BE49-F238E27FC236}">
+                <a16:creationId xmlns:a16="http://schemas.microsoft.com/office/drawing/2014/main" id="{1167FBF7-181D-AE7E-C547-D11514D74248}"/>
+              </a:ext>
+            </a:extLst>
+          </p:cNvPr>
+          <p:cNvSpPr/>
+          <p:nvPr/>
+        </p:nvSpPr>
+        <p:spPr>
+          <a:xfrm>
+            <a:off x="508000" y="2476500"/>
+            <a:ext cx="762000" cy="25400"/>
+          </a:xfrm>
+          <a:prstGeom prst="rect">
+            <a:avLst/>
+          </a:prstGeom>
+          <a:solidFill>
+            <a:srgbClr val="06B6D4"/>
+          </a:solidFill>
+          <a:ln w="19050" cap="flat" cmpd="sng" algn="ctr">
+            <a:noFill/>
+            <a:prstDash val="solid"/>
+            <a:miter lim="800000"/>
+          </a:ln>
+          <a:effectLst/>
+          <a:extLst>
+            <a:ext uri="{91240B29-F687-4F45-9708-019B960494DF}">
+              <a14:hiddenLine xmlns:a14="http://schemas.microsoft.com/office/drawing/2010/main" w="19050" cap="flat" cmpd="sng" algn="ctr">
+                <a:solidFill>
+                  <a:schemeClr val="accent1">
+                    <a:shade val="15000"/>
+                  </a:schemeClr>
+                </a:solidFill>
+                <a:prstDash val="solid"/>
+                <a:miter lim="800000"/>
+              </a14:hiddenLine>
+            </a:ext>
+          </a:extLst>
+        </p:spPr>
+        <p:style>
+          <a:lnRef idx="2">
+            <a:schemeClr val="accent1">
+              <a:shade val="15000"/>
+            </a:schemeClr>
+          </a:lnRef>
+          <a:fillRef idx="1">
+            <a:schemeClr val="accent1"/>
+          </a:fillRef>
+          <a:effectRef idx="0">
+            <a:schemeClr val="accent1"/>
+          </a:effectRef>
+          <a:fontRef idx="minor">
+            <a:schemeClr val="lt1"/>
+          </a:fontRef>
+        </p:style>
+        <p:txBody>
+          <a:bodyPr rtlCol="0" anchor="ctr"/>
+          <a:lstStyle/>
+          <a:p>
+            <a:pPr algn="ctr"/>
+            <a:endParaRPr lang="en-IN"/>
+          </a:p>
+        </p:txBody>
+      </p:sp>
+      <p:sp>
+        <p:nvSpPr>
+          <p:cNvPr id="8" name="TextBox 7">
+            <a:extLst>
+              <a:ext uri="{FF2B5EF4-FFF2-40B4-BE49-F238E27FC236}">
+                <a16:creationId xmlns:a16="http://schemas.microsoft.com/office/drawing/2014/main" id="{B8961726-7F1D-6ABF-DCF8-FB517C783011}"/>
+              </a:ext>
+            </a:extLst>
+          </p:cNvPr>
+          <p:cNvSpPr txBox="1"/>
+          <p:nvPr/>
+        </p:nvSpPr>
+        <p:spPr>
+          <a:xfrm>
+            <a:off x="508000" y="2603500"/>
+            <a:ext cx="3810000" cy="261610"/>
+          </a:xfrm>
+          <a:prstGeom prst="rect">
+            <a:avLst/>
+          </a:prstGeom>
+          <a:noFill/>
+        </p:spPr>
+        <p:txBody>
+          <a:bodyPr vert="horz" rtlCol="0">
+            <a:spAutoFit/>
+          </a:bodyPr>
+          <a:lstStyle/>
+          <a:p>
+            <a:r>
               <a:rPr lang="en-IN" sz="1100" b="1">
                 <a:solidFill>
                   <a:srgbClr val="FB923C"/>
@@ -8192,10 +9792,10 @@
       </p:sp>
       <p:sp>
         <p:nvSpPr>
-          <p:cNvPr id="7" name="TextBox 6">
-            <a:extLst>
-              <a:ext uri="{FF2B5EF4-FFF2-40B4-BE49-F238E27FC236}">
-                <a16:creationId xmlns:a16="http://schemas.microsoft.com/office/drawing/2014/main" id="{D5BECB5E-4B67-4BDB-8D2C-482D08634482}"/>
+          <p:cNvPr id="9" name="TextBox 8">
+            <a:extLst>
+              <a:ext uri="{FF2B5EF4-FFF2-40B4-BE49-F238E27FC236}">
+                <a16:creationId xmlns:a16="http://schemas.microsoft.com/office/drawing/2014/main" id="{FC42047C-0A1C-6DAA-66A2-46B513761DBB}"/>
               </a:ext>
             </a:extLst>
           </p:cNvPr>
@@ -8225,9 +9825,9 @@
                 </a:solidFill>
                 <a:latin typeface="Segoe UI" panose="020B0502040204020203" pitchFamily="34" charset="0"/>
               </a:rPr>
-              <a:t>â€¢ Probability sigmoid curve visualization mapping predictions.
-â€¢ Decision boundary locator at 40.5 years shown on the graph.
-â€¢ Interactive age input slider with probability estimation.</a:t>
+              <a:t>- Probability sigmoid curve visualization mapping predictions.
+- Decision boundary locator at 40.5 years shown on the graph.
+- Interactive age input slider with probability estimation.</a:t>
             </a:r>
             <a:endParaRPr lang="en-IN" sz="1100">
               <a:solidFill>
@@ -8240,43 +9840,65 @@
       </p:sp>
       <p:sp>
         <p:nvSpPr>
-          <p:cNvPr id="8" name="TextBox 7">
-            <a:extLst>
-              <a:ext uri="{FF2B5EF4-FFF2-40B4-BE49-F238E27FC236}">
-                <a16:creationId xmlns:a16="http://schemas.microsoft.com/office/drawing/2014/main" id="{34239AAE-8602-FD68-A6B5-412EEF42117E}"/>
-              </a:ext>
-            </a:extLst>
-          </p:cNvPr>
-          <p:cNvSpPr txBox="1"/>
-          <p:nvPr/>
-        </p:nvSpPr>
-        <p:spPr>
-          <a:xfrm>
-            <a:off x="508000" y="5461000"/>
-            <a:ext cx="3810000" cy="430887"/>
-          </a:xfrm>
-          <a:prstGeom prst="rect">
-            <a:avLst/>
-          </a:prstGeom>
-          <a:noFill/>
-        </p:spPr>
-        <p:txBody>
-          <a:bodyPr vert="horz" wrap="square" rtlCol="0">
-            <a:spAutoFit/>
-          </a:bodyPr>
-          <a:lstStyle/>
-          <a:p>
-            <a:r>
-              <a:rPr lang="en-US" sz="1100" b="1">
+          <p:cNvPr id="10" name="Rectangle: Rounded Corners 9">
+            <a:extLst>
+              <a:ext uri="{FF2B5EF4-FFF2-40B4-BE49-F238E27FC236}">
+                <a16:creationId xmlns:a16="http://schemas.microsoft.com/office/drawing/2014/main" id="{E51B287A-6C36-8EA9-F101-F8DB2B999430}"/>
+              </a:ext>
+            </a:extLst>
+          </p:cNvPr>
+          <p:cNvSpPr/>
+          <p:nvPr/>
+        </p:nvSpPr>
+        <p:spPr>
+          <a:xfrm>
+            <a:off x="508000" y="5397500"/>
+            <a:ext cx="3810000" cy="635000"/>
+          </a:xfrm>
+          <a:prstGeom prst="roundRect">
+            <a:avLst/>
+          </a:prstGeom>
+          <a:solidFill>
+            <a:srgbClr val="1E293B"/>
+          </a:solidFill>
+          <a:ln w="12700">
+            <a:solidFill>
+              <a:srgbClr val="06B6D4"/>
+            </a:solidFill>
+          </a:ln>
+        </p:spPr>
+        <p:style>
+          <a:lnRef idx="2">
+            <a:schemeClr val="accent1">
+              <a:shade val="15000"/>
+            </a:schemeClr>
+          </a:lnRef>
+          <a:fillRef idx="1">
+            <a:schemeClr val="accent1"/>
+          </a:fillRef>
+          <a:effectRef idx="0">
+            <a:schemeClr val="accent1"/>
+          </a:effectRef>
+          <a:fontRef idx="minor">
+            <a:schemeClr val="lt1"/>
+          </a:fontRef>
+        </p:style>
+        <p:txBody>
+          <a:bodyPr rtlCol="0" anchor="ctr"/>
+          <a:lstStyle/>
+          <a:p>
+            <a:pPr algn="ctr"/>
+            <a:r>
+              <a:rPr lang="en-US" sz="900" b="1">
                 <a:solidFill>
                   <a:srgbClr val="06B6D4"/>
                 </a:solidFill>
                 <a:latin typeface="Segoe UI" panose="020B0502040204020203" pitchFamily="34" charset="0"/>
               </a:rPr>
-              <a:t>TECH STACK:
+              <a:t>TECH STACK
 Streamlit, Scikit-learn, Plotly, Pandas</a:t>
             </a:r>
-            <a:endParaRPr lang="en-IN" sz="1100" b="1">
+            <a:endParaRPr lang="en-IN" sz="900" b="1">
               <a:solidFill>
                 <a:srgbClr val="06B6D4"/>
               </a:solidFill>
@@ -8287,10 +9909,10 @@
       </p:sp>
       <p:sp>
         <p:nvSpPr>
-          <p:cNvPr id="9" name="Rectangle 8">
-            <a:extLst>
-              <a:ext uri="{FF2B5EF4-FFF2-40B4-BE49-F238E27FC236}">
-                <a16:creationId xmlns:a16="http://schemas.microsoft.com/office/drawing/2014/main" id="{BC918AB5-6321-415A-5C3A-B873C7B0BEBD}"/>
+          <p:cNvPr id="11" name="Rectangle: Rounded Corners 10">
+            <a:extLst>
+              <a:ext uri="{FF2B5EF4-FFF2-40B4-BE49-F238E27FC236}">
+                <a16:creationId xmlns:a16="http://schemas.microsoft.com/office/drawing/2014/main" id="{A5269B8B-336D-BA4E-E88A-EBD87A7F4BA4}"/>
               </a:ext>
             </a:extLst>
           </p:cNvPr>
@@ -8302,7 +9924,7 @@
             <a:off x="4445000" y="1143000"/>
             <a:ext cx="7366000" cy="4318000"/>
           </a:xfrm>
-          <a:prstGeom prst="rect">
+          <a:prstGeom prst="roundRect">
             <a:avLst/>
           </a:prstGeom>
           <a:solidFill>
@@ -8355,10 +9977,10 @@
       </p:sp>
       <p:pic>
         <p:nvPicPr>
-          <p:cNvPr id="11" name="Picture 10">
-            <a:extLst>
-              <a:ext uri="{FF2B5EF4-FFF2-40B4-BE49-F238E27FC236}">
-                <a16:creationId xmlns:a16="http://schemas.microsoft.com/office/drawing/2014/main" id="{9F7A44B2-E950-19E2-2B65-DFB4DD5EE064}"/>
+          <p:cNvPr id="13" name="Picture 12">
+            <a:extLst>
+              <a:ext uri="{FF2B5EF4-FFF2-40B4-BE49-F238E27FC236}">
+                <a16:creationId xmlns:a16="http://schemas.microsoft.com/office/drawing/2014/main" id="{06FB7F25-F45E-84A9-A124-F42A8E9163EF}"/>
               </a:ext>
             </a:extLst>
           </p:cNvPr>
@@ -8397,7 +10019,7 @@
     </p:spTree>
     <p:extLst>
       <p:ext uri="{BB962C8B-B14F-4D97-AF65-F5344CB8AC3E}">
-        <p14:creationId xmlns:p14="http://schemas.microsoft.com/office/powerpoint/2010/main" val="1945882114"/>
+        <p14:creationId xmlns:p14="http://schemas.microsoft.com/office/powerpoint/2010/main" val="2817151271"/>
       </p:ext>
     </p:extLst>
   </p:cSld>
@@ -8426,158 +10048,26 @@
       </p:grpSpPr>
       <p:sp>
         <p:nvSpPr>
-          <p:cNvPr id="2" name="TextBox 1">
-            <a:extLst>
-              <a:ext uri="{FF2B5EF4-FFF2-40B4-BE49-F238E27FC236}">
-                <a16:creationId xmlns:a16="http://schemas.microsoft.com/office/drawing/2014/main" id="{F708E5BE-A8FB-8476-6BD2-3AD44121A347}"/>
-              </a:ext>
-            </a:extLst>
-          </p:cNvPr>
-          <p:cNvSpPr txBox="1"/>
-          <p:nvPr/>
-        </p:nvSpPr>
-        <p:spPr>
-          <a:xfrm>
-            <a:off x="508000" y="508000"/>
-            <a:ext cx="3810000" cy="400110"/>
+          <p:cNvPr id="2" name="Rectangle 1">
+            <a:extLst>
+              <a:ext uri="{FF2B5EF4-FFF2-40B4-BE49-F238E27FC236}">
+                <a16:creationId xmlns:a16="http://schemas.microsoft.com/office/drawing/2014/main" id="{628D8676-1337-91AA-435E-6892914398D3}"/>
+              </a:ext>
+            </a:extLst>
+          </p:cNvPr>
+          <p:cNvSpPr/>
+          <p:nvPr/>
+        </p:nvSpPr>
+        <p:spPr>
+          <a:xfrm>
+            <a:off x="0" y="0"/>
+            <a:ext cx="76200" cy="6858000"/>
           </a:xfrm>
           <a:prstGeom prst="rect">
             <a:avLst/>
           </a:prstGeom>
-          <a:noFill/>
-        </p:spPr>
-        <p:txBody>
-          <a:bodyPr vert="horz" rtlCol="0">
-            <a:spAutoFit/>
-          </a:bodyPr>
-          <a:lstStyle/>
-          <a:p>
-            <a:r>
-              <a:rPr lang="en-US" sz="1000" b="1">
-                <a:solidFill>
-                  <a:srgbClr val="94A3B8"/>
-                </a:solidFill>
-                <a:latin typeface="Segoe UI" panose="020B0502040204020203" pitchFamily="34" charset="0"/>
-              </a:rPr>
-              <a:t>PROJECT 08 OF 11  â€¢  RETRIEVAL-AUGMENTED GENERATION (RAG) &amp; LLMS</a:t>
-            </a:r>
-            <a:endParaRPr lang="en-IN" sz="1000" b="1">
-              <a:solidFill>
-                <a:srgbClr val="94A3B8"/>
-              </a:solidFill>
-              <a:latin typeface="Segoe UI" panose="020B0502040204020203" pitchFamily="34" charset="0"/>
-            </a:endParaRPr>
-          </a:p>
-        </p:txBody>
-      </p:sp>
-      <p:sp>
-        <p:nvSpPr>
-          <p:cNvPr id="3" name="TextBox 2">
-            <a:extLst>
-              <a:ext uri="{FF2B5EF4-FFF2-40B4-BE49-F238E27FC236}">
-                <a16:creationId xmlns:a16="http://schemas.microsoft.com/office/drawing/2014/main" id="{9B11552A-4249-A417-E101-251A20D6C76A}"/>
-              </a:ext>
-            </a:extLst>
-          </p:cNvPr>
-          <p:cNvSpPr txBox="1"/>
-          <p:nvPr/>
-        </p:nvSpPr>
-        <p:spPr>
-          <a:xfrm>
-            <a:off x="508000" y="762000"/>
-            <a:ext cx="3810000" cy="769441"/>
-          </a:xfrm>
-          <a:prstGeom prst="rect">
-            <a:avLst/>
-          </a:prstGeom>
-          <a:noFill/>
-        </p:spPr>
-        <p:txBody>
-          <a:bodyPr vert="horz" wrap="square" rtlCol="0">
-            <a:spAutoFit/>
-          </a:bodyPr>
-          <a:lstStyle/>
-          <a:p>
-            <a:r>
-              <a:rPr lang="en-IN" sz="2200" b="1">
-                <a:solidFill>
-                  <a:srgbClr val="FFFFFF"/>
-                </a:solidFill>
-                <a:latin typeface="Segoe UI" panose="020B0502040204020203" pitchFamily="34" charset="0"/>
-              </a:rPr>
-              <a:t>Samsung Washing Machine Assistant</a:t>
-            </a:r>
-          </a:p>
-        </p:txBody>
-      </p:sp>
-      <p:sp>
-        <p:nvSpPr>
-          <p:cNvPr id="4" name="TextBox 3">
-            <a:extLst>
-              <a:ext uri="{FF2B5EF4-FFF2-40B4-BE49-F238E27FC236}">
-                <a16:creationId xmlns:a16="http://schemas.microsoft.com/office/drawing/2014/main" id="{CCD091F2-E914-96B4-DA2D-90ED62549004}"/>
-              </a:ext>
-            </a:extLst>
-          </p:cNvPr>
-          <p:cNvSpPr txBox="1"/>
-          <p:nvPr/>
-        </p:nvSpPr>
-        <p:spPr>
-          <a:xfrm>
-            <a:off x="508000" y="1714500"/>
-            <a:ext cx="3810000" cy="461665"/>
-          </a:xfrm>
-          <a:prstGeom prst="rect">
-            <a:avLst/>
-          </a:prstGeom>
-          <a:noFill/>
-        </p:spPr>
-        <p:txBody>
-          <a:bodyPr vert="horz" wrap="square" rtlCol="0">
-            <a:spAutoFit/>
-          </a:bodyPr>
-          <a:lstStyle/>
-          <a:p>
-            <a:r>
-              <a:rPr lang="en-US" sz="1200">
-                <a:solidFill>
-                  <a:srgbClr val="94A3B8"/>
-                </a:solidFill>
-                <a:latin typeface="Segoe UI" panose="020B0502040204020203" pitchFamily="34" charset="0"/>
-              </a:rPr>
-              <a:t>AI-powered conversational assistant answering questions about user manuals</a:t>
-            </a:r>
-            <a:endParaRPr lang="en-IN" sz="1200">
-              <a:solidFill>
-                <a:srgbClr val="94A3B8"/>
-              </a:solidFill>
-              <a:latin typeface="Segoe UI" panose="020B0502040204020203" pitchFamily="34" charset="0"/>
-            </a:endParaRPr>
-          </a:p>
-        </p:txBody>
-      </p:sp>
-      <p:sp>
-        <p:nvSpPr>
-          <p:cNvPr id="5" name="Rectangle 4">
-            <a:extLst>
-              <a:ext uri="{FF2B5EF4-FFF2-40B4-BE49-F238E27FC236}">
-                <a16:creationId xmlns:a16="http://schemas.microsoft.com/office/drawing/2014/main" id="{C9869AE1-F092-51B2-4227-021E2C4EE01C}"/>
-              </a:ext>
-            </a:extLst>
-          </p:cNvPr>
-          <p:cNvSpPr/>
-          <p:nvPr/>
-        </p:nvSpPr>
-        <p:spPr>
-          <a:xfrm>
-            <a:off x="508000" y="2476500"/>
-            <a:ext cx="762000" cy="38100"/>
-          </a:xfrm>
-          <a:prstGeom prst="rect">
-            <a:avLst/>
-          </a:prstGeom>
           <a:solidFill>
-            <a:srgbClr val="06B6D4"/>
+            <a:srgbClr val="FB923C"/>
           </a:solidFill>
           <a:ln w="19050" cap="flat" cmpd="sng" algn="ctr">
             <a:noFill/>
@@ -8626,10 +10116,72 @@
       </p:sp>
       <p:sp>
         <p:nvSpPr>
-          <p:cNvPr id="6" name="TextBox 5">
-            <a:extLst>
-              <a:ext uri="{FF2B5EF4-FFF2-40B4-BE49-F238E27FC236}">
-                <a16:creationId xmlns:a16="http://schemas.microsoft.com/office/drawing/2014/main" id="{A80082F5-8B8C-27F9-206D-3FACFB37C86C}"/>
+          <p:cNvPr id="3" name="Rectangle: Rounded Corners 2">
+            <a:extLst>
+              <a:ext uri="{FF2B5EF4-FFF2-40B4-BE49-F238E27FC236}">
+                <a16:creationId xmlns:a16="http://schemas.microsoft.com/office/drawing/2014/main" id="{D8688EC9-5668-7FB9-1425-761003CEA776}"/>
+              </a:ext>
+            </a:extLst>
+          </p:cNvPr>
+          <p:cNvSpPr/>
+          <p:nvPr/>
+        </p:nvSpPr>
+        <p:spPr>
+          <a:xfrm>
+            <a:off x="508000" y="457200"/>
+            <a:ext cx="1651000" cy="254000"/>
+          </a:xfrm>
+          <a:prstGeom prst="roundRect">
+            <a:avLst/>
+          </a:prstGeom>
+          <a:solidFill>
+            <a:srgbClr val="1E293B"/>
+          </a:solidFill>
+          <a:ln w="12700">
+            <a:solidFill>
+              <a:srgbClr val="FB923C"/>
+            </a:solidFill>
+          </a:ln>
+        </p:spPr>
+        <p:style>
+          <a:lnRef idx="2">
+            <a:schemeClr val="accent1">
+              <a:shade val="15000"/>
+            </a:schemeClr>
+          </a:lnRef>
+          <a:fillRef idx="1">
+            <a:schemeClr val="accent1"/>
+          </a:fillRef>
+          <a:effectRef idx="0">
+            <a:schemeClr val="accent1"/>
+          </a:effectRef>
+          <a:fontRef idx="minor">
+            <a:schemeClr val="lt1"/>
+          </a:fontRef>
+        </p:style>
+        <p:txBody>
+          <a:bodyPr rtlCol="0" anchor="ctr"/>
+          <a:lstStyle/>
+          <a:p>
+            <a:pPr algn="ctr"/>
+            <a:r>
+              <a:rPr lang="en-IN" sz="900" b="1">
+                <a:solidFill>
+                  <a:srgbClr val="FFFFFF"/>
+                </a:solidFill>
+                <a:latin typeface="Segoe UI" panose="020B0502040204020203" pitchFamily="34" charset="0"/>
+              </a:rPr>
+              <a:t>NLP &amp; LLM</a:t>
+            </a:r>
+          </a:p>
+        </p:txBody>
+      </p:sp>
+      <p:sp>
+        <p:nvSpPr>
+          <p:cNvPr id="4" name="TextBox 3">
+            <a:extLst>
+              <a:ext uri="{FF2B5EF4-FFF2-40B4-BE49-F238E27FC236}">
+                <a16:creationId xmlns:a16="http://schemas.microsoft.com/office/drawing/2014/main" id="{9B99E87A-2C2C-FD77-D9C9-C23B6D7532A7}"/>
               </a:ext>
             </a:extLst>
           </p:cNvPr>
@@ -8638,8 +10190,8 @@
         </p:nvSpPr>
         <p:spPr>
           <a:xfrm>
-            <a:off x="508000" y="2603500"/>
-            <a:ext cx="3810000" cy="261610"/>
+            <a:off x="2349500" y="457200"/>
+            <a:ext cx="2159000" cy="230832"/>
           </a:xfrm>
           <a:prstGeom prst="rect">
             <a:avLst/>
@@ -8653,6 +10205,200 @@
           <a:lstStyle/>
           <a:p>
             <a:r>
+              <a:rPr lang="en-IN" sz="900" b="1">
+                <a:solidFill>
+                  <a:srgbClr val="94A3B8"/>
+                </a:solidFill>
+                <a:latin typeface="Segoe UI" panose="020B0502040204020203" pitchFamily="34" charset="0"/>
+              </a:rPr>
+              <a:t>PROJECT 08 OF 11</a:t>
+            </a:r>
+          </a:p>
+        </p:txBody>
+      </p:sp>
+      <p:sp>
+        <p:nvSpPr>
+          <p:cNvPr id="5" name="TextBox 4">
+            <a:extLst>
+              <a:ext uri="{FF2B5EF4-FFF2-40B4-BE49-F238E27FC236}">
+                <a16:creationId xmlns:a16="http://schemas.microsoft.com/office/drawing/2014/main" id="{E047C459-18B5-FBA4-645C-454BF0E36204}"/>
+              </a:ext>
+            </a:extLst>
+          </p:cNvPr>
+          <p:cNvSpPr txBox="1"/>
+          <p:nvPr/>
+        </p:nvSpPr>
+        <p:spPr>
+          <a:xfrm>
+            <a:off x="508000" y="787400"/>
+            <a:ext cx="3810000" cy="769441"/>
+          </a:xfrm>
+          <a:prstGeom prst="rect">
+            <a:avLst/>
+          </a:prstGeom>
+          <a:noFill/>
+        </p:spPr>
+        <p:txBody>
+          <a:bodyPr vert="horz" wrap="square" rtlCol="0">
+            <a:spAutoFit/>
+          </a:bodyPr>
+          <a:lstStyle/>
+          <a:p>
+            <a:r>
+              <a:rPr lang="en-IN" sz="2200" b="1">
+                <a:solidFill>
+                  <a:srgbClr val="FFFFFF"/>
+                </a:solidFill>
+                <a:latin typeface="Segoe UI" panose="020B0502040204020203" pitchFamily="34" charset="0"/>
+              </a:rPr>
+              <a:t>Samsung Washing Machine Assistant</a:t>
+            </a:r>
+          </a:p>
+        </p:txBody>
+      </p:sp>
+      <p:sp>
+        <p:nvSpPr>
+          <p:cNvPr id="6" name="TextBox 5">
+            <a:extLst>
+              <a:ext uri="{FF2B5EF4-FFF2-40B4-BE49-F238E27FC236}">
+                <a16:creationId xmlns:a16="http://schemas.microsoft.com/office/drawing/2014/main" id="{F2E6FF98-B39D-8AD4-9BEC-7DC051B9B2E1}"/>
+              </a:ext>
+            </a:extLst>
+          </p:cNvPr>
+          <p:cNvSpPr txBox="1"/>
+          <p:nvPr/>
+        </p:nvSpPr>
+        <p:spPr>
+          <a:xfrm>
+            <a:off x="508000" y="1714500"/>
+            <a:ext cx="3810000" cy="461665"/>
+          </a:xfrm>
+          <a:prstGeom prst="rect">
+            <a:avLst/>
+          </a:prstGeom>
+          <a:noFill/>
+        </p:spPr>
+        <p:txBody>
+          <a:bodyPr vert="horz" wrap="square" rtlCol="0">
+            <a:spAutoFit/>
+          </a:bodyPr>
+          <a:lstStyle/>
+          <a:p>
+            <a:r>
+              <a:rPr lang="en-US" sz="1200">
+                <a:solidFill>
+                  <a:srgbClr val="94A3B8"/>
+                </a:solidFill>
+                <a:latin typeface="Segoe UI" panose="020B0502040204020203" pitchFamily="34" charset="0"/>
+              </a:rPr>
+              <a:t>AI-powered conversational assistant answering questions about user manuals</a:t>
+            </a:r>
+            <a:endParaRPr lang="en-IN" sz="1200">
+              <a:solidFill>
+                <a:srgbClr val="94A3B8"/>
+              </a:solidFill>
+              <a:latin typeface="Segoe UI" panose="020B0502040204020203" pitchFamily="34" charset="0"/>
+            </a:endParaRPr>
+          </a:p>
+        </p:txBody>
+      </p:sp>
+      <p:sp>
+        <p:nvSpPr>
+          <p:cNvPr id="7" name="Rectangle 6">
+            <a:extLst>
+              <a:ext uri="{FF2B5EF4-FFF2-40B4-BE49-F238E27FC236}">
+                <a16:creationId xmlns:a16="http://schemas.microsoft.com/office/drawing/2014/main" id="{785009E9-5CC9-642C-29D5-080D5041FE8F}"/>
+              </a:ext>
+            </a:extLst>
+          </p:cNvPr>
+          <p:cNvSpPr/>
+          <p:nvPr/>
+        </p:nvSpPr>
+        <p:spPr>
+          <a:xfrm>
+            <a:off x="508000" y="2476500"/>
+            <a:ext cx="762000" cy="25400"/>
+          </a:xfrm>
+          <a:prstGeom prst="rect">
+            <a:avLst/>
+          </a:prstGeom>
+          <a:solidFill>
+            <a:srgbClr val="FB923C"/>
+          </a:solidFill>
+          <a:ln w="19050" cap="flat" cmpd="sng" algn="ctr">
+            <a:noFill/>
+            <a:prstDash val="solid"/>
+            <a:miter lim="800000"/>
+          </a:ln>
+          <a:effectLst/>
+          <a:extLst>
+            <a:ext uri="{91240B29-F687-4F45-9708-019B960494DF}">
+              <a14:hiddenLine xmlns:a14="http://schemas.microsoft.com/office/drawing/2010/main" w="19050" cap="flat" cmpd="sng" algn="ctr">
+                <a:solidFill>
+                  <a:schemeClr val="accent1">
+                    <a:shade val="15000"/>
+                  </a:schemeClr>
+                </a:solidFill>
+                <a:prstDash val="solid"/>
+                <a:miter lim="800000"/>
+              </a14:hiddenLine>
+            </a:ext>
+          </a:extLst>
+        </p:spPr>
+        <p:style>
+          <a:lnRef idx="2">
+            <a:schemeClr val="accent1">
+              <a:shade val="15000"/>
+            </a:schemeClr>
+          </a:lnRef>
+          <a:fillRef idx="1">
+            <a:schemeClr val="accent1"/>
+          </a:fillRef>
+          <a:effectRef idx="0">
+            <a:schemeClr val="accent1"/>
+          </a:effectRef>
+          <a:fontRef idx="minor">
+            <a:schemeClr val="lt1"/>
+          </a:fontRef>
+        </p:style>
+        <p:txBody>
+          <a:bodyPr rtlCol="0" anchor="ctr"/>
+          <a:lstStyle/>
+          <a:p>
+            <a:pPr algn="ctr"/>
+            <a:endParaRPr lang="en-IN"/>
+          </a:p>
+        </p:txBody>
+      </p:sp>
+      <p:sp>
+        <p:nvSpPr>
+          <p:cNvPr id="8" name="TextBox 7">
+            <a:extLst>
+              <a:ext uri="{FF2B5EF4-FFF2-40B4-BE49-F238E27FC236}">
+                <a16:creationId xmlns:a16="http://schemas.microsoft.com/office/drawing/2014/main" id="{CC1448C3-D323-8F91-C47B-73862E44CBC1}"/>
+              </a:ext>
+            </a:extLst>
+          </p:cNvPr>
+          <p:cNvSpPr txBox="1"/>
+          <p:nvPr/>
+        </p:nvSpPr>
+        <p:spPr>
+          <a:xfrm>
+            <a:off x="508000" y="2603500"/>
+            <a:ext cx="3810000" cy="261610"/>
+          </a:xfrm>
+          <a:prstGeom prst="rect">
+            <a:avLst/>
+          </a:prstGeom>
+          <a:noFill/>
+        </p:spPr>
+        <p:txBody>
+          <a:bodyPr vert="horz" rtlCol="0">
+            <a:spAutoFit/>
+          </a:bodyPr>
+          <a:lstStyle/>
+          <a:p>
+            <a:r>
               <a:rPr lang="en-IN" sz="1100" b="1">
                 <a:solidFill>
                   <a:srgbClr val="FB923C"/>
@@ -8666,10 +10412,10 @@
       </p:sp>
       <p:sp>
         <p:nvSpPr>
-          <p:cNvPr id="7" name="TextBox 6">
-            <a:extLst>
-              <a:ext uri="{FF2B5EF4-FFF2-40B4-BE49-F238E27FC236}">
-                <a16:creationId xmlns:a16="http://schemas.microsoft.com/office/drawing/2014/main" id="{0D47CA21-E7D9-2546-9C43-D8172DC769E1}"/>
+          <p:cNvPr id="9" name="TextBox 8">
+            <a:extLst>
+              <a:ext uri="{FF2B5EF4-FFF2-40B4-BE49-F238E27FC236}">
+                <a16:creationId xmlns:a16="http://schemas.microsoft.com/office/drawing/2014/main" id="{9B46A4F3-8A3D-8D30-4F5B-EF3568CD1A1E}"/>
               </a:ext>
             </a:extLst>
           </p:cNvPr>
@@ -8679,7 +10425,7 @@
         <p:spPr>
           <a:xfrm>
             <a:off x="508000" y="2921000"/>
-            <a:ext cx="3810000" cy="1446550"/>
+            <a:ext cx="3810000" cy="1277273"/>
           </a:xfrm>
           <a:prstGeom prst="rect">
             <a:avLst/>
@@ -8699,52 +10445,74 @@
                 </a:solidFill>
                 <a:latin typeface="Segoe UI" panose="020B0502040204020203" pitchFamily="34" charset="0"/>
               </a:rPr>
-              <a:t>â€¢ PDF/HTML manual ingestion for custom context retrieval.
-â€¢ Contextual conversational Q&amp;A system powered by LLMs.
-â€¢ Built-in demo/mock mode fallback for offline testing without API keys.</a:t>
-            </a:r>
-          </a:p>
-        </p:txBody>
-      </p:sp>
-      <p:sp>
-        <p:nvSpPr>
-          <p:cNvPr id="8" name="TextBox 7">
-            <a:extLst>
-              <a:ext uri="{FF2B5EF4-FFF2-40B4-BE49-F238E27FC236}">
-                <a16:creationId xmlns:a16="http://schemas.microsoft.com/office/drawing/2014/main" id="{BEA0FDA4-0D01-D339-51F2-63886FD69271}"/>
-              </a:ext>
-            </a:extLst>
-          </p:cNvPr>
-          <p:cNvSpPr txBox="1"/>
-          <p:nvPr/>
-        </p:nvSpPr>
-        <p:spPr>
-          <a:xfrm>
-            <a:off x="508000" y="5461000"/>
-            <a:ext cx="3810000" cy="430887"/>
-          </a:xfrm>
-          <a:prstGeom prst="rect">
-            <a:avLst/>
-          </a:prstGeom>
-          <a:noFill/>
-        </p:spPr>
-        <p:txBody>
-          <a:bodyPr vert="horz" wrap="square" rtlCol="0">
-            <a:spAutoFit/>
-          </a:bodyPr>
-          <a:lstStyle/>
-          <a:p>
-            <a:r>
-              <a:rPr lang="en-US" sz="1100" b="1">
+              <a:t>- PDF/HTML manual ingestion for custom context retrieval.
+- Contextual conversational Q&amp;A system powered by LLMs.
+- Built-in demo/mock mode fallback for offline testing without API keys.</a:t>
+            </a:r>
+          </a:p>
+        </p:txBody>
+      </p:sp>
+      <p:sp>
+        <p:nvSpPr>
+          <p:cNvPr id="10" name="Rectangle: Rounded Corners 9">
+            <a:extLst>
+              <a:ext uri="{FF2B5EF4-FFF2-40B4-BE49-F238E27FC236}">
+                <a16:creationId xmlns:a16="http://schemas.microsoft.com/office/drawing/2014/main" id="{7050EFF9-CAAB-41CB-579D-03AC8D263977}"/>
+              </a:ext>
+            </a:extLst>
+          </p:cNvPr>
+          <p:cNvSpPr/>
+          <p:nvPr/>
+        </p:nvSpPr>
+        <p:spPr>
+          <a:xfrm>
+            <a:off x="508000" y="5397500"/>
+            <a:ext cx="3810000" cy="635000"/>
+          </a:xfrm>
+          <a:prstGeom prst="roundRect">
+            <a:avLst/>
+          </a:prstGeom>
+          <a:solidFill>
+            <a:srgbClr val="1E293B"/>
+          </a:solidFill>
+          <a:ln w="12700">
+            <a:solidFill>
+              <a:srgbClr val="06B6D4"/>
+            </a:solidFill>
+          </a:ln>
+        </p:spPr>
+        <p:style>
+          <a:lnRef idx="2">
+            <a:schemeClr val="accent1">
+              <a:shade val="15000"/>
+            </a:schemeClr>
+          </a:lnRef>
+          <a:fillRef idx="1">
+            <a:schemeClr val="accent1"/>
+          </a:fillRef>
+          <a:effectRef idx="0">
+            <a:schemeClr val="accent1"/>
+          </a:effectRef>
+          <a:fontRef idx="minor">
+            <a:schemeClr val="lt1"/>
+          </a:fontRef>
+        </p:style>
+        <p:txBody>
+          <a:bodyPr rtlCol="0" anchor="ctr"/>
+          <a:lstStyle/>
+          <a:p>
+            <a:pPr algn="ctr"/>
+            <a:r>
+              <a:rPr lang="en-US" sz="900" b="1">
                 <a:solidFill>
                   <a:srgbClr val="06B6D4"/>
                 </a:solidFill>
                 <a:latin typeface="Segoe UI" panose="020B0502040204020203" pitchFamily="34" charset="0"/>
               </a:rPr>
-              <a:t>TECH STACK:
+              <a:t>TECH STACK
 Streamlit, LangChain, OpenAI, Chromadb</a:t>
             </a:r>
-            <a:endParaRPr lang="en-IN" sz="1100" b="1">
+            <a:endParaRPr lang="en-IN" sz="900" b="1">
               <a:solidFill>
                 <a:srgbClr val="06B6D4"/>
               </a:solidFill>
@@ -8755,10 +10523,10 @@
       </p:sp>
       <p:sp>
         <p:nvSpPr>
-          <p:cNvPr id="9" name="Rectangle 8">
-            <a:extLst>
-              <a:ext uri="{FF2B5EF4-FFF2-40B4-BE49-F238E27FC236}">
-                <a16:creationId xmlns:a16="http://schemas.microsoft.com/office/drawing/2014/main" id="{F5425288-3CD4-235D-C9B9-D26359184035}"/>
+          <p:cNvPr id="11" name="Rectangle: Rounded Corners 10">
+            <a:extLst>
+              <a:ext uri="{FF2B5EF4-FFF2-40B4-BE49-F238E27FC236}">
+                <a16:creationId xmlns:a16="http://schemas.microsoft.com/office/drawing/2014/main" id="{DC8B1502-79B4-9F19-48F3-27E57A565F32}"/>
               </a:ext>
             </a:extLst>
           </p:cNvPr>
@@ -8770,7 +10538,7 @@
             <a:off x="4445000" y="1143000"/>
             <a:ext cx="7366000" cy="4318000"/>
           </a:xfrm>
-          <a:prstGeom prst="rect">
+          <a:prstGeom prst="roundRect">
             <a:avLst/>
           </a:prstGeom>
           <a:solidFill>
@@ -8823,10 +10591,10 @@
       </p:sp>
       <p:pic>
         <p:nvPicPr>
-          <p:cNvPr id="11" name="Picture 10">
-            <a:extLst>
-              <a:ext uri="{FF2B5EF4-FFF2-40B4-BE49-F238E27FC236}">
-                <a16:creationId xmlns:a16="http://schemas.microsoft.com/office/drawing/2014/main" id="{8B646C5F-01FD-56BB-4196-D02DA10F569F}"/>
+          <p:cNvPr id="13" name="Picture 12">
+            <a:extLst>
+              <a:ext uri="{FF2B5EF4-FFF2-40B4-BE49-F238E27FC236}">
+                <a16:creationId xmlns:a16="http://schemas.microsoft.com/office/drawing/2014/main" id="{AA6F8019-3E72-0DB9-E2AB-C3ACF32E5295}"/>
               </a:ext>
             </a:extLst>
           </p:cNvPr>
@@ -8865,7 +10633,7 @@
     </p:spTree>
     <p:extLst>
       <p:ext uri="{BB962C8B-B14F-4D97-AF65-F5344CB8AC3E}">
-        <p14:creationId xmlns:p14="http://schemas.microsoft.com/office/powerpoint/2010/main" val="815491796"/>
+        <p14:creationId xmlns:p14="http://schemas.microsoft.com/office/powerpoint/2010/main" val="957797275"/>
       </p:ext>
     </p:extLst>
   </p:cSld>
